--- a/Präsentationen/Lab_07_Folien.pptx
+++ b/Präsentationen/Lab_07_Folien.pptx
@@ -11,9 +11,9 @@
     <p:sldId id="463" r:id="rId2"/>
     <p:sldId id="455" r:id="rId3"/>
     <p:sldId id="464" r:id="rId4"/>
-    <p:sldId id="457" r:id="rId5"/>
-    <p:sldId id="465" r:id="rId6"/>
-    <p:sldId id="466" r:id="rId7"/>
+    <p:sldId id="466" r:id="rId5"/>
+    <p:sldId id="457" r:id="rId6"/>
+    <p:sldId id="465" r:id="rId7"/>
     <p:sldId id="467" r:id="rId8"/>
     <p:sldId id="461" r:id="rId9"/>
     <p:sldId id="462" r:id="rId10"/>
@@ -226,7 +226,7 @@
           <a:p>
             <a:fld id="{BB57A8F1-2E97-442A-A3DE-98A08CE3B9A6}" type="datetimeFigureOut">
               <a:rPr lang="de-DE" smtClean="0"/>
-              <a:t>24.09.2026</a:t>
+              <a:t>07.10.2026</a:t>
             </a:fld>
             <a:endParaRPr lang="de-DE"/>
           </a:p>
@@ -537,6 +537,185 @@
           <a:bodyPr/>
           <a:lstStyle/>
           <a:p>
+            <a:endParaRPr lang="de-DE" dirty="0"/>
+          </a:p>
+        </p:txBody>
+      </p:sp>
+      <p:sp>
+        <p:nvSpPr>
+          <p:cNvPr id="4" name="Foliennummernplatzhalter 3"/>
+          <p:cNvSpPr>
+            <a:spLocks noGrp="1"/>
+          </p:cNvSpPr>
+          <p:nvPr>
+            <p:ph type="sldNum" sz="quarter" idx="5"/>
+          </p:nvPr>
+        </p:nvSpPr>
+        <p:spPr/>
+        <p:txBody>
+          <a:bodyPr/>
+          <a:lstStyle/>
+          <a:p>
+            <a:fld id="{4BD5FE33-4217-42D2-A2B6-93ED6DCD092C}" type="slidenum">
+              <a:rPr lang="de-DE" smtClean="0"/>
+              <a:t>3</a:t>
+            </a:fld>
+            <a:endParaRPr lang="de-DE"/>
+          </a:p>
+        </p:txBody>
+      </p:sp>
+    </p:spTree>
+    <p:extLst>
+      <p:ext uri="{BB962C8B-B14F-4D97-AF65-F5344CB8AC3E}">
+        <p14:creationId xmlns:p14="http://schemas.microsoft.com/office/powerpoint/2010/main" val="1808667620"/>
+      </p:ext>
+    </p:extLst>
+  </p:cSld>
+  <p:clrMapOvr>
+    <a:masterClrMapping/>
+  </p:clrMapOvr>
+</p:notes>
+</file>
+
+<file path=ppt/notesSlides/notesSlide2.xml><?xml version="1.0" encoding="utf-8"?>
+<p:notes xmlns:a="http://schemas.openxmlformats.org/drawingml/2006/main" xmlns:r="http://schemas.openxmlformats.org/officeDocument/2006/relationships" xmlns:p="http://schemas.openxmlformats.org/presentationml/2006/main">
+  <p:cSld>
+    <p:spTree>
+      <p:nvGrpSpPr>
+        <p:cNvPr id="1" name=""/>
+        <p:cNvGrpSpPr/>
+        <p:nvPr/>
+      </p:nvGrpSpPr>
+      <p:grpSpPr>
+        <a:xfrm>
+          <a:off x="0" y="0"/>
+          <a:ext cx="0" cy="0"/>
+          <a:chOff x="0" y="0"/>
+          <a:chExt cx="0" cy="0"/>
+        </a:xfrm>
+      </p:grpSpPr>
+      <p:sp>
+        <p:nvSpPr>
+          <p:cNvPr id="2" name="Folienbildplatzhalter 1"/>
+          <p:cNvSpPr>
+            <a:spLocks noGrp="1" noRot="1" noChangeAspect="1"/>
+          </p:cNvSpPr>
+          <p:nvPr>
+            <p:ph type="sldImg"/>
+          </p:nvPr>
+        </p:nvSpPr>
+        <p:spPr/>
+      </p:sp>
+      <p:sp>
+        <p:nvSpPr>
+          <p:cNvPr id="3" name="Notizenplatzhalter 2"/>
+          <p:cNvSpPr>
+            <a:spLocks noGrp="1"/>
+          </p:cNvSpPr>
+          <p:nvPr>
+            <p:ph type="body" idx="1"/>
+          </p:nvPr>
+        </p:nvSpPr>
+        <p:spPr/>
+        <p:txBody>
+          <a:bodyPr/>
+          <a:lstStyle/>
+          <a:p>
+            <a:r>
+              <a:rPr lang="de-DE" dirty="0"/>
+              <a:t>IP </a:t>
+            </a:r>
+            <a:r>
+              <a:rPr lang="de-DE" dirty="0" err="1"/>
+              <a:t>Addressmanagement</a:t>
+            </a:r>
+            <a:r>
+              <a:rPr lang="de-DE" dirty="0"/>
+              <a:t> = IPAM</a:t>
+            </a:r>
+          </a:p>
+        </p:txBody>
+      </p:sp>
+      <p:sp>
+        <p:nvSpPr>
+          <p:cNvPr id="4" name="Foliennummernplatzhalter 3"/>
+          <p:cNvSpPr>
+            <a:spLocks noGrp="1"/>
+          </p:cNvSpPr>
+          <p:nvPr>
+            <p:ph type="sldNum" sz="quarter" idx="5"/>
+          </p:nvPr>
+        </p:nvSpPr>
+        <p:spPr/>
+        <p:txBody>
+          <a:bodyPr/>
+          <a:lstStyle/>
+          <a:p>
+            <a:fld id="{4BD5FE33-4217-42D2-A2B6-93ED6DCD092C}" type="slidenum">
+              <a:rPr lang="de-DE" smtClean="0"/>
+              <a:t>7</a:t>
+            </a:fld>
+            <a:endParaRPr lang="de-DE"/>
+          </a:p>
+        </p:txBody>
+      </p:sp>
+    </p:spTree>
+    <p:extLst>
+      <p:ext uri="{BB962C8B-B14F-4D97-AF65-F5344CB8AC3E}">
+        <p14:creationId xmlns:p14="http://schemas.microsoft.com/office/powerpoint/2010/main" val="2160219928"/>
+      </p:ext>
+    </p:extLst>
+  </p:cSld>
+  <p:clrMapOvr>
+    <a:masterClrMapping/>
+  </p:clrMapOvr>
+</p:notes>
+</file>
+
+<file path=ppt/notesSlides/notesSlide3.xml><?xml version="1.0" encoding="utf-8"?>
+<p:notes xmlns:a="http://schemas.openxmlformats.org/drawingml/2006/main" xmlns:r="http://schemas.openxmlformats.org/officeDocument/2006/relationships" xmlns:p="http://schemas.openxmlformats.org/presentationml/2006/main">
+  <p:cSld>
+    <p:spTree>
+      <p:nvGrpSpPr>
+        <p:cNvPr id="1" name=""/>
+        <p:cNvGrpSpPr/>
+        <p:nvPr/>
+      </p:nvGrpSpPr>
+      <p:grpSpPr>
+        <a:xfrm>
+          <a:off x="0" y="0"/>
+          <a:ext cx="0" cy="0"/>
+          <a:chOff x="0" y="0"/>
+          <a:chExt cx="0" cy="0"/>
+        </a:xfrm>
+      </p:grpSpPr>
+      <p:sp>
+        <p:nvSpPr>
+          <p:cNvPr id="2" name="Folienbildplatzhalter 1"/>
+          <p:cNvSpPr>
+            <a:spLocks noGrp="1" noRot="1" noChangeAspect="1"/>
+          </p:cNvSpPr>
+          <p:nvPr>
+            <p:ph type="sldImg"/>
+          </p:nvPr>
+        </p:nvSpPr>
+        <p:spPr/>
+      </p:sp>
+      <p:sp>
+        <p:nvSpPr>
+          <p:cNvPr id="3" name="Notizenplatzhalter 2"/>
+          <p:cNvSpPr>
+            <a:spLocks noGrp="1"/>
+          </p:cNvSpPr>
+          <p:nvPr>
+            <p:ph type="body" idx="1"/>
+          </p:nvPr>
+        </p:nvSpPr>
+        <p:spPr/>
+        <p:txBody>
+          <a:bodyPr/>
+          <a:lstStyle/>
+          <a:p>
             <a:pPr rtl="0"/>
             <a:r>
               <a:rPr lang="de-DE" dirty="0"/>
@@ -911,7 +1090,7 @@
           <a:p>
             <a:fld id="{41BC23E3-4510-413A-9361-7EEE4D3F2E84}" type="datetime1">
               <a:rPr lang="de-DE" smtClean="0"/>
-              <a:t>24.09.2026</a:t>
+              <a:t>07.10.2026</a:t>
             </a:fld>
             <a:endParaRPr lang="de-DE"/>
           </a:p>
@@ -1012,7 +1191,7 @@
           <a:p>
             <a:fld id="{DFF21B63-CC14-4CF7-B236-95F232F15D6B}" type="datetime1">
               <a:rPr lang="de-DE" smtClean="0"/>
-              <a:t>24.09.2026</a:t>
+              <a:t>07.10.2026</a:t>
             </a:fld>
             <a:endParaRPr lang="de-DE" dirty="0"/>
           </a:p>
@@ -1221,7 +1400,7 @@
           <a:p>
             <a:fld id="{DFF21B63-CC14-4CF7-B236-95F232F15D6B}" type="datetime1">
               <a:rPr lang="de-DE" smtClean="0"/>
-              <a:t>24.09.2026</a:t>
+              <a:t>07.10.2026</a:t>
             </a:fld>
             <a:endParaRPr lang="de-DE" dirty="0"/>
           </a:p>
@@ -1521,7 +1700,7 @@
           <a:p>
             <a:fld id="{DFF21B63-CC14-4CF7-B236-95F232F15D6B}" type="datetime1">
               <a:rPr lang="de-DE" smtClean="0"/>
-              <a:t>24.09.2026</a:t>
+              <a:t>07.10.2026</a:t>
             </a:fld>
             <a:endParaRPr lang="de-DE" dirty="0"/>
           </a:p>
@@ -1773,7 +1952,7 @@
           <a:p>
             <a:fld id="{DFF21B63-CC14-4CF7-B236-95F232F15D6B}" type="datetime1">
               <a:rPr lang="de-DE" smtClean="0"/>
-              <a:t>24.09.2026</a:t>
+              <a:t>07.10.2026</a:t>
             </a:fld>
             <a:endParaRPr lang="de-DE" dirty="0"/>
           </a:p>
@@ -2479,7 +2658,7 @@
           <a:p>
             <a:fld id="{757CD2D1-8C96-4412-8C0C-09C7E956F080}" type="datetime1">
               <a:rPr lang="de-DE" smtClean="0"/>
-              <a:t>24.09.2026</a:t>
+              <a:t>07.10.2026</a:t>
             </a:fld>
             <a:endParaRPr lang="de-DE" dirty="0"/>
           </a:p>
@@ -2752,7 +2931,7 @@
           <a:p>
             <a:fld id="{DFF21B63-CC14-4CF7-B236-95F232F15D6B}" type="datetime1">
               <a:rPr lang="de-DE" smtClean="0"/>
-              <a:t>24.09.2026</a:t>
+              <a:t>07.10.2026</a:t>
             </a:fld>
             <a:endParaRPr lang="de-DE" dirty="0"/>
           </a:p>
@@ -3335,14 +3514,19 @@
             <p:ph type="dt" sz="half" idx="10"/>
           </p:nvPr>
         </p:nvSpPr>
-        <p:spPr/>
+        <p:spPr>
+          <a:xfrm>
+            <a:off x="609600" y="6249477"/>
+            <a:ext cx="2844800" cy="365125"/>
+          </a:xfrm>
+        </p:spPr>
         <p:txBody>
           <a:bodyPr/>
           <a:lstStyle/>
           <a:p>
             <a:fld id="{757CD2D1-8C96-4412-8C0C-09C7E956F080}" type="datetime1">
               <a:rPr lang="de-DE" smtClean="0"/>
-              <a:t>24.09.2026</a:t>
+              <a:t>07.10.2026</a:t>
             </a:fld>
             <a:endParaRPr lang="de-DE" dirty="0"/>
           </a:p>
@@ -3593,7 +3777,7 @@
         </p:nvSpPr>
         <p:spPr>
           <a:xfrm>
-            <a:off x="985923" y="4341615"/>
+            <a:off x="985923" y="4234740"/>
             <a:ext cx="5546630" cy="238641"/>
           </a:xfrm>
           <a:prstGeom prst="rect">
@@ -3643,7 +3827,7 @@
         </p:nvSpPr>
         <p:spPr>
           <a:xfrm>
-            <a:off x="989098" y="4761152"/>
+            <a:off x="989098" y="4654277"/>
             <a:ext cx="349171" cy="349171"/>
           </a:xfrm>
           <a:prstGeom prst="roundRect">
@@ -3683,7 +3867,7 @@
         </p:blipFill>
         <p:spPr>
           <a:xfrm>
-            <a:off x="1074743" y="4846798"/>
+            <a:off x="1074743" y="4739923"/>
             <a:ext cx="177760" cy="177760"/>
           </a:xfrm>
           <a:prstGeom prst="rect">
@@ -3705,7 +3889,7 @@
         </p:nvSpPr>
         <p:spPr>
           <a:xfrm>
-            <a:off x="1493843" y="4757977"/>
+            <a:off x="1493843" y="4651102"/>
             <a:ext cx="5023472" cy="223520"/>
           </a:xfrm>
           <a:prstGeom prst="rect">
@@ -3788,7 +3972,7 @@
         </p:nvSpPr>
         <p:spPr>
           <a:xfrm>
-            <a:off x="1493843" y="4994197"/>
+            <a:off x="1493843" y="4887322"/>
             <a:ext cx="5023472" cy="203160"/>
           </a:xfrm>
           <a:prstGeom prst="rect">
@@ -3838,7 +4022,7 @@
         </p:nvSpPr>
         <p:spPr>
           <a:xfrm>
-            <a:off x="989098" y="5378253"/>
+            <a:off x="989098" y="5271378"/>
             <a:ext cx="349171" cy="349171"/>
           </a:xfrm>
           <a:prstGeom prst="roundRect">
@@ -3878,7 +4062,7 @@
         </p:blipFill>
         <p:spPr>
           <a:xfrm>
-            <a:off x="1074743" y="5463899"/>
+            <a:off x="1074743" y="5357024"/>
             <a:ext cx="177760" cy="177760"/>
           </a:xfrm>
           <a:prstGeom prst="rect">
@@ -3900,7 +4084,7 @@
         </p:nvSpPr>
         <p:spPr>
           <a:xfrm>
-            <a:off x="1493843" y="5375078"/>
+            <a:off x="1493843" y="5268203"/>
             <a:ext cx="5023472" cy="223520"/>
           </a:xfrm>
           <a:prstGeom prst="rect">
@@ -3950,7 +4134,7 @@
         </p:nvSpPr>
         <p:spPr>
           <a:xfrm>
-            <a:off x="1493843" y="5611299"/>
+            <a:off x="1493843" y="5504424"/>
             <a:ext cx="5023472" cy="203160"/>
           </a:xfrm>
           <a:prstGeom prst="rect">
@@ -4000,7 +4184,7 @@
         </p:nvSpPr>
         <p:spPr>
           <a:xfrm>
-            <a:off x="989098" y="5995354"/>
+            <a:off x="989098" y="5888479"/>
             <a:ext cx="349171" cy="349171"/>
           </a:xfrm>
           <a:prstGeom prst="roundRect">
@@ -4040,7 +4224,7 @@
         </p:blipFill>
         <p:spPr>
           <a:xfrm>
-            <a:off x="1074743" y="6081000"/>
+            <a:off x="1074743" y="5974125"/>
             <a:ext cx="177760" cy="177760"/>
           </a:xfrm>
           <a:prstGeom prst="rect">
@@ -4062,7 +4246,7 @@
         </p:nvSpPr>
         <p:spPr>
           <a:xfrm>
-            <a:off x="1493843" y="5992179"/>
+            <a:off x="1493843" y="5885304"/>
             <a:ext cx="5023472" cy="223520"/>
           </a:xfrm>
           <a:prstGeom prst="rect">
@@ -4112,8 +4296,8 @@
         </p:nvSpPr>
         <p:spPr>
           <a:xfrm>
-            <a:off x="1493843" y="6228399"/>
-            <a:ext cx="5023472" cy="203160"/>
+            <a:off x="1493843" y="6121523"/>
+            <a:ext cx="5023472" cy="322267"/>
           </a:xfrm>
           <a:prstGeom prst="rect">
             <a:avLst/>
@@ -6180,8 +6364,8 @@
         </p:nvSpPr>
         <p:spPr>
           <a:xfrm>
-            <a:off x="822959" y="4617720"/>
-            <a:ext cx="10545775" cy="868680"/>
+            <a:off x="822959" y="4751978"/>
+            <a:ext cx="10545775" cy="600164"/>
           </a:xfrm>
           <a:prstGeom prst="rect">
             <a:avLst/>
@@ -6195,13 +6379,382 @@
           <a:lstStyle/>
           <a:p>
             <a:r>
-              <a:rPr sz="1300" b="1">
+              <a:rPr sz="1300" b="1" dirty="0" err="1">
                 <a:solidFill>
                   <a:srgbClr val="1E2761"/>
                 </a:solidFill>
                 <a:latin typeface="Calibri"/>
               </a:rPr>
-              <a:t>Kernaussage:  Control A.8.22 (Segregation of Networks) verlangt eine erkennbare Trennung zusammengehöriger Dienste. Ein benutzerdefiniertes Docker-Netzwerk mit bewusst gewählten Mitgliedern ist die technische Umsetzung – dokumentiert durch docker network-Befehle, nachvollziehbar durch docker network inspect.</a:t>
+              <a:t>KControl</a:t>
+            </a:r>
+            <a:r>
+              <a:rPr sz="1300" b="1" dirty="0">
+                <a:solidFill>
+                  <a:srgbClr val="1E2761"/>
+                </a:solidFill>
+                <a:latin typeface="Calibri"/>
+              </a:rPr>
+              <a:t> A.8.22 (Segregation of Networks) </a:t>
+            </a:r>
+            <a:r>
+              <a:rPr sz="1300" b="1" dirty="0" err="1">
+                <a:solidFill>
+                  <a:srgbClr val="1E2761"/>
+                </a:solidFill>
+                <a:latin typeface="Calibri"/>
+              </a:rPr>
+              <a:t>verlangt</a:t>
+            </a:r>
+            <a:r>
+              <a:rPr sz="1300" b="1" dirty="0">
+                <a:solidFill>
+                  <a:srgbClr val="1E2761"/>
+                </a:solidFill>
+                <a:latin typeface="Calibri"/>
+              </a:rPr>
+              <a:t> </a:t>
+            </a:r>
+            <a:r>
+              <a:rPr sz="1300" b="1" dirty="0" err="1">
+                <a:solidFill>
+                  <a:srgbClr val="1E2761"/>
+                </a:solidFill>
+                <a:latin typeface="Calibri"/>
+              </a:rPr>
+              <a:t>eine</a:t>
+            </a:r>
+            <a:r>
+              <a:rPr sz="1300" b="1" dirty="0">
+                <a:solidFill>
+                  <a:srgbClr val="1E2761"/>
+                </a:solidFill>
+                <a:latin typeface="Calibri"/>
+              </a:rPr>
+              <a:t> </a:t>
+            </a:r>
+            <a:r>
+              <a:rPr sz="1300" b="1" dirty="0" err="1">
+                <a:solidFill>
+                  <a:srgbClr val="1E2761"/>
+                </a:solidFill>
+                <a:latin typeface="Calibri"/>
+              </a:rPr>
+              <a:t>erkennbare</a:t>
+            </a:r>
+            <a:r>
+              <a:rPr sz="1300" b="1" dirty="0">
+                <a:solidFill>
+                  <a:srgbClr val="1E2761"/>
+                </a:solidFill>
+                <a:latin typeface="Calibri"/>
+              </a:rPr>
+              <a:t> </a:t>
+            </a:r>
+            <a:r>
+              <a:rPr sz="1300" b="1" dirty="0" err="1">
+                <a:solidFill>
+                  <a:srgbClr val="1E2761"/>
+                </a:solidFill>
+                <a:latin typeface="Calibri"/>
+              </a:rPr>
+              <a:t>Trennung</a:t>
+            </a:r>
+            <a:r>
+              <a:rPr sz="1300" b="1" dirty="0">
+                <a:solidFill>
+                  <a:srgbClr val="1E2761"/>
+                </a:solidFill>
+                <a:latin typeface="Calibri"/>
+              </a:rPr>
+              <a:t> </a:t>
+            </a:r>
+            <a:r>
+              <a:rPr sz="1300" b="1" dirty="0" err="1">
+                <a:solidFill>
+                  <a:srgbClr val="1E2761"/>
+                </a:solidFill>
+                <a:latin typeface="Calibri"/>
+              </a:rPr>
+              <a:t>zusammengehöriger</a:t>
+            </a:r>
+            <a:r>
+              <a:rPr sz="1300" b="1" dirty="0">
+                <a:solidFill>
+                  <a:srgbClr val="1E2761"/>
+                </a:solidFill>
+                <a:latin typeface="Calibri"/>
+              </a:rPr>
+              <a:t> </a:t>
+            </a:r>
+            <a:r>
+              <a:rPr sz="1300" b="1" dirty="0" err="1">
+                <a:solidFill>
+                  <a:srgbClr val="1E2761"/>
+                </a:solidFill>
+                <a:latin typeface="Calibri"/>
+              </a:rPr>
+              <a:t>Dienste</a:t>
+            </a:r>
+            <a:r>
+              <a:rPr sz="1300" b="1" dirty="0">
+                <a:solidFill>
+                  <a:srgbClr val="1E2761"/>
+                </a:solidFill>
+                <a:latin typeface="Calibri"/>
+              </a:rPr>
+              <a:t>. Ein </a:t>
+            </a:r>
+            <a:r>
+              <a:rPr sz="1300" b="1" dirty="0" err="1">
+                <a:solidFill>
+                  <a:srgbClr val="1E2761"/>
+                </a:solidFill>
+                <a:latin typeface="Calibri"/>
+              </a:rPr>
+              <a:t>benutzerdefiniertes</a:t>
+            </a:r>
+            <a:r>
+              <a:rPr sz="1300" b="1" dirty="0">
+                <a:solidFill>
+                  <a:srgbClr val="1E2761"/>
+                </a:solidFill>
+                <a:latin typeface="Calibri"/>
+              </a:rPr>
+              <a:t> Docker-</a:t>
+            </a:r>
+            <a:r>
+              <a:rPr sz="1300" b="1" dirty="0" err="1">
+                <a:solidFill>
+                  <a:srgbClr val="1E2761"/>
+                </a:solidFill>
+                <a:latin typeface="Calibri"/>
+              </a:rPr>
+              <a:t>Netzwerk</a:t>
+            </a:r>
+            <a:r>
+              <a:rPr sz="1300" b="1" dirty="0">
+                <a:solidFill>
+                  <a:srgbClr val="1E2761"/>
+                </a:solidFill>
+                <a:latin typeface="Calibri"/>
+              </a:rPr>
+              <a:t> </a:t>
+            </a:r>
+            <a:r>
+              <a:rPr sz="1300" b="1" dirty="0" err="1">
+                <a:solidFill>
+                  <a:srgbClr val="1E2761"/>
+                </a:solidFill>
+                <a:latin typeface="Calibri"/>
+              </a:rPr>
+              <a:t>mit</a:t>
+            </a:r>
+            <a:r>
+              <a:rPr sz="1300" b="1" dirty="0">
+                <a:solidFill>
+                  <a:srgbClr val="1E2761"/>
+                </a:solidFill>
+                <a:latin typeface="Calibri"/>
+              </a:rPr>
+              <a:t> </a:t>
+            </a:r>
+            <a:r>
+              <a:rPr sz="1300" b="1" dirty="0" err="1">
+                <a:solidFill>
+                  <a:srgbClr val="1E2761"/>
+                </a:solidFill>
+                <a:latin typeface="Calibri"/>
+              </a:rPr>
+              <a:t>bewusst</a:t>
+            </a:r>
+            <a:r>
+              <a:rPr sz="1300" b="1" dirty="0">
+                <a:solidFill>
+                  <a:srgbClr val="1E2761"/>
+                </a:solidFill>
+                <a:latin typeface="Calibri"/>
+              </a:rPr>
+              <a:t> </a:t>
+            </a:r>
+            <a:r>
+              <a:rPr sz="1300" b="1" dirty="0" err="1">
+                <a:solidFill>
+                  <a:srgbClr val="1E2761"/>
+                </a:solidFill>
+                <a:latin typeface="Calibri"/>
+              </a:rPr>
+              <a:t>gewählten</a:t>
+            </a:r>
+            <a:r>
+              <a:rPr sz="1300" b="1" dirty="0">
+                <a:solidFill>
+                  <a:srgbClr val="1E2761"/>
+                </a:solidFill>
+                <a:latin typeface="Calibri"/>
+              </a:rPr>
+              <a:t> </a:t>
+            </a:r>
+            <a:r>
+              <a:rPr sz="1300" b="1" dirty="0" err="1">
+                <a:solidFill>
+                  <a:srgbClr val="1E2761"/>
+                </a:solidFill>
+                <a:latin typeface="Calibri"/>
+              </a:rPr>
+              <a:t>Mitgliedern</a:t>
+            </a:r>
+            <a:r>
+              <a:rPr sz="1300" b="1" dirty="0">
+                <a:solidFill>
+                  <a:srgbClr val="1E2761"/>
+                </a:solidFill>
+                <a:latin typeface="Calibri"/>
+              </a:rPr>
+              <a:t> </a:t>
+            </a:r>
+            <a:r>
+              <a:rPr sz="1300" b="1" dirty="0" err="1">
+                <a:solidFill>
+                  <a:srgbClr val="1E2761"/>
+                </a:solidFill>
+                <a:latin typeface="Calibri"/>
+              </a:rPr>
+              <a:t>ist</a:t>
+            </a:r>
+            <a:r>
+              <a:rPr sz="1300" b="1" dirty="0">
+                <a:solidFill>
+                  <a:srgbClr val="1E2761"/>
+                </a:solidFill>
+                <a:latin typeface="Calibri"/>
+              </a:rPr>
+              <a:t> die </a:t>
+            </a:r>
+            <a:r>
+              <a:rPr sz="1300" b="1" dirty="0" err="1">
+                <a:solidFill>
+                  <a:srgbClr val="1E2761"/>
+                </a:solidFill>
+                <a:latin typeface="Calibri"/>
+              </a:rPr>
+              <a:t>technische</a:t>
+            </a:r>
+            <a:r>
+              <a:rPr sz="1300" b="1" dirty="0">
+                <a:solidFill>
+                  <a:srgbClr val="1E2761"/>
+                </a:solidFill>
+                <a:latin typeface="Calibri"/>
+              </a:rPr>
+              <a:t> </a:t>
+            </a:r>
+            <a:r>
+              <a:rPr sz="1300" b="1" dirty="0" err="1">
+                <a:solidFill>
+                  <a:srgbClr val="1E2761"/>
+                </a:solidFill>
+                <a:latin typeface="Calibri"/>
+              </a:rPr>
+              <a:t>Umsetzung</a:t>
+            </a:r>
+            <a:r>
+              <a:rPr sz="1300" b="1" dirty="0">
+                <a:solidFill>
+                  <a:srgbClr val="1E2761"/>
+                </a:solidFill>
+                <a:latin typeface="Calibri"/>
+              </a:rPr>
+              <a:t> – </a:t>
+            </a:r>
+            <a:r>
+              <a:rPr sz="1300" b="1" dirty="0" err="1">
+                <a:solidFill>
+                  <a:srgbClr val="1E2761"/>
+                </a:solidFill>
+                <a:latin typeface="Calibri"/>
+              </a:rPr>
+              <a:t>dokumentiert</a:t>
+            </a:r>
+            <a:r>
+              <a:rPr sz="1300" b="1" dirty="0">
+                <a:solidFill>
+                  <a:srgbClr val="1E2761"/>
+                </a:solidFill>
+                <a:latin typeface="Calibri"/>
+              </a:rPr>
+              <a:t> </a:t>
+            </a:r>
+            <a:r>
+              <a:rPr sz="1300" b="1" dirty="0" err="1">
+                <a:solidFill>
+                  <a:srgbClr val="1E2761"/>
+                </a:solidFill>
+                <a:latin typeface="Calibri"/>
+              </a:rPr>
+              <a:t>durch</a:t>
+            </a:r>
+            <a:r>
+              <a:rPr sz="1300" b="1" dirty="0">
+                <a:solidFill>
+                  <a:srgbClr val="1E2761"/>
+                </a:solidFill>
+                <a:latin typeface="Calibri"/>
+              </a:rPr>
+              <a:t> docker network-</a:t>
+            </a:r>
+            <a:r>
+              <a:rPr sz="1300" b="1" dirty="0" err="1">
+                <a:solidFill>
+                  <a:srgbClr val="1E2761"/>
+                </a:solidFill>
+                <a:latin typeface="Calibri"/>
+              </a:rPr>
+              <a:t>Befehle</a:t>
+            </a:r>
+            <a:r>
+              <a:rPr sz="1300" b="1" dirty="0">
+                <a:solidFill>
+                  <a:srgbClr val="1E2761"/>
+                </a:solidFill>
+                <a:latin typeface="Calibri"/>
+              </a:rPr>
+              <a:t>, </a:t>
+            </a:r>
+            <a:r>
+              <a:rPr sz="1300" b="1" dirty="0" err="1">
+                <a:solidFill>
+                  <a:srgbClr val="1E2761"/>
+                </a:solidFill>
+                <a:latin typeface="Calibri"/>
+              </a:rPr>
+              <a:t>nachvollziehbar</a:t>
+            </a:r>
+            <a:r>
+              <a:rPr sz="1300" b="1" dirty="0">
+                <a:solidFill>
+                  <a:srgbClr val="1E2761"/>
+                </a:solidFill>
+                <a:latin typeface="Calibri"/>
+              </a:rPr>
+              <a:t> </a:t>
+            </a:r>
+            <a:r>
+              <a:rPr sz="1300" b="1" dirty="0" err="1">
+                <a:solidFill>
+                  <a:srgbClr val="1E2761"/>
+                </a:solidFill>
+                <a:latin typeface="Calibri"/>
+              </a:rPr>
+              <a:t>durch</a:t>
+            </a:r>
+            <a:r>
+              <a:rPr sz="1300" b="1" dirty="0">
+                <a:solidFill>
+                  <a:srgbClr val="1E2761"/>
+                </a:solidFill>
+                <a:latin typeface="Calibri"/>
+              </a:rPr>
+              <a:t> docker network inspect.</a:t>
             </a:r>
           </a:p>
         </p:txBody>
@@ -6233,7 +6786,7 @@
       </p:grpSpPr>
       <p:sp>
         <p:nvSpPr>
-          <p:cNvPr id="2" name="Titel 1"/>
+          <p:cNvPr id="4" name="Title 3"/>
           <p:cNvSpPr>
             <a:spLocks noGrp="1"/>
           </p:cNvSpPr>
@@ -6243,7 +6796,7 @@
         </p:nvSpPr>
         <p:spPr>
           <a:xfrm>
-            <a:off x="0" y="534949"/>
+            <a:off x="609601" y="274638"/>
             <a:ext cx="10953313" cy="1143000"/>
           </a:xfrm>
         </p:spPr>
@@ -6252,22 +6805,16 @@
           <a:lstStyle/>
           <a:p>
             <a:r>
-              <a:rPr lang="en-US" sz="2000" dirty="0"/>
-              <a:t>Netzwerk anlegen, verbinden &amp; internen Dienst starten</a:t>
-            </a:r>
-            <a:br>
-              <a:rPr lang="en-US" sz="2000" dirty="0"/>
-            </a:br>
-            <a:br>
-              <a:rPr lang="en-US" sz="2000" dirty="0"/>
-            </a:br>
-            <a:endParaRPr lang="de-DE" sz="1998" dirty="0"/>
-          </a:p>
-        </p:txBody>
-      </p:sp>
-      <p:sp>
-        <p:nvSpPr>
-          <p:cNvPr id="5" name="Foliennummernplatzhalter 4"/>
+              <a:rPr lang="de-DE" sz="2400" dirty="0"/>
+              <a:t>Netzwerktopologie: app-net vs. Standardnetz</a:t>
+            </a:r>
+            <a:endParaRPr sz="2400" dirty="0"/>
+          </a:p>
+        </p:txBody>
+      </p:sp>
+      <p:sp>
+        <p:nvSpPr>
+          <p:cNvPr id="2" name="Foliennummernplatzhalter 4"/>
           <p:cNvSpPr>
             <a:spLocks noGrp="1"/>
           </p:cNvSpPr>
@@ -6291,1094 +6838,1012 @@
       </p:sp>
       <p:sp>
         <p:nvSpPr>
-          <p:cNvPr id="41" name="Shape 2">
-            <a:extLst>
-              <a:ext uri="{FF2B5EF4-FFF2-40B4-BE49-F238E27FC236}">
-                <a16:creationId xmlns:a16="http://schemas.microsoft.com/office/drawing/2014/main" id="{38C067B0-3936-41B1-A465-6CF531D3A8B9}"/>
-              </a:ext>
-            </a:extLst>
-          </p:cNvPr>
+          <p:cNvPr id="5" name="TextBox 4"/>
+          <p:cNvSpPr txBox="1"/>
+          <p:nvPr/>
+        </p:nvSpPr>
+        <p:spPr>
+          <a:xfrm>
+            <a:off x="822960" y="2082341"/>
+            <a:ext cx="4572000" cy="256032"/>
+          </a:xfrm>
+          <a:prstGeom prst="rect">
+            <a:avLst/>
+          </a:prstGeom>
+          <a:noFill/>
+        </p:spPr>
+        <p:txBody>
+          <a:bodyPr wrap="square" lIns="0" tIns="0" rIns="0" bIns="0">
+            <a:spAutoFit/>
+          </a:bodyPr>
+          <a:lstStyle/>
+          <a:p>
+            <a:pPr algn="ctr"/>
+            <a:r>
+              <a:rPr sz="1400" b="1" i="0">
+                <a:solidFill>
+                  <a:srgbClr val="005AA8"/>
+                </a:solidFill>
+                <a:latin typeface="Arial"/>
+              </a:rPr>
+              <a:t>app-net</a:t>
+            </a:r>
+          </a:p>
+        </p:txBody>
+      </p:sp>
+      <p:sp>
+        <p:nvSpPr>
+          <p:cNvPr id="6" name="TextBox 5"/>
+          <p:cNvSpPr txBox="1"/>
+          <p:nvPr/>
+        </p:nvSpPr>
+        <p:spPr>
+          <a:xfrm>
+            <a:off x="822960" y="2338373"/>
+            <a:ext cx="4572000" cy="201168"/>
+          </a:xfrm>
+          <a:prstGeom prst="rect">
+            <a:avLst/>
+          </a:prstGeom>
+          <a:noFill/>
+        </p:spPr>
+        <p:txBody>
+          <a:bodyPr wrap="square" lIns="0" tIns="0" rIns="0" bIns="0">
+            <a:spAutoFit/>
+          </a:bodyPr>
+          <a:lstStyle/>
+          <a:p>
+            <a:pPr algn="ctr"/>
+            <a:r>
+              <a:rPr sz="950" b="0" i="1">
+                <a:solidFill>
+                  <a:srgbClr val="5B6472"/>
+                </a:solidFill>
+                <a:latin typeface="Arial"/>
+              </a:rPr>
+              <a:t>172.18.0.0/16 (automatisch vergeben)</a:t>
+            </a:r>
+          </a:p>
+        </p:txBody>
+      </p:sp>
+      <p:sp>
+        <p:nvSpPr>
+          <p:cNvPr id="7" name="TextBox 6"/>
+          <p:cNvSpPr txBox="1"/>
+          <p:nvPr/>
+        </p:nvSpPr>
+        <p:spPr>
+          <a:xfrm>
+            <a:off x="6812280" y="2082341"/>
+            <a:ext cx="4571999" cy="256032"/>
+          </a:xfrm>
+          <a:prstGeom prst="rect">
+            <a:avLst/>
+          </a:prstGeom>
+          <a:noFill/>
+        </p:spPr>
+        <p:txBody>
+          <a:bodyPr wrap="square" lIns="0" tIns="0" rIns="0" bIns="0">
+            <a:spAutoFit/>
+          </a:bodyPr>
+          <a:lstStyle/>
+          <a:p>
+            <a:pPr algn="ctr"/>
+            <a:r>
+              <a:rPr sz="1300" b="1" i="0">
+                <a:solidFill>
+                  <a:srgbClr val="5B6472"/>
+                </a:solidFill>
+                <a:latin typeface="Arial"/>
+              </a:rPr>
+              <a:t>Docker-Standard-Netz (bridge)</a:t>
+            </a:r>
+          </a:p>
+        </p:txBody>
+      </p:sp>
+      <p:sp>
+        <p:nvSpPr>
+          <p:cNvPr id="8" name="TextBox 7"/>
+          <p:cNvSpPr txBox="1"/>
+          <p:nvPr/>
+        </p:nvSpPr>
+        <p:spPr>
+          <a:xfrm>
+            <a:off x="6812280" y="2338373"/>
+            <a:ext cx="4571999" cy="201168"/>
+          </a:xfrm>
+          <a:prstGeom prst="rect">
+            <a:avLst/>
+          </a:prstGeom>
+          <a:noFill/>
+        </p:spPr>
+        <p:txBody>
+          <a:bodyPr wrap="square" lIns="0" tIns="0" rIns="0" bIns="0">
+            <a:spAutoFit/>
+          </a:bodyPr>
+          <a:lstStyle/>
+          <a:p>
+            <a:pPr algn="ctr"/>
+            <a:r>
+              <a:rPr sz="950" b="0" i="1">
+                <a:solidFill>
+                  <a:srgbClr val="5B6472"/>
+                </a:solidFill>
+                <a:latin typeface="Arial"/>
+              </a:rPr>
+              <a:t>172.17.0.0/16 (Default)</a:t>
+            </a:r>
+          </a:p>
+        </p:txBody>
+      </p:sp>
+      <p:sp>
+        <p:nvSpPr>
+          <p:cNvPr id="9" name="Rounded Rectangle 8"/>
           <p:cNvSpPr/>
           <p:nvPr/>
         </p:nvSpPr>
         <p:spPr>
           <a:xfrm>
-            <a:off x="815896" y="1897817"/>
-            <a:ext cx="4819610" cy="2860437"/>
+            <a:off x="822960" y="2630981"/>
+            <a:ext cx="5989320" cy="2240280"/>
           </a:xfrm>
           <a:prstGeom prst="roundRect">
             <a:avLst>
-              <a:gd name="adj" fmla="val 4329"/>
+              <a:gd name="adj" fmla="val 20000"/>
             </a:avLst>
           </a:prstGeom>
           <a:solidFill>
-            <a:srgbClr val="1A222C"/>
+            <a:srgbClr val="005AA8">
+              <a:alpha val="22000"/>
+            </a:srgbClr>
           </a:solidFill>
-          <a:ln w="6350">
+          <a:ln w="12700">
             <a:solidFill>
-              <a:srgbClr val="2A3540"/>
+              <a:srgbClr val="005AA8"/>
             </a:solidFill>
-            <a:prstDash val="solid"/>
           </a:ln>
-        </p:spPr>
-      </p:sp>
-      <p:sp>
-        <p:nvSpPr>
-          <p:cNvPr id="42" name="Text 3">
-            <a:extLst>
-              <a:ext uri="{FF2B5EF4-FFF2-40B4-BE49-F238E27FC236}">
-                <a16:creationId xmlns:a16="http://schemas.microsoft.com/office/drawing/2014/main" id="{1AAB280A-C58B-4600-91C2-05E8E72EA5FA}"/>
-              </a:ext>
-            </a:extLst>
-          </p:cNvPr>
+          <a:effectLst/>
+        </p:spPr>
+        <p:style>
+          <a:lnRef idx="1">
+            <a:schemeClr val="accent1"/>
+          </a:lnRef>
+          <a:fillRef idx="3">
+            <a:schemeClr val="accent1"/>
+          </a:fillRef>
+          <a:effectRef idx="2">
+            <a:schemeClr val="accent1"/>
+          </a:effectRef>
+          <a:fontRef idx="minor">
+            <a:schemeClr val="lt1"/>
+          </a:fontRef>
+        </p:style>
+        <p:txBody>
+          <a:bodyPr wrap="square" tIns="36576" bIns="36576" rtlCol="0" anchor="ctr"/>
+          <a:lstStyle/>
+          <a:p>
+            <a:pPr algn="ctr"/>
+            <a:endParaRPr/>
+          </a:p>
+        </p:txBody>
+      </p:sp>
+      <p:sp>
+        <p:nvSpPr>
+          <p:cNvPr id="10" name="Rounded Rectangle 9"/>
           <p:cNvSpPr/>
           <p:nvPr/>
         </p:nvSpPr>
         <p:spPr>
           <a:xfrm>
-            <a:off x="1074301" y="2337554"/>
-            <a:ext cx="4431884" cy="254000"/>
+            <a:off x="5394960" y="2630981"/>
+            <a:ext cx="5989320" cy="2240280"/>
+          </a:xfrm>
+          <a:prstGeom prst="roundRect">
+            <a:avLst>
+              <a:gd name="adj" fmla="val 20000"/>
+            </a:avLst>
+          </a:prstGeom>
+          <a:solidFill>
+            <a:srgbClr val="8A94A3">
+              <a:alpha val="30000"/>
+            </a:srgbClr>
+          </a:solidFill>
+          <a:ln w="12700">
+            <a:solidFill>
+              <a:srgbClr val="8A94A3"/>
+            </a:solidFill>
+          </a:ln>
+          <a:effectLst/>
+        </p:spPr>
+        <p:style>
+          <a:lnRef idx="1">
+            <a:schemeClr val="accent1"/>
+          </a:lnRef>
+          <a:fillRef idx="3">
+            <a:schemeClr val="accent1"/>
+          </a:fillRef>
+          <a:effectRef idx="2">
+            <a:schemeClr val="accent1"/>
+          </a:effectRef>
+          <a:fontRef idx="minor">
+            <a:schemeClr val="lt1"/>
+          </a:fontRef>
+        </p:style>
+        <p:txBody>
+          <a:bodyPr wrap="square" tIns="36576" bIns="36576" rtlCol="0" anchor="ctr"/>
+          <a:lstStyle/>
+          <a:p>
+            <a:pPr algn="ctr"/>
+            <a:endParaRPr/>
+          </a:p>
+        </p:txBody>
+      </p:sp>
+      <p:sp>
+        <p:nvSpPr>
+          <p:cNvPr id="11" name="Rounded Rectangle 10"/>
+          <p:cNvSpPr/>
+          <p:nvPr/>
+        </p:nvSpPr>
+        <p:spPr>
+          <a:xfrm>
+            <a:off x="1143000" y="3476801"/>
+            <a:ext cx="1828800" cy="548640"/>
+          </a:xfrm>
+          <a:prstGeom prst="roundRect">
+            <a:avLst>
+              <a:gd name="adj" fmla="val 14000"/>
+            </a:avLst>
+          </a:prstGeom>
+          <a:solidFill>
+            <a:srgbClr val="FFFFFF"/>
+          </a:solidFill>
+          <a:ln w="12700">
+            <a:solidFill>
+              <a:srgbClr val="005AA8"/>
+            </a:solidFill>
+          </a:ln>
+          <a:effectLst/>
+        </p:spPr>
+        <p:style>
+          <a:lnRef idx="1">
+            <a:schemeClr val="accent1"/>
+          </a:lnRef>
+          <a:fillRef idx="3">
+            <a:schemeClr val="accent1"/>
+          </a:fillRef>
+          <a:effectRef idx="2">
+            <a:schemeClr val="accent1"/>
+          </a:effectRef>
+          <a:fontRef idx="minor">
+            <a:schemeClr val="lt1"/>
+          </a:fontRef>
+        </p:style>
+        <p:txBody>
+          <a:bodyPr wrap="square" tIns="36576" bIns="36576" rtlCol="0" anchor="ctr"/>
+          <a:lstStyle/>
+          <a:p>
+            <a:pPr algn="ctr"/>
+            <a:r>
+              <a:rPr sz="1100" b="1">
+                <a:solidFill>
+                  <a:srgbClr val="1A1A1A"/>
+                </a:solidFill>
+                <a:latin typeface="Arial"/>
+              </a:rPr>
+              <a:t>redis-cache</a:t>
+            </a:r>
+          </a:p>
+        </p:txBody>
+      </p:sp>
+      <p:sp>
+        <p:nvSpPr>
+          <p:cNvPr id="12" name="Rounded Rectangle 11"/>
+          <p:cNvSpPr/>
+          <p:nvPr/>
+        </p:nvSpPr>
+        <p:spPr>
+          <a:xfrm>
+            <a:off x="9235440" y="3476801"/>
+            <a:ext cx="1828800" cy="548640"/>
+          </a:xfrm>
+          <a:prstGeom prst="roundRect">
+            <a:avLst>
+              <a:gd name="adj" fmla="val 14000"/>
+            </a:avLst>
+          </a:prstGeom>
+          <a:solidFill>
+            <a:srgbClr val="FFFFFF"/>
+          </a:solidFill>
+          <a:ln w="12700">
+            <a:solidFill>
+              <a:srgbClr val="8A94A3"/>
+            </a:solidFill>
+          </a:ln>
+          <a:effectLst/>
+        </p:spPr>
+        <p:style>
+          <a:lnRef idx="1">
+            <a:schemeClr val="accent1"/>
+          </a:lnRef>
+          <a:fillRef idx="3">
+            <a:schemeClr val="accent1"/>
+          </a:fillRef>
+          <a:effectRef idx="2">
+            <a:schemeClr val="accent1"/>
+          </a:effectRef>
+          <a:fontRef idx="minor">
+            <a:schemeClr val="lt1"/>
+          </a:fontRef>
+        </p:style>
+        <p:txBody>
+          <a:bodyPr wrap="square" tIns="36576" bIns="36576" rtlCol="0" anchor="ctr"/>
+          <a:lstStyle/>
+          <a:p>
+            <a:pPr algn="ctr"/>
+            <a:r>
+              <a:rPr sz="1100" b="1">
+                <a:solidFill>
+                  <a:srgbClr val="5B6472"/>
+                </a:solidFill>
+                <a:latin typeface="Arial"/>
+              </a:rPr>
+              <a:t>nginx-web</a:t>
+            </a:r>
+          </a:p>
+        </p:txBody>
+      </p:sp>
+      <p:sp>
+        <p:nvSpPr>
+          <p:cNvPr id="13" name="Rounded Rectangle 12"/>
+          <p:cNvSpPr/>
+          <p:nvPr/>
+        </p:nvSpPr>
+        <p:spPr>
+          <a:xfrm>
+            <a:off x="5189220" y="3476801"/>
+            <a:ext cx="1828800" cy="548640"/>
+          </a:xfrm>
+          <a:prstGeom prst="roundRect">
+            <a:avLst>
+              <a:gd name="adj" fmla="val 16000"/>
+            </a:avLst>
+          </a:prstGeom>
+          <a:solidFill>
+            <a:srgbClr val="FFFFFF"/>
+          </a:solidFill>
+          <a:ln w="12700">
+            <a:solidFill>
+              <a:srgbClr val="1E2761"/>
+            </a:solidFill>
+          </a:ln>
+          <a:effectLst/>
+        </p:spPr>
+        <p:style>
+          <a:lnRef idx="1">
+            <a:schemeClr val="accent1"/>
+          </a:lnRef>
+          <a:fillRef idx="3">
+            <a:schemeClr val="accent1"/>
+          </a:fillRef>
+          <a:effectRef idx="2">
+            <a:schemeClr val="accent1"/>
+          </a:effectRef>
+          <a:fontRef idx="minor">
+            <a:schemeClr val="lt1"/>
+          </a:fontRef>
+        </p:style>
+        <p:txBody>
+          <a:bodyPr wrap="square" tIns="36576" bIns="36576" rtlCol="0" anchor="ctr"/>
+          <a:lstStyle/>
+          <a:p>
+            <a:pPr algn="ctr"/>
+            <a:r>
+              <a:rPr sz="1150" b="1">
+                <a:solidFill>
+                  <a:srgbClr val="1A1A1A"/>
+                </a:solidFill>
+                <a:latin typeface="Arial"/>
+              </a:rPr>
+              <a:t>nodered</a:t>
+            </a:r>
+          </a:p>
+        </p:txBody>
+      </p:sp>
+      <p:sp>
+        <p:nvSpPr>
+          <p:cNvPr id="14" name="TextBox 13"/>
+          <p:cNvSpPr txBox="1"/>
+          <p:nvPr/>
+        </p:nvSpPr>
+        <p:spPr>
+          <a:xfrm>
+            <a:off x="548640" y="4962700"/>
+            <a:ext cx="11094415" cy="320040"/>
           </a:xfrm>
           <a:prstGeom prst="rect">
             <a:avLst/>
           </a:prstGeom>
           <a:noFill/>
-          <a:ln/>
-        </p:spPr>
-        <p:txBody>
-          <a:bodyPr wrap="square" lIns="0" tIns="0" rIns="0" bIns="0" rtlCol="0" anchor="t">
-            <a:normAutofit/>
+        </p:spPr>
+        <p:txBody>
+          <a:bodyPr wrap="square" lIns="0" tIns="0" rIns="0" bIns="0">
+            <a:spAutoFit/>
           </a:bodyPr>
           <a:lstStyle/>
           <a:p>
-            <a:pPr marL="0" indent="0" algn="l">
-              <a:lnSpc>
-                <a:spcPts val="1800"/>
-              </a:lnSpc>
-              <a:buNone/>
-            </a:pPr>
-            <a:r>
-              <a:rPr lang="en-US" sz="1200" dirty="0">
-                <a:solidFill>
-                  <a:srgbClr val="9BA8B5"/>
-                </a:solidFill>
-                <a:latin typeface="Courier New" pitchFamily="34" charset="0"/>
-                <a:ea typeface="Courier New" pitchFamily="34" charset="-122"/>
-                <a:cs typeface="Courier New" pitchFamily="34" charset="-120"/>
-              </a:rPr>
-              <a:t>$ docker network create app-net</a:t>
-            </a:r>
-            <a:endParaRPr lang="en-US" sz="1200" dirty="0"/>
-          </a:p>
-        </p:txBody>
-      </p:sp>
-      <p:sp>
-        <p:nvSpPr>
-          <p:cNvPr id="43" name="Text 4">
-            <a:extLst>
-              <a:ext uri="{FF2B5EF4-FFF2-40B4-BE49-F238E27FC236}">
-                <a16:creationId xmlns:a16="http://schemas.microsoft.com/office/drawing/2014/main" id="{8AAEFDEB-D914-4800-867A-E1B2F3B52DA4}"/>
-              </a:ext>
-            </a:extLst>
-          </p:cNvPr>
+            <a:pPr algn="ctr"/>
+            <a:r>
+              <a:rPr sz="1000" b="0" i="1">
+                <a:solidFill>
+                  <a:srgbClr val="005AA8"/>
+                </a:solidFill>
+                <a:latin typeface="Arial"/>
+              </a:rPr>
+              <a:t>nodered ist ein einzelner Container – gleichzeitig Mitglied im app-net und im Docker-Standard-Netz.</a:t>
+            </a:r>
+          </a:p>
+        </p:txBody>
+      </p:sp>
+      <p:sp>
+        <p:nvSpPr>
+          <p:cNvPr id="15" name="Rounded Rectangle 14"/>
           <p:cNvSpPr/>
           <p:nvPr/>
         </p:nvSpPr>
         <p:spPr>
           <a:xfrm>
-            <a:off x="1074301" y="2629614"/>
-            <a:ext cx="4431884" cy="254000"/>
+            <a:off x="548640" y="5511341"/>
+            <a:ext cx="11094415" cy="868680"/>
+          </a:xfrm>
+          <a:prstGeom prst="roundRect">
+            <a:avLst>
+              <a:gd name="adj" fmla="val 19231"/>
+            </a:avLst>
+          </a:prstGeom>
+          <a:solidFill>
+            <a:srgbClr val="F4F6FA"/>
+          </a:solidFill>
+          <a:ln w="9525">
+            <a:solidFill>
+              <a:srgbClr val="D8DEE9"/>
+            </a:solidFill>
+          </a:ln>
+          <a:effectLst/>
+        </p:spPr>
+        <p:style>
+          <a:lnRef idx="1">
+            <a:schemeClr val="accent1"/>
+          </a:lnRef>
+          <a:fillRef idx="3">
+            <a:schemeClr val="accent1"/>
+          </a:fillRef>
+          <a:effectRef idx="2">
+            <a:schemeClr val="accent1"/>
+          </a:effectRef>
+          <a:fontRef idx="minor">
+            <a:schemeClr val="lt1"/>
+          </a:fontRef>
+        </p:style>
+        <p:txBody>
+          <a:bodyPr rtlCol="0" anchor="ctr"/>
+          <a:lstStyle/>
+          <a:p>
+            <a:pPr algn="ctr"/>
+            <a:endParaRPr/>
+          </a:p>
+        </p:txBody>
+      </p:sp>
+      <p:sp>
+        <p:nvSpPr>
+          <p:cNvPr id="16" name="TextBox 15"/>
+          <p:cNvSpPr txBox="1"/>
+          <p:nvPr/>
+        </p:nvSpPr>
+        <p:spPr>
+          <a:xfrm>
+            <a:off x="822959" y="5745626"/>
+            <a:ext cx="10545775" cy="400110"/>
           </a:xfrm>
           <a:prstGeom prst="rect">
             <a:avLst/>
           </a:prstGeom>
           <a:noFill/>
-          <a:ln/>
-        </p:spPr>
-        <p:txBody>
-          <a:bodyPr wrap="square" lIns="0" tIns="0" rIns="0" bIns="0" rtlCol="0" anchor="t">
-            <a:normAutofit/>
+        </p:spPr>
+        <p:txBody>
+          <a:bodyPr wrap="square" lIns="0" tIns="0" rIns="0" bIns="0" anchor="ctr">
+            <a:spAutoFit/>
           </a:bodyPr>
           <a:lstStyle/>
           <a:p>
-            <a:pPr marL="0" indent="0" algn="l">
-              <a:lnSpc>
-                <a:spcPts val="1800"/>
-              </a:lnSpc>
-              <a:buNone/>
-            </a:pPr>
-            <a:r>
-              <a:rPr lang="en-US" sz="1200" dirty="0">
-                <a:solidFill>
-                  <a:srgbClr val="F3F5F2"/>
-                </a:solidFill>
-                <a:latin typeface="Courier New" pitchFamily="34" charset="0"/>
-                <a:ea typeface="Courier New" pitchFamily="34" charset="-122"/>
-                <a:cs typeface="Courier New" pitchFamily="34" charset="-120"/>
-              </a:rPr>
-              <a:t>$ docker network connect app-net nodered</a:t>
-            </a:r>
-            <a:endParaRPr lang="en-US" sz="1200" dirty="0"/>
-          </a:p>
-        </p:txBody>
-      </p:sp>
-      <p:sp>
-        <p:nvSpPr>
-          <p:cNvPr id="44" name="Text 5">
-            <a:extLst>
-              <a:ext uri="{FF2B5EF4-FFF2-40B4-BE49-F238E27FC236}">
-                <a16:creationId xmlns:a16="http://schemas.microsoft.com/office/drawing/2014/main" id="{D23E1F0C-757A-42E1-AD49-385B2705298C}"/>
-              </a:ext>
-            </a:extLst>
-          </p:cNvPr>
-          <p:cNvSpPr/>
-          <p:nvPr/>
-        </p:nvSpPr>
-        <p:spPr>
-          <a:xfrm>
-            <a:off x="1074301" y="2921675"/>
-            <a:ext cx="4431884" cy="254000"/>
-          </a:xfrm>
-          <a:prstGeom prst="rect">
-            <a:avLst/>
-          </a:prstGeom>
-          <a:noFill/>
-          <a:ln/>
-        </p:spPr>
-        <p:txBody>
-          <a:bodyPr wrap="square" lIns="0" tIns="0" rIns="0" bIns="0" rtlCol="0" anchor="t">
-            <a:normAutofit/>
-          </a:bodyPr>
-          <a:lstStyle/>
-          <a:p>
-            <a:pPr marL="0" indent="0" algn="l">
-              <a:lnSpc>
-                <a:spcPts val="1800"/>
-              </a:lnSpc>
-              <a:buNone/>
-            </a:pPr>
-            <a:r>
-              <a:rPr lang="en-US" sz="1200" dirty="0">
-                <a:solidFill>
-                  <a:srgbClr val="F3F5F2"/>
-                </a:solidFill>
-                <a:latin typeface="Courier New" pitchFamily="34" charset="0"/>
-                <a:ea typeface="Courier New" pitchFamily="34" charset="-122"/>
-                <a:cs typeface="Courier New" pitchFamily="34" charset="-120"/>
-              </a:rPr>
-              <a:t>$ docker run -d --name redis-cache \</a:t>
-            </a:r>
-            <a:endParaRPr lang="en-US" sz="1200" dirty="0"/>
-          </a:p>
-        </p:txBody>
-      </p:sp>
-      <p:sp>
-        <p:nvSpPr>
-          <p:cNvPr id="45" name="Text 6">
-            <a:extLst>
-              <a:ext uri="{FF2B5EF4-FFF2-40B4-BE49-F238E27FC236}">
-                <a16:creationId xmlns:a16="http://schemas.microsoft.com/office/drawing/2014/main" id="{FF804CF7-5F0A-4A1A-825E-C719AE6AB240}"/>
-              </a:ext>
-            </a:extLst>
-          </p:cNvPr>
-          <p:cNvSpPr/>
-          <p:nvPr/>
-        </p:nvSpPr>
-        <p:spPr>
-          <a:xfrm>
-            <a:off x="1074301" y="3213735"/>
-            <a:ext cx="4431884" cy="254000"/>
-          </a:xfrm>
-          <a:prstGeom prst="rect">
-            <a:avLst/>
-          </a:prstGeom>
-          <a:noFill/>
-          <a:ln/>
-        </p:spPr>
-        <p:txBody>
-          <a:bodyPr wrap="square" lIns="0" tIns="0" rIns="0" bIns="0" rtlCol="0" anchor="t">
-            <a:normAutofit/>
-          </a:bodyPr>
-          <a:lstStyle/>
-          <a:p>
-            <a:pPr marL="0" indent="0" algn="l">
-              <a:lnSpc>
-                <a:spcPts val="1800"/>
-              </a:lnSpc>
-              <a:buNone/>
-            </a:pPr>
-            <a:r>
-              <a:rPr lang="en-US" sz="1200" dirty="0">
-                <a:solidFill>
-                  <a:srgbClr val="F3F5F2"/>
-                </a:solidFill>
-                <a:latin typeface="Courier New" pitchFamily="34" charset="0"/>
-                <a:ea typeface="Courier New" pitchFamily="34" charset="-122"/>
-                <a:cs typeface="Courier New" pitchFamily="34" charset="-120"/>
-              </a:rPr>
-              <a:t>    --restart unless-stopped \</a:t>
-            </a:r>
-            <a:endParaRPr lang="en-US" sz="1200" dirty="0"/>
-          </a:p>
-        </p:txBody>
-      </p:sp>
-      <p:sp>
-        <p:nvSpPr>
-          <p:cNvPr id="46" name="Text 7">
-            <a:extLst>
-              <a:ext uri="{FF2B5EF4-FFF2-40B4-BE49-F238E27FC236}">
-                <a16:creationId xmlns:a16="http://schemas.microsoft.com/office/drawing/2014/main" id="{24A663C8-1008-4A42-9F39-02CC281DFE5F}"/>
-              </a:ext>
-            </a:extLst>
-          </p:cNvPr>
-          <p:cNvSpPr/>
-          <p:nvPr/>
-        </p:nvSpPr>
-        <p:spPr>
-          <a:xfrm>
-            <a:off x="1074301" y="3505795"/>
-            <a:ext cx="4431884" cy="254000"/>
-          </a:xfrm>
-          <a:prstGeom prst="rect">
-            <a:avLst/>
-          </a:prstGeom>
-          <a:noFill/>
-          <a:ln/>
-        </p:spPr>
-        <p:txBody>
-          <a:bodyPr wrap="square" lIns="0" tIns="0" rIns="0" bIns="0" rtlCol="0" anchor="t">
-            <a:normAutofit/>
-          </a:bodyPr>
-          <a:lstStyle/>
-          <a:p>
-            <a:pPr marL="0" indent="0" algn="l">
-              <a:lnSpc>
-                <a:spcPts val="1800"/>
-              </a:lnSpc>
-              <a:buNone/>
-            </a:pPr>
-            <a:r>
-              <a:rPr lang="en-US" sz="1200" b="1" dirty="0">
-                <a:solidFill>
-                  <a:srgbClr val="F2B84B"/>
-                </a:solidFill>
-                <a:latin typeface="Courier New" pitchFamily="34" charset="0"/>
-                <a:ea typeface="Courier New" pitchFamily="34" charset="-122"/>
-                <a:cs typeface="Courier New" pitchFamily="34" charset="-120"/>
-              </a:rPr>
-              <a:t>    --network app-net redis:7</a:t>
-            </a:r>
-            <a:endParaRPr lang="en-US" sz="1200" dirty="0"/>
-          </a:p>
-        </p:txBody>
-      </p:sp>
-      <p:sp>
-        <p:nvSpPr>
-          <p:cNvPr id="47" name="Text 8">
-            <a:extLst>
-              <a:ext uri="{FF2B5EF4-FFF2-40B4-BE49-F238E27FC236}">
-                <a16:creationId xmlns:a16="http://schemas.microsoft.com/office/drawing/2014/main" id="{532CD5DA-7718-4A8E-8831-B62B02F6B3C1}"/>
-              </a:ext>
-            </a:extLst>
-          </p:cNvPr>
-          <p:cNvSpPr/>
-          <p:nvPr/>
-        </p:nvSpPr>
-        <p:spPr>
-          <a:xfrm>
-            <a:off x="1074301" y="3797856"/>
-            <a:ext cx="4431884" cy="254000"/>
-          </a:xfrm>
-          <a:prstGeom prst="rect">
-            <a:avLst/>
-          </a:prstGeom>
-          <a:noFill/>
-          <a:ln/>
-        </p:spPr>
-        <p:txBody>
-          <a:bodyPr wrap="square" lIns="0" tIns="0" rIns="0" bIns="0" rtlCol="0" anchor="t">
-            <a:normAutofit/>
-          </a:bodyPr>
-          <a:lstStyle/>
-          <a:p>
-            <a:pPr marL="0" indent="0" algn="l">
-              <a:lnSpc>
-                <a:spcPts val="1800"/>
-              </a:lnSpc>
-              <a:buNone/>
-            </a:pPr>
-            <a:r>
-              <a:rPr lang="en-US" sz="1200" dirty="0">
-                <a:solidFill>
-                  <a:srgbClr val="F3F5F2"/>
-                </a:solidFill>
-                <a:latin typeface="Courier New" pitchFamily="34" charset="0"/>
-                <a:ea typeface="Courier New" pitchFamily="34" charset="-122"/>
-                <a:cs typeface="Courier New" pitchFamily="34" charset="-120"/>
-              </a:rPr>
-              <a:t>$ docker network inspect app-net</a:t>
-            </a:r>
-            <a:endParaRPr lang="en-US" sz="1200" dirty="0"/>
-          </a:p>
-        </p:txBody>
-      </p:sp>
-      <p:sp>
-        <p:nvSpPr>
-          <p:cNvPr id="48" name="Text 9">
-            <a:extLst>
-              <a:ext uri="{FF2B5EF4-FFF2-40B4-BE49-F238E27FC236}">
-                <a16:creationId xmlns:a16="http://schemas.microsoft.com/office/drawing/2014/main" id="{0FA88FCB-C79E-4161-BB07-82B54DE702AE}"/>
-              </a:ext>
-            </a:extLst>
-          </p:cNvPr>
-          <p:cNvSpPr/>
-          <p:nvPr/>
-        </p:nvSpPr>
-        <p:spPr>
-          <a:xfrm>
-            <a:off x="1074301" y="4089916"/>
-            <a:ext cx="4431884" cy="254000"/>
-          </a:xfrm>
-          <a:prstGeom prst="rect">
-            <a:avLst/>
-          </a:prstGeom>
-          <a:noFill/>
-          <a:ln/>
-        </p:spPr>
-        <p:txBody>
-          <a:bodyPr wrap="square" lIns="0" tIns="0" rIns="0" bIns="0" rtlCol="0" anchor="t">
-            <a:normAutofit/>
-          </a:bodyPr>
-          <a:lstStyle/>
-          <a:p>
-            <a:pPr marL="0" indent="0" algn="l">
-              <a:lnSpc>
-                <a:spcPts val="1800"/>
-              </a:lnSpc>
-              <a:buNone/>
-            </a:pPr>
-            <a:r>
-              <a:rPr sz="1200" b="0">
-                <a:solidFill>
-                  <a:srgbClr val="F3F5F2"/>
-                </a:solidFill>
-                <a:latin typeface="Courier New"/>
-              </a:rPr>
-              <a:t>$ docker network ls</a:t>
-            </a:r>
-            <a:endParaRPr lang="en-US" sz="1200" dirty="0"/>
-          </a:p>
-        </p:txBody>
-      </p:sp>
-      <p:sp>
-        <p:nvSpPr>
-          <p:cNvPr id="49" name="Shape 10">
-            <a:extLst>
-              <a:ext uri="{FF2B5EF4-FFF2-40B4-BE49-F238E27FC236}">
-                <a16:creationId xmlns:a16="http://schemas.microsoft.com/office/drawing/2014/main" id="{8F857C7B-B20F-46F9-8EE1-DA98ED1AAE54}"/>
-              </a:ext>
-            </a:extLst>
-          </p:cNvPr>
-          <p:cNvSpPr/>
-          <p:nvPr/>
-        </p:nvSpPr>
-        <p:spPr>
-          <a:xfrm>
-            <a:off x="5997377" y="2043906"/>
-            <a:ext cx="349171" cy="349171"/>
-          </a:xfrm>
-          <a:prstGeom prst="roundRect">
-            <a:avLst>
-              <a:gd name="adj" fmla="val 50000"/>
-            </a:avLst>
-          </a:prstGeom>
-          <a:solidFill>
-            <a:srgbClr val="F2B84B">
-              <a:alpha val="15000"/>
-            </a:srgbClr>
-          </a:solidFill>
-          <a:ln w="6350">
-            <a:solidFill>
-              <a:srgbClr val="F2B84B"/>
-            </a:solidFill>
-            <a:prstDash val="solid"/>
-          </a:ln>
-        </p:spPr>
-      </p:sp>
-      <p:sp>
-        <p:nvSpPr>
-          <p:cNvPr id="50" name="Text 11">
-            <a:extLst>
-              <a:ext uri="{FF2B5EF4-FFF2-40B4-BE49-F238E27FC236}">
-                <a16:creationId xmlns:a16="http://schemas.microsoft.com/office/drawing/2014/main" id="{1C8F9B9E-BF92-43F2-B472-F74A689D5FE6}"/>
-              </a:ext>
-            </a:extLst>
-          </p:cNvPr>
-          <p:cNvSpPr/>
-          <p:nvPr/>
-        </p:nvSpPr>
-        <p:spPr>
-          <a:xfrm>
-            <a:off x="6122432" y="2094071"/>
-            <a:ext cx="149741" cy="274241"/>
-          </a:xfrm>
-          <a:prstGeom prst="rect">
-            <a:avLst/>
-          </a:prstGeom>
-          <a:noFill/>
-          <a:ln/>
-        </p:spPr>
-        <p:txBody>
-          <a:bodyPr wrap="square" lIns="0" tIns="0" rIns="0" bIns="0" rtlCol="0" anchor="t">
-            <a:normAutofit/>
-          </a:bodyPr>
-          <a:lstStyle/>
-          <a:p>
-            <a:pPr marL="0" indent="0" algn="l">
-              <a:lnSpc>
-                <a:spcPts val="1960"/>
-              </a:lnSpc>
-              <a:buNone/>
-            </a:pPr>
-            <a:r>
-              <a:rPr lang="en-US" sz="1400" b="1" dirty="0">
-                <a:solidFill>
-                  <a:srgbClr val="F2B84B"/>
-                </a:solidFill>
-                <a:latin typeface="Arial" pitchFamily="34" charset="0"/>
-                <a:ea typeface="Arial" pitchFamily="34" charset="-122"/>
-                <a:cs typeface="Arial" pitchFamily="34" charset="-120"/>
-              </a:rPr>
-              <a:t>1</a:t>
-            </a:r>
-            <a:endParaRPr lang="en-US" sz="1400" dirty="0"/>
-          </a:p>
-        </p:txBody>
-      </p:sp>
-      <p:sp>
-        <p:nvSpPr>
-          <p:cNvPr id="51" name="Text 12">
-            <a:extLst>
-              <a:ext uri="{FF2B5EF4-FFF2-40B4-BE49-F238E27FC236}">
-                <a16:creationId xmlns:a16="http://schemas.microsoft.com/office/drawing/2014/main" id="{B9AA4CCF-E012-41F2-9846-BB357A6ADA52}"/>
-              </a:ext>
-            </a:extLst>
-          </p:cNvPr>
-          <p:cNvSpPr/>
-          <p:nvPr/>
-        </p:nvSpPr>
-        <p:spPr>
-          <a:xfrm>
-            <a:off x="6502122" y="2040731"/>
-            <a:ext cx="5023472" cy="238641"/>
-          </a:xfrm>
-          <a:prstGeom prst="rect">
-            <a:avLst/>
-          </a:prstGeom>
-          <a:noFill/>
-          <a:ln/>
-        </p:spPr>
-        <p:txBody>
-          <a:bodyPr wrap="square" lIns="0" tIns="0" rIns="0" bIns="0" rtlCol="0" anchor="t">
-            <a:normAutofit/>
-          </a:bodyPr>
-          <a:lstStyle/>
-          <a:p>
-            <a:pPr marL="0" indent="0" algn="l">
-              <a:lnSpc>
-                <a:spcPts val="1680"/>
-              </a:lnSpc>
-              <a:buNone/>
-            </a:pPr>
-            <a:r>
-              <a:rPr lang="en-US" sz="1400" b="1" dirty="0">
-                <a:ea typeface="Arial" pitchFamily="34" charset="-122"/>
-                <a:cs typeface="Arial" pitchFamily="34" charset="-120"/>
-              </a:rPr>
-              <a:t>Eigenes Netzwerk anlegen</a:t>
-            </a:r>
-            <a:endParaRPr lang="en-US" sz="1400" dirty="0"/>
-          </a:p>
-        </p:txBody>
-      </p:sp>
-      <p:sp>
-        <p:nvSpPr>
-          <p:cNvPr id="52" name="Text 13">
-            <a:extLst>
-              <a:ext uri="{FF2B5EF4-FFF2-40B4-BE49-F238E27FC236}">
-                <a16:creationId xmlns:a16="http://schemas.microsoft.com/office/drawing/2014/main" id="{8294DD96-C001-49F2-8130-4C473B854ED3}"/>
-              </a:ext>
-            </a:extLst>
-          </p:cNvPr>
-          <p:cNvSpPr/>
-          <p:nvPr/>
-        </p:nvSpPr>
-        <p:spPr>
-          <a:xfrm>
-            <a:off x="6502122" y="2292072"/>
-            <a:ext cx="5023472" cy="416401"/>
-          </a:xfrm>
-          <a:prstGeom prst="rect">
-            <a:avLst/>
-          </a:prstGeom>
-          <a:noFill/>
-          <a:ln/>
-        </p:spPr>
-        <p:txBody>
-          <a:bodyPr wrap="square" lIns="0" tIns="0" rIns="0" bIns="0" rtlCol="0" anchor="t">
-            <a:normAutofit/>
-          </a:bodyPr>
-          <a:lstStyle/>
-          <a:p>
-            <a:pPr marL="0" indent="0" algn="l">
-              <a:lnSpc>
-                <a:spcPts val="1540"/>
-              </a:lnSpc>
-              <a:buNone/>
-            </a:pPr>
-            <a:r>
-              <a:rPr lang="en-US" sz="1400" dirty="0">
-                <a:ea typeface="Arial" pitchFamily="34" charset="-122"/>
-                <a:cs typeface="Arial" pitchFamily="34" charset="-120"/>
-              </a:rPr>
-              <a:t>Mitglieder erreichen sich gegenseitig per Name – eigener Docker-DNS pro Netzwerk</a:t>
-            </a:r>
-            <a:endParaRPr lang="en-US" sz="1400" dirty="0"/>
-          </a:p>
-        </p:txBody>
-      </p:sp>
-      <p:sp>
-        <p:nvSpPr>
-          <p:cNvPr id="53" name="Text 14">
-            <a:extLst>
-              <a:ext uri="{FF2B5EF4-FFF2-40B4-BE49-F238E27FC236}">
-                <a16:creationId xmlns:a16="http://schemas.microsoft.com/office/drawing/2014/main" id="{763870ED-19DF-43FF-A66E-56694F219C40}"/>
-              </a:ext>
-            </a:extLst>
-          </p:cNvPr>
-          <p:cNvSpPr/>
-          <p:nvPr/>
-        </p:nvSpPr>
-        <p:spPr>
-          <a:xfrm>
-            <a:off x="6502122" y="2721174"/>
-            <a:ext cx="5023472" cy="215900"/>
-          </a:xfrm>
-          <a:prstGeom prst="rect">
-            <a:avLst/>
-          </a:prstGeom>
-          <a:noFill/>
-          <a:ln/>
-        </p:spPr>
-        <p:txBody>
-          <a:bodyPr wrap="square" lIns="0" tIns="0" rIns="0" bIns="0" rtlCol="0" anchor="t">
-            <a:normAutofit/>
-          </a:bodyPr>
-          <a:lstStyle/>
-          <a:p>
-            <a:pPr marL="0" indent="0" algn="l">
-              <a:lnSpc>
-                <a:spcPts val="1500"/>
-              </a:lnSpc>
-              <a:buNone/>
-            </a:pPr>
-            <a:r>
-              <a:rPr lang="en-US" sz="1400" dirty="0">
-                <a:ea typeface="Courier New" pitchFamily="34" charset="-122"/>
-                <a:cs typeface="Courier New" pitchFamily="34" charset="-120"/>
-              </a:rPr>
-              <a:t>docker network create app-net</a:t>
-            </a:r>
-            <a:endParaRPr lang="en-US" sz="1400" dirty="0"/>
-          </a:p>
-        </p:txBody>
-      </p:sp>
-      <p:sp>
-        <p:nvSpPr>
-          <p:cNvPr id="54" name="Shape 15">
-            <a:extLst>
-              <a:ext uri="{FF2B5EF4-FFF2-40B4-BE49-F238E27FC236}">
-                <a16:creationId xmlns:a16="http://schemas.microsoft.com/office/drawing/2014/main" id="{FDA7ADAD-64AE-483B-AB8D-DFEA2D20D6F4}"/>
-              </a:ext>
-            </a:extLst>
-          </p:cNvPr>
-          <p:cNvSpPr/>
-          <p:nvPr/>
-        </p:nvSpPr>
-        <p:spPr>
-          <a:xfrm>
-            <a:off x="5997377" y="3117969"/>
-            <a:ext cx="349171" cy="349171"/>
-          </a:xfrm>
-          <a:prstGeom prst="roundRect">
-            <a:avLst>
-              <a:gd name="adj" fmla="val 50000"/>
-            </a:avLst>
-          </a:prstGeom>
-          <a:solidFill>
-            <a:srgbClr val="F2B84B">
-              <a:alpha val="15000"/>
-            </a:srgbClr>
-          </a:solidFill>
-          <a:ln w="6350">
-            <a:solidFill>
-              <a:srgbClr val="F2B84B"/>
-            </a:solidFill>
-            <a:prstDash val="solid"/>
-          </a:ln>
-        </p:spPr>
-      </p:sp>
-      <p:sp>
-        <p:nvSpPr>
-          <p:cNvPr id="55" name="Text 16">
-            <a:extLst>
-              <a:ext uri="{FF2B5EF4-FFF2-40B4-BE49-F238E27FC236}">
-                <a16:creationId xmlns:a16="http://schemas.microsoft.com/office/drawing/2014/main" id="{4164429F-9F1E-424F-AFE2-43B367F37BE9}"/>
-              </a:ext>
-            </a:extLst>
-          </p:cNvPr>
-          <p:cNvSpPr/>
-          <p:nvPr/>
-        </p:nvSpPr>
-        <p:spPr>
-          <a:xfrm>
-            <a:off x="6122432" y="3168134"/>
-            <a:ext cx="149741" cy="274241"/>
-          </a:xfrm>
-          <a:prstGeom prst="rect">
-            <a:avLst/>
-          </a:prstGeom>
-          <a:noFill/>
-          <a:ln/>
-        </p:spPr>
-        <p:txBody>
-          <a:bodyPr wrap="square" lIns="0" tIns="0" rIns="0" bIns="0" rtlCol="0" anchor="t">
-            <a:normAutofit/>
-          </a:bodyPr>
-          <a:lstStyle/>
-          <a:p>
-            <a:pPr marL="0" indent="0" algn="l">
-              <a:lnSpc>
-                <a:spcPts val="1960"/>
-              </a:lnSpc>
-              <a:buNone/>
-            </a:pPr>
-            <a:r>
-              <a:rPr lang="en-US" sz="1400" b="1" dirty="0">
-                <a:solidFill>
-                  <a:srgbClr val="F2B84B"/>
-                </a:solidFill>
-                <a:latin typeface="Arial" pitchFamily="34" charset="0"/>
-                <a:ea typeface="Arial" pitchFamily="34" charset="-122"/>
-                <a:cs typeface="Arial" pitchFamily="34" charset="-120"/>
-              </a:rPr>
-              <a:t>2</a:t>
-            </a:r>
-            <a:endParaRPr lang="en-US" sz="1400" dirty="0"/>
-          </a:p>
-        </p:txBody>
-      </p:sp>
-      <p:sp>
-        <p:nvSpPr>
-          <p:cNvPr id="56" name="Text 17">
-            <a:extLst>
-              <a:ext uri="{FF2B5EF4-FFF2-40B4-BE49-F238E27FC236}">
-                <a16:creationId xmlns:a16="http://schemas.microsoft.com/office/drawing/2014/main" id="{10AD6FAB-7B0B-43BD-A629-8F05EEBBED60}"/>
-              </a:ext>
-            </a:extLst>
-          </p:cNvPr>
-          <p:cNvSpPr/>
-          <p:nvPr/>
-        </p:nvSpPr>
-        <p:spPr>
-          <a:xfrm>
-            <a:off x="6502122" y="3114794"/>
-            <a:ext cx="5023472" cy="238641"/>
-          </a:xfrm>
-          <a:prstGeom prst="rect">
-            <a:avLst/>
-          </a:prstGeom>
-          <a:noFill/>
-          <a:ln/>
-        </p:spPr>
-        <p:txBody>
-          <a:bodyPr wrap="square" lIns="0" tIns="0" rIns="0" bIns="0" rtlCol="0" anchor="t">
-            <a:normAutofit/>
-          </a:bodyPr>
-          <a:lstStyle/>
-          <a:p>
-            <a:pPr marL="0" indent="0" algn="l">
-              <a:lnSpc>
-                <a:spcPts val="1680"/>
-              </a:lnSpc>
-              <a:buNone/>
-            </a:pPr>
-            <a:r>
-              <a:rPr lang="en-US" sz="1400" b="1" dirty="0">
-                <a:ea typeface="Arial" pitchFamily="34" charset="-122"/>
-                <a:cs typeface="Arial" pitchFamily="34" charset="-120"/>
-              </a:rPr>
-              <a:t>Bestehenden Container anbinden</a:t>
-            </a:r>
-            <a:endParaRPr lang="en-US" sz="1400" dirty="0"/>
-          </a:p>
-        </p:txBody>
-      </p:sp>
-      <p:sp>
-        <p:nvSpPr>
-          <p:cNvPr id="57" name="Text 18">
-            <a:extLst>
-              <a:ext uri="{FF2B5EF4-FFF2-40B4-BE49-F238E27FC236}">
-                <a16:creationId xmlns:a16="http://schemas.microsoft.com/office/drawing/2014/main" id="{C21BBB92-8131-4FF5-883C-DB37F1896D0C}"/>
-              </a:ext>
-            </a:extLst>
-          </p:cNvPr>
-          <p:cNvSpPr/>
-          <p:nvPr/>
-        </p:nvSpPr>
-        <p:spPr>
-          <a:xfrm>
-            <a:off x="6502122" y="3366135"/>
-            <a:ext cx="5023472" cy="416401"/>
-          </a:xfrm>
-          <a:prstGeom prst="rect">
-            <a:avLst/>
-          </a:prstGeom>
-          <a:noFill/>
-          <a:ln/>
-        </p:spPr>
-        <p:txBody>
-          <a:bodyPr wrap="square" lIns="0" tIns="0" rIns="0" bIns="0" rtlCol="0" anchor="t">
-            <a:normAutofit/>
-          </a:bodyPr>
-          <a:lstStyle/>
-          <a:p>
-            <a:pPr marL="0" indent="0" algn="l">
-              <a:lnSpc>
-                <a:spcPts val="1540"/>
-              </a:lnSpc>
-              <a:buNone/>
-            </a:pPr>
-            <a:r>
-              <a:rPr lang="en-US" sz="1400" dirty="0">
-                <a:ea typeface="Arial" pitchFamily="34" charset="-122"/>
-                <a:cs typeface="Arial" pitchFamily="34" charset="-120"/>
-              </a:rPr>
-              <a:t>nodered gehört jetzt zusätzlich zu app-net – bleibt weiterhin auch im Standard-Netz</a:t>
-            </a:r>
-            <a:endParaRPr lang="en-US" sz="1400" dirty="0"/>
-          </a:p>
-        </p:txBody>
-      </p:sp>
-      <p:sp>
-        <p:nvSpPr>
-          <p:cNvPr id="58" name="Shape 19">
-            <a:extLst>
-              <a:ext uri="{FF2B5EF4-FFF2-40B4-BE49-F238E27FC236}">
-                <a16:creationId xmlns:a16="http://schemas.microsoft.com/office/drawing/2014/main" id="{21AAD443-ED9F-4532-835D-74575E2EFA63}"/>
-              </a:ext>
-            </a:extLst>
-          </p:cNvPr>
-          <p:cNvSpPr/>
-          <p:nvPr/>
-        </p:nvSpPr>
-        <p:spPr>
-          <a:xfrm>
-            <a:off x="5997377" y="3963432"/>
-            <a:ext cx="349171" cy="349171"/>
-          </a:xfrm>
-          <a:prstGeom prst="roundRect">
-            <a:avLst>
-              <a:gd name="adj" fmla="val 50000"/>
-            </a:avLst>
-          </a:prstGeom>
-          <a:solidFill>
-            <a:srgbClr val="F2B84B">
-              <a:alpha val="15000"/>
-            </a:srgbClr>
-          </a:solidFill>
-          <a:ln w="6350">
-            <a:solidFill>
-              <a:srgbClr val="F2B84B"/>
-            </a:solidFill>
-            <a:prstDash val="solid"/>
-          </a:ln>
-        </p:spPr>
-      </p:sp>
-      <p:sp>
-        <p:nvSpPr>
-          <p:cNvPr id="59" name="Text 20">
-            <a:extLst>
-              <a:ext uri="{FF2B5EF4-FFF2-40B4-BE49-F238E27FC236}">
-                <a16:creationId xmlns:a16="http://schemas.microsoft.com/office/drawing/2014/main" id="{0F6A2A80-7820-4F44-8E7A-61751819FAFC}"/>
-              </a:ext>
-            </a:extLst>
-          </p:cNvPr>
-          <p:cNvSpPr/>
-          <p:nvPr/>
-        </p:nvSpPr>
-        <p:spPr>
-          <a:xfrm>
-            <a:off x="6122432" y="4013597"/>
-            <a:ext cx="149741" cy="274241"/>
-          </a:xfrm>
-          <a:prstGeom prst="rect">
-            <a:avLst/>
-          </a:prstGeom>
-          <a:noFill/>
-          <a:ln/>
-        </p:spPr>
-        <p:txBody>
-          <a:bodyPr wrap="square" lIns="0" tIns="0" rIns="0" bIns="0" rtlCol="0" anchor="t">
-            <a:normAutofit/>
-          </a:bodyPr>
-          <a:lstStyle/>
-          <a:p>
-            <a:pPr marL="0" indent="0" algn="l">
-              <a:lnSpc>
-                <a:spcPts val="1960"/>
-              </a:lnSpc>
-              <a:buNone/>
-            </a:pPr>
-            <a:r>
-              <a:rPr lang="en-US" sz="1400" b="1" dirty="0">
-                <a:solidFill>
-                  <a:srgbClr val="F2B84B"/>
-                </a:solidFill>
-                <a:latin typeface="Arial" pitchFamily="34" charset="0"/>
-                <a:ea typeface="Arial" pitchFamily="34" charset="-122"/>
-                <a:cs typeface="Arial" pitchFamily="34" charset="-120"/>
-              </a:rPr>
-              <a:t>3</a:t>
-            </a:r>
-            <a:endParaRPr lang="en-US" sz="1400" dirty="0"/>
-          </a:p>
-        </p:txBody>
-      </p:sp>
-      <p:sp>
-        <p:nvSpPr>
-          <p:cNvPr id="60" name="Text 21">
-            <a:extLst>
-              <a:ext uri="{FF2B5EF4-FFF2-40B4-BE49-F238E27FC236}">
-                <a16:creationId xmlns:a16="http://schemas.microsoft.com/office/drawing/2014/main" id="{477E6D75-3A3B-475F-8766-52DFA7645D93}"/>
-              </a:ext>
-            </a:extLst>
-          </p:cNvPr>
-          <p:cNvSpPr/>
-          <p:nvPr/>
-        </p:nvSpPr>
-        <p:spPr>
-          <a:xfrm>
-            <a:off x="6502122" y="3960257"/>
-            <a:ext cx="5023472" cy="238641"/>
-          </a:xfrm>
-          <a:prstGeom prst="rect">
-            <a:avLst/>
-          </a:prstGeom>
-          <a:noFill/>
-          <a:ln/>
-        </p:spPr>
-        <p:txBody>
-          <a:bodyPr wrap="square" lIns="0" tIns="0" rIns="0" bIns="0" rtlCol="0" anchor="t">
-            <a:normAutofit/>
-          </a:bodyPr>
-          <a:lstStyle/>
-          <a:p>
-            <a:pPr marL="0" indent="0" algn="l">
-              <a:lnSpc>
-                <a:spcPts val="1680"/>
-              </a:lnSpc>
-              <a:buNone/>
-            </a:pPr>
-            <a:r>
-              <a:rPr lang="en-US" sz="1400" b="1" dirty="0">
-                <a:ea typeface="Arial" pitchFamily="34" charset="-122"/>
-                <a:cs typeface="Arial" pitchFamily="34" charset="-120"/>
-              </a:rPr>
-              <a:t>Neuen, rein internen Dienst starten</a:t>
-            </a:r>
-            <a:endParaRPr lang="en-US" sz="1400" dirty="0"/>
-          </a:p>
-        </p:txBody>
-      </p:sp>
-      <p:sp>
-        <p:nvSpPr>
-          <p:cNvPr id="61" name="Text 22">
-            <a:extLst>
-              <a:ext uri="{FF2B5EF4-FFF2-40B4-BE49-F238E27FC236}">
-                <a16:creationId xmlns:a16="http://schemas.microsoft.com/office/drawing/2014/main" id="{3CE88406-4D3B-44C6-A32D-A5EF1D2984C7}"/>
-              </a:ext>
-            </a:extLst>
-          </p:cNvPr>
-          <p:cNvSpPr/>
-          <p:nvPr/>
-        </p:nvSpPr>
-        <p:spPr>
-          <a:xfrm>
-            <a:off x="6502122" y="4198858"/>
-            <a:ext cx="5023472" cy="220901"/>
-          </a:xfrm>
-          <a:prstGeom prst="rect">
-            <a:avLst/>
-          </a:prstGeom>
-          <a:noFill/>
-          <a:ln/>
-        </p:spPr>
-        <p:txBody>
-          <a:bodyPr wrap="square" lIns="0" tIns="0" rIns="0" bIns="0" rtlCol="0" anchor="t">
-            <a:normAutofit/>
-          </a:bodyPr>
-          <a:lstStyle/>
-          <a:p>
-            <a:pPr marL="0" indent="0" algn="l">
-              <a:lnSpc>
-                <a:spcPts val="1540"/>
-              </a:lnSpc>
-              <a:buNone/>
-            </a:pPr>
-            <a:r>
-              <a:rPr lang="en-US" sz="1400" dirty="0">
-                <a:ea typeface="Arial" pitchFamily="34" charset="-122"/>
-                <a:cs typeface="Arial" pitchFamily="34" charset="-120"/>
-              </a:rPr>
-              <a:t>--network app-net – bewusst ohne -p</a:t>
-            </a:r>
-            <a:endParaRPr lang="en-US" sz="1400" dirty="0"/>
-          </a:p>
-        </p:txBody>
-      </p:sp>
-      <p:sp>
-        <p:nvSpPr>
-          <p:cNvPr id="62" name="Text 23">
-            <a:extLst>
-              <a:ext uri="{FF2B5EF4-FFF2-40B4-BE49-F238E27FC236}">
-                <a16:creationId xmlns:a16="http://schemas.microsoft.com/office/drawing/2014/main" id="{797138DB-BC51-4397-BF84-450B27ADBDB3}"/>
-              </a:ext>
-            </a:extLst>
-          </p:cNvPr>
-          <p:cNvSpPr/>
-          <p:nvPr/>
-        </p:nvSpPr>
-        <p:spPr>
-          <a:xfrm>
-            <a:off x="6502122" y="4419719"/>
-            <a:ext cx="5023472" cy="220901"/>
-          </a:xfrm>
-          <a:prstGeom prst="rect">
-            <a:avLst/>
-          </a:prstGeom>
-          <a:noFill/>
-          <a:ln/>
-        </p:spPr>
-        <p:txBody>
-          <a:bodyPr wrap="square" lIns="0" tIns="0" rIns="0" bIns="0" rtlCol="0" anchor="t">
-            <a:normAutofit/>
-          </a:bodyPr>
-          <a:lstStyle/>
-          <a:p>
-            <a:pPr marL="0" indent="0" algn="l">
-              <a:lnSpc>
-                <a:spcPts val="1540"/>
-              </a:lnSpc>
-              <a:buNone/>
-            </a:pPr>
-            <a:r>
-              <a:rPr lang="en-US" sz="1400" dirty="0">
-                <a:ea typeface="Arial" pitchFamily="34" charset="-122"/>
-                <a:cs typeface="Arial" pitchFamily="34" charset="-120"/>
-              </a:rPr>
-              <a:t>docker run -d --name redis-cache --network app-net redis:7</a:t>
-            </a:r>
-            <a:endParaRPr lang="en-US" sz="1400" dirty="0"/>
-          </a:p>
-        </p:txBody>
-      </p:sp>
-      <p:sp>
-        <p:nvSpPr>
-          <p:cNvPr id="67" name="Text 27">
-            <a:extLst>
-              <a:ext uri="{FF2B5EF4-FFF2-40B4-BE49-F238E27FC236}">
-                <a16:creationId xmlns:a16="http://schemas.microsoft.com/office/drawing/2014/main" id="{1A300C58-C33C-4563-9481-8813CF0D164F}"/>
-              </a:ext>
-            </a:extLst>
-          </p:cNvPr>
-          <p:cNvSpPr/>
-          <p:nvPr/>
-        </p:nvSpPr>
-        <p:spPr>
-          <a:xfrm>
-            <a:off x="1511141" y="5466160"/>
-            <a:ext cx="9928725" cy="223520"/>
-          </a:xfrm>
-          <a:prstGeom prst="rect">
-            <a:avLst/>
-          </a:prstGeom>
-          <a:noFill/>
-          <a:ln/>
-        </p:spPr>
-        <p:txBody>
-          <a:bodyPr wrap="square" lIns="0" tIns="0" rIns="0" bIns="0" rtlCol="0" anchor="t">
-            <a:normAutofit/>
-          </a:bodyPr>
-          <a:lstStyle/>
-          <a:p>
-            <a:pPr marL="0" indent="0" algn="l">
-              <a:lnSpc>
-                <a:spcPts val="1560"/>
-              </a:lnSpc>
-              <a:buNone/>
-            </a:pPr>
-            <a:r>
-              <a:rPr lang="en-US" sz="1400" dirty="0">
-                <a:latin typeface="Arial" pitchFamily="34" charset="0"/>
-                <a:ea typeface="Arial" pitchFamily="34" charset="-122"/>
-                <a:cs typeface="Arial" pitchFamily="34" charset="-120"/>
-              </a:rPr>
-              <a:t>Kein -p bei redis-cache: bewusst nur innerhalb von app-net erreichbar – nicht vom Host, nicht aus dem Internet.</a:t>
-            </a:r>
-            <a:endParaRPr lang="en-US" sz="1400" dirty="0"/>
-          </a:p>
-        </p:txBody>
-      </p:sp>
-      <p:pic>
-        <p:nvPicPr>
-          <p:cNvPr id="68" name="Grafik 67" descr="Ausrufezeichen mit einfarbiger Füllung">
-            <a:extLst>
-              <a:ext uri="{FF2B5EF4-FFF2-40B4-BE49-F238E27FC236}">
-                <a16:creationId xmlns:a16="http://schemas.microsoft.com/office/drawing/2014/main" id="{0254A55C-46A4-4C6E-8348-4E0413201944}"/>
-              </a:ext>
-            </a:extLst>
-          </p:cNvPr>
-          <p:cNvPicPr>
-            <a:picLocks noChangeAspect="1"/>
-          </p:cNvPicPr>
-          <p:nvPr/>
-        </p:nvPicPr>
-        <p:blipFill>
-          <a:blip r:embed="rId2">
-            <a:extLst>
-              <a:ext uri="{28A0092B-C50C-407E-A947-70E740481C1C}">
-                <a14:useLocalDpi xmlns:a14="http://schemas.microsoft.com/office/drawing/2010/main" val="0"/>
-              </a:ext>
-              <a:ext uri="{96DAC541-7B7A-43D3-8B79-37D633B846F1}">
-                <asvg:svgBlip xmlns:asvg="http://schemas.microsoft.com/office/drawing/2016/SVG/main" r:embed="rId3"/>
-              </a:ext>
-            </a:extLst>
-          </a:blip>
-          <a:stretch>
-            <a:fillRect/>
-          </a:stretch>
-        </p:blipFill>
-        <p:spPr>
-          <a:xfrm>
-            <a:off x="596741" y="5008960"/>
-            <a:ext cx="914400" cy="914400"/>
-          </a:xfrm>
-          <a:prstGeom prst="rect">
-            <a:avLst/>
-          </a:prstGeom>
-        </p:spPr>
-      </p:pic>
+            <a:r>
+              <a:rPr sz="1300" b="1" dirty="0" err="1">
+                <a:solidFill>
+                  <a:srgbClr val="1E2761"/>
+                </a:solidFill>
+                <a:latin typeface="Calibri"/>
+              </a:rPr>
+              <a:t>Jedes</a:t>
+            </a:r>
+            <a:r>
+              <a:rPr sz="1300" b="1" dirty="0">
+                <a:solidFill>
+                  <a:srgbClr val="1E2761"/>
+                </a:solidFill>
+                <a:latin typeface="Calibri"/>
+              </a:rPr>
+              <a:t> Docker-</a:t>
+            </a:r>
+            <a:r>
+              <a:rPr sz="1300" b="1" dirty="0" err="1">
+                <a:solidFill>
+                  <a:srgbClr val="1E2761"/>
+                </a:solidFill>
+                <a:latin typeface="Calibri"/>
+              </a:rPr>
+              <a:t>Netzwerk</a:t>
+            </a:r>
+            <a:r>
+              <a:rPr sz="1300" b="1" dirty="0">
+                <a:solidFill>
+                  <a:srgbClr val="1E2761"/>
+                </a:solidFill>
+                <a:latin typeface="Calibri"/>
+              </a:rPr>
+              <a:t> </a:t>
+            </a:r>
+            <a:r>
+              <a:rPr sz="1300" b="1" dirty="0" err="1">
+                <a:solidFill>
+                  <a:srgbClr val="1E2761"/>
+                </a:solidFill>
+                <a:latin typeface="Calibri"/>
+              </a:rPr>
+              <a:t>ist</a:t>
+            </a:r>
+            <a:r>
+              <a:rPr sz="1300" b="1" dirty="0">
+                <a:solidFill>
+                  <a:srgbClr val="1E2761"/>
+                </a:solidFill>
+                <a:latin typeface="Calibri"/>
+              </a:rPr>
+              <a:t> </a:t>
+            </a:r>
+            <a:r>
+              <a:rPr sz="1300" b="1" dirty="0" err="1">
+                <a:solidFill>
+                  <a:srgbClr val="1E2761"/>
+                </a:solidFill>
+                <a:latin typeface="Calibri"/>
+              </a:rPr>
+              <a:t>eine</a:t>
+            </a:r>
+            <a:r>
+              <a:rPr sz="1300" b="1" dirty="0">
+                <a:solidFill>
+                  <a:srgbClr val="1E2761"/>
+                </a:solidFill>
+                <a:latin typeface="Calibri"/>
+              </a:rPr>
+              <a:t> </a:t>
+            </a:r>
+            <a:r>
+              <a:rPr sz="1300" b="1" dirty="0" err="1">
+                <a:solidFill>
+                  <a:srgbClr val="1E2761"/>
+                </a:solidFill>
+                <a:latin typeface="Calibri"/>
+              </a:rPr>
+              <a:t>eigene</a:t>
+            </a:r>
+            <a:r>
+              <a:rPr sz="1300" b="1" dirty="0">
+                <a:solidFill>
+                  <a:srgbClr val="1E2761"/>
+                </a:solidFill>
+                <a:latin typeface="Calibri"/>
+              </a:rPr>
+              <a:t> </a:t>
+            </a:r>
+            <a:r>
+              <a:rPr lang="de-DE" sz="1300" b="1" dirty="0">
+                <a:solidFill>
+                  <a:srgbClr val="1E2761"/>
+                </a:solidFill>
+                <a:latin typeface="Calibri"/>
+              </a:rPr>
+              <a:t>Broadcastdomäne </a:t>
+            </a:r>
+            <a:r>
+              <a:rPr sz="1300" b="1" dirty="0" err="1">
+                <a:solidFill>
+                  <a:srgbClr val="1E2761"/>
+                </a:solidFill>
+                <a:latin typeface="Calibri"/>
+              </a:rPr>
+              <a:t>mit</a:t>
+            </a:r>
+            <a:r>
+              <a:rPr sz="1300" b="1" dirty="0">
+                <a:solidFill>
+                  <a:srgbClr val="1E2761"/>
+                </a:solidFill>
+                <a:latin typeface="Calibri"/>
+              </a:rPr>
+              <a:t> </a:t>
+            </a:r>
+            <a:r>
+              <a:rPr sz="1300" b="1" dirty="0" err="1">
+                <a:solidFill>
+                  <a:srgbClr val="1E2761"/>
+                </a:solidFill>
+                <a:latin typeface="Calibri"/>
+              </a:rPr>
+              <a:t>eigenem</a:t>
+            </a:r>
+            <a:r>
+              <a:rPr sz="1300" b="1" dirty="0">
+                <a:solidFill>
+                  <a:srgbClr val="1E2761"/>
+                </a:solidFill>
+                <a:latin typeface="Calibri"/>
+              </a:rPr>
+              <a:t> </a:t>
+            </a:r>
+            <a:r>
+              <a:rPr sz="1300" b="1" dirty="0" err="1">
+                <a:solidFill>
+                  <a:srgbClr val="1E2761"/>
+                </a:solidFill>
+                <a:latin typeface="Calibri"/>
+              </a:rPr>
+              <a:t>Subnetz</a:t>
+            </a:r>
+            <a:r>
+              <a:rPr sz="1300" b="1" dirty="0">
+                <a:solidFill>
+                  <a:srgbClr val="1E2761"/>
+                </a:solidFill>
+                <a:latin typeface="Calibri"/>
+              </a:rPr>
+              <a:t> und </a:t>
+            </a:r>
+            <a:r>
+              <a:rPr sz="1300" b="1" dirty="0" err="1">
+                <a:solidFill>
+                  <a:srgbClr val="1E2761"/>
+                </a:solidFill>
+                <a:latin typeface="Calibri"/>
+              </a:rPr>
+              <a:t>eigenem</a:t>
+            </a:r>
+            <a:r>
+              <a:rPr sz="1300" b="1" dirty="0">
+                <a:solidFill>
+                  <a:srgbClr val="1E2761"/>
+                </a:solidFill>
+                <a:latin typeface="Calibri"/>
+              </a:rPr>
+              <a:t> DNS. </a:t>
+            </a:r>
+            <a:r>
+              <a:rPr sz="1300" b="1" dirty="0" err="1">
+                <a:solidFill>
+                  <a:srgbClr val="1E2761"/>
+                </a:solidFill>
+                <a:latin typeface="Calibri"/>
+              </a:rPr>
+              <a:t>Zwischen</a:t>
+            </a:r>
+            <a:r>
+              <a:rPr sz="1300" b="1" dirty="0">
+                <a:solidFill>
+                  <a:srgbClr val="1E2761"/>
+                </a:solidFill>
+                <a:latin typeface="Calibri"/>
+              </a:rPr>
+              <a:t> </a:t>
+            </a:r>
+            <a:r>
+              <a:rPr sz="1300" b="1" dirty="0" err="1">
+                <a:solidFill>
+                  <a:srgbClr val="1E2761"/>
+                </a:solidFill>
+                <a:latin typeface="Calibri"/>
+              </a:rPr>
+              <a:t>zwei</a:t>
+            </a:r>
+            <a:r>
+              <a:rPr sz="1300" b="1" dirty="0">
+                <a:solidFill>
+                  <a:srgbClr val="1E2761"/>
+                </a:solidFill>
+                <a:latin typeface="Calibri"/>
+              </a:rPr>
+              <a:t> </a:t>
+            </a:r>
+            <a:r>
+              <a:rPr sz="1300" b="1" dirty="0" err="1">
+                <a:solidFill>
+                  <a:srgbClr val="1E2761"/>
+                </a:solidFill>
+                <a:latin typeface="Calibri"/>
+              </a:rPr>
+              <a:t>Netzwerken</a:t>
+            </a:r>
+            <a:r>
+              <a:rPr sz="1300" b="1" dirty="0">
+                <a:solidFill>
+                  <a:srgbClr val="1E2761"/>
+                </a:solidFill>
+                <a:latin typeface="Calibri"/>
+              </a:rPr>
+              <a:t> </a:t>
+            </a:r>
+            <a:r>
+              <a:rPr sz="1300" b="1" dirty="0" err="1">
+                <a:solidFill>
+                  <a:srgbClr val="1E2761"/>
+                </a:solidFill>
+                <a:latin typeface="Calibri"/>
+              </a:rPr>
+              <a:t>gibt</a:t>
+            </a:r>
+            <a:r>
+              <a:rPr sz="1300" b="1" dirty="0">
+                <a:solidFill>
+                  <a:srgbClr val="1E2761"/>
+                </a:solidFill>
+                <a:latin typeface="Calibri"/>
+              </a:rPr>
+              <a:t> es </a:t>
+            </a:r>
+            <a:r>
+              <a:rPr sz="1300" b="1" dirty="0" err="1">
+                <a:solidFill>
+                  <a:srgbClr val="1E2761"/>
+                </a:solidFill>
+                <a:latin typeface="Calibri"/>
+              </a:rPr>
+              <a:t>kein</a:t>
+            </a:r>
+            <a:r>
+              <a:rPr sz="1300" b="1" dirty="0">
+                <a:solidFill>
+                  <a:srgbClr val="1E2761"/>
+                </a:solidFill>
+                <a:latin typeface="Calibri"/>
+              </a:rPr>
+              <a:t> </a:t>
+            </a:r>
+            <a:r>
+              <a:rPr sz="1300" b="1" dirty="0" err="1">
+                <a:solidFill>
+                  <a:srgbClr val="1E2761"/>
+                </a:solidFill>
+                <a:latin typeface="Calibri"/>
+              </a:rPr>
+              <a:t>automatisches</a:t>
+            </a:r>
+            <a:r>
+              <a:rPr sz="1300" b="1" dirty="0">
+                <a:solidFill>
+                  <a:srgbClr val="1E2761"/>
+                </a:solidFill>
+                <a:latin typeface="Calibri"/>
+              </a:rPr>
+              <a:t> Routing</a:t>
+            </a:r>
+            <a:r>
+              <a:rPr lang="de-DE" sz="1300" b="1" dirty="0">
+                <a:solidFill>
+                  <a:srgbClr val="1E2761"/>
+                </a:solidFill>
+                <a:latin typeface="Calibri"/>
+              </a:rPr>
+              <a:t>. N</a:t>
+            </a:r>
+            <a:r>
+              <a:rPr sz="1300" b="1" dirty="0" err="1">
+                <a:solidFill>
+                  <a:srgbClr val="1E2761"/>
+                </a:solidFill>
+                <a:latin typeface="Calibri"/>
+              </a:rPr>
+              <a:t>ur</a:t>
+            </a:r>
+            <a:r>
+              <a:rPr sz="1300" b="1" dirty="0">
+                <a:solidFill>
+                  <a:srgbClr val="1E2761"/>
+                </a:solidFill>
+                <a:latin typeface="Calibri"/>
+              </a:rPr>
+              <a:t> </a:t>
+            </a:r>
+            <a:r>
+              <a:rPr sz="1300" b="1" dirty="0" err="1">
+                <a:solidFill>
+                  <a:srgbClr val="1E2761"/>
+                </a:solidFill>
+                <a:latin typeface="Calibri"/>
+              </a:rPr>
+              <a:t>ein</a:t>
+            </a:r>
+            <a:r>
+              <a:rPr sz="1300" b="1" dirty="0">
+                <a:solidFill>
+                  <a:srgbClr val="1E2761"/>
+                </a:solidFill>
+                <a:latin typeface="Calibri"/>
+              </a:rPr>
+              <a:t> Container, der </a:t>
+            </a:r>
+            <a:r>
+              <a:rPr sz="1300" b="1" dirty="0" err="1">
+                <a:solidFill>
+                  <a:srgbClr val="1E2761"/>
+                </a:solidFill>
+                <a:latin typeface="Calibri"/>
+              </a:rPr>
+              <a:t>wie</a:t>
+            </a:r>
+            <a:r>
+              <a:rPr sz="1300" b="1" dirty="0">
+                <a:solidFill>
+                  <a:srgbClr val="1E2761"/>
+                </a:solidFill>
+                <a:latin typeface="Calibri"/>
+              </a:rPr>
+              <a:t> </a:t>
+            </a:r>
+            <a:r>
+              <a:rPr sz="1300" b="1" dirty="0" err="1">
+                <a:solidFill>
+                  <a:srgbClr val="1E2761"/>
+                </a:solidFill>
+                <a:latin typeface="Calibri"/>
+              </a:rPr>
+              <a:t>nodered</a:t>
+            </a:r>
+            <a:r>
+              <a:rPr sz="1300" b="1" dirty="0">
+                <a:solidFill>
+                  <a:srgbClr val="1E2761"/>
+                </a:solidFill>
+                <a:latin typeface="Calibri"/>
+              </a:rPr>
+              <a:t> </a:t>
+            </a:r>
+            <a:r>
+              <a:rPr sz="1300" b="1" dirty="0" err="1">
+                <a:solidFill>
+                  <a:srgbClr val="1E2761"/>
+                </a:solidFill>
+                <a:latin typeface="Calibri"/>
+              </a:rPr>
+              <a:t>Mitglied</a:t>
+            </a:r>
+            <a:r>
+              <a:rPr sz="1300" b="1" dirty="0">
+                <a:solidFill>
+                  <a:srgbClr val="1E2761"/>
+                </a:solidFill>
+                <a:latin typeface="Calibri"/>
+              </a:rPr>
+              <a:t> in </a:t>
+            </a:r>
+            <a:r>
+              <a:rPr sz="1300" b="1" dirty="0" err="1">
+                <a:solidFill>
+                  <a:srgbClr val="1E2761"/>
+                </a:solidFill>
+                <a:latin typeface="Calibri"/>
+              </a:rPr>
+              <a:t>beiden</a:t>
+            </a:r>
+            <a:r>
+              <a:rPr sz="1300" b="1" dirty="0">
+                <a:solidFill>
+                  <a:srgbClr val="1E2761"/>
+                </a:solidFill>
+                <a:latin typeface="Calibri"/>
+              </a:rPr>
+              <a:t> </a:t>
+            </a:r>
+            <a:r>
+              <a:rPr sz="1300" b="1" dirty="0" err="1">
+                <a:solidFill>
+                  <a:srgbClr val="1E2761"/>
+                </a:solidFill>
+                <a:latin typeface="Calibri"/>
+              </a:rPr>
+              <a:t>ist</a:t>
+            </a:r>
+            <a:r>
+              <a:rPr sz="1300" b="1" dirty="0">
+                <a:solidFill>
+                  <a:srgbClr val="1E2761"/>
+                </a:solidFill>
+                <a:latin typeface="Calibri"/>
+              </a:rPr>
+              <a:t>, </a:t>
+            </a:r>
+            <a:r>
+              <a:rPr sz="1300" b="1" dirty="0" err="1">
+                <a:solidFill>
+                  <a:srgbClr val="1E2761"/>
+                </a:solidFill>
+                <a:latin typeface="Calibri"/>
+              </a:rPr>
+              <a:t>kann</a:t>
+            </a:r>
+            <a:r>
+              <a:rPr sz="1300" b="1" dirty="0">
+                <a:solidFill>
+                  <a:srgbClr val="1E2761"/>
+                </a:solidFill>
+                <a:latin typeface="Calibri"/>
+              </a:rPr>
+              <a:t> </a:t>
+            </a:r>
+            <a:r>
+              <a:rPr sz="1300" b="1" dirty="0" err="1">
+                <a:solidFill>
+                  <a:srgbClr val="1E2761"/>
+                </a:solidFill>
+                <a:latin typeface="Calibri"/>
+              </a:rPr>
+              <a:t>zwischen</a:t>
+            </a:r>
+            <a:r>
+              <a:rPr sz="1300" b="1" dirty="0">
+                <a:solidFill>
+                  <a:srgbClr val="1E2761"/>
+                </a:solidFill>
+                <a:latin typeface="Calibri"/>
+              </a:rPr>
+              <a:t> </a:t>
+            </a:r>
+            <a:r>
+              <a:rPr sz="1300" b="1" dirty="0" err="1">
+                <a:solidFill>
+                  <a:srgbClr val="1E2761"/>
+                </a:solidFill>
+                <a:latin typeface="Calibri"/>
+              </a:rPr>
+              <a:t>ihnen</a:t>
+            </a:r>
+            <a:r>
+              <a:rPr sz="1300" b="1" dirty="0">
+                <a:solidFill>
+                  <a:srgbClr val="1E2761"/>
+                </a:solidFill>
+                <a:latin typeface="Calibri"/>
+              </a:rPr>
+              <a:t> </a:t>
+            </a:r>
+            <a:r>
+              <a:rPr sz="1300" b="1" dirty="0" err="1">
+                <a:solidFill>
+                  <a:srgbClr val="1E2761"/>
+                </a:solidFill>
+                <a:latin typeface="Calibri"/>
+              </a:rPr>
+              <a:t>vermitteln</a:t>
+            </a:r>
+            <a:r>
+              <a:rPr sz="1300" b="1" dirty="0">
+                <a:solidFill>
+                  <a:srgbClr val="1E2761"/>
+                </a:solidFill>
+                <a:latin typeface="Calibri"/>
+              </a:rPr>
+              <a:t>.</a:t>
+            </a:r>
+          </a:p>
+        </p:txBody>
+      </p:sp>
     </p:spTree>
   </p:cSld>
   <p:clrMapOvr>
@@ -7406,7 +7871,7 @@
       </p:grpSpPr>
       <p:sp>
         <p:nvSpPr>
-          <p:cNvPr id="4" name="Title 3"/>
+          <p:cNvPr id="2" name="Titel 1"/>
           <p:cNvSpPr>
             <a:spLocks noGrp="1"/>
           </p:cNvSpPr>
@@ -7416,7 +7881,7 @@
         </p:nvSpPr>
         <p:spPr>
           <a:xfrm>
-            <a:off x="609601" y="274638"/>
+            <a:off x="0" y="534949"/>
             <a:ext cx="10953313" cy="1143000"/>
           </a:xfrm>
         </p:spPr>
@@ -7425,16 +7890,22 @@
           <a:lstStyle/>
           <a:p>
             <a:r>
-              <a:rPr lang="de-DE" sz="2400" dirty="0"/>
-              <a:t>Namensauflösung: mit vs. ohne app-net</a:t>
-            </a:r>
-            <a:endParaRPr sz="2400" dirty="0"/>
-          </a:p>
-        </p:txBody>
-      </p:sp>
-      <p:sp>
-        <p:nvSpPr>
-          <p:cNvPr id="2" name="Foliennummernplatzhalter 4"/>
+              <a:rPr lang="en-US" sz="2000" dirty="0"/>
+              <a:t>Netzwerk anlegen, verbinden &amp; internen Dienst starten</a:t>
+            </a:r>
+            <a:br>
+              <a:rPr lang="en-US" sz="2000" dirty="0"/>
+            </a:br>
+            <a:br>
+              <a:rPr lang="en-US" sz="2000" dirty="0"/>
+            </a:br>
+            <a:endParaRPr lang="de-DE" sz="1998" dirty="0"/>
+          </a:p>
+        </p:txBody>
+      </p:sp>
+      <p:sp>
+        <p:nvSpPr>
+          <p:cNvPr id="5" name="Foliennummernplatzhalter 4"/>
           <p:cNvSpPr>
             <a:spLocks noGrp="1"/>
           </p:cNvSpPr>
@@ -7458,119 +7929,372 @@
       </p:sp>
       <p:sp>
         <p:nvSpPr>
-          <p:cNvPr id="5" name="TextBox 4"/>
-          <p:cNvSpPr txBox="1"/>
-          <p:nvPr/>
-        </p:nvSpPr>
-        <p:spPr>
-          <a:xfrm>
-            <a:off x="548640" y="2764398"/>
-            <a:ext cx="5257800" cy="292608"/>
-          </a:xfrm>
-          <a:prstGeom prst="rect">
-            <a:avLst/>
-          </a:prstGeom>
-          <a:noFill/>
-        </p:spPr>
-        <p:txBody>
-          <a:bodyPr wrap="square" lIns="0" tIns="0" rIns="0" bIns="0">
-            <a:spAutoFit/>
-          </a:bodyPr>
-          <a:lstStyle/>
-          <a:p>
-            <a:pPr algn="ctr"/>
-            <a:r>
-              <a:rPr sz="1500" b="1" i="0">
-                <a:solidFill>
-                  <a:srgbClr val="1E6B3C"/>
-                </a:solidFill>
-                <a:latin typeface="Arial"/>
-              </a:rPr>
-              <a:t>Mit --network app-net</a:t>
-            </a:r>
-          </a:p>
-        </p:txBody>
-      </p:sp>
-      <p:sp>
-        <p:nvSpPr>
-          <p:cNvPr id="6" name="TextBox 5"/>
-          <p:cNvSpPr txBox="1"/>
-          <p:nvPr/>
-        </p:nvSpPr>
-        <p:spPr>
-          <a:xfrm>
-            <a:off x="6385255" y="2764398"/>
-            <a:ext cx="5257800" cy="292608"/>
-          </a:xfrm>
-          <a:prstGeom prst="rect">
-            <a:avLst/>
-          </a:prstGeom>
-          <a:noFill/>
-        </p:spPr>
-        <p:txBody>
-          <a:bodyPr wrap="square" lIns="0" tIns="0" rIns="0" bIns="0">
-            <a:spAutoFit/>
-          </a:bodyPr>
-          <a:lstStyle/>
-          <a:p>
-            <a:pPr algn="ctr"/>
-            <a:r>
-              <a:rPr sz="1500" b="1" i="0">
-                <a:solidFill>
-                  <a:srgbClr val="B03A2E"/>
-                </a:solidFill>
-                <a:latin typeface="Arial"/>
-              </a:rPr>
-              <a:t>Ohne --network (Standard-Bridge)</a:t>
-            </a:r>
-          </a:p>
-        </p:txBody>
-      </p:sp>
-      <p:sp>
-        <p:nvSpPr>
-          <p:cNvPr id="7" name="Rounded Rectangle 6"/>
+          <p:cNvPr id="41" name="Shape 2">
+            <a:extLst>
+              <a:ext uri="{FF2B5EF4-FFF2-40B4-BE49-F238E27FC236}">
+                <a16:creationId xmlns:a16="http://schemas.microsoft.com/office/drawing/2014/main" id="{38C067B0-3936-41B1-A465-6CF531D3A8B9}"/>
+              </a:ext>
+            </a:extLst>
+          </p:cNvPr>
           <p:cNvSpPr/>
           <p:nvPr/>
         </p:nvSpPr>
         <p:spPr>
           <a:xfrm>
-            <a:off x="548640" y="3194165"/>
-            <a:ext cx="5257800" cy="566928"/>
+            <a:off x="815896" y="1897817"/>
+            <a:ext cx="4819610" cy="2860437"/>
           </a:xfrm>
           <a:prstGeom prst="roundRect">
             <a:avLst>
-              <a:gd name="adj" fmla="val 12000"/>
+              <a:gd name="adj" fmla="val 4329"/>
             </a:avLst>
           </a:prstGeom>
           <a:solidFill>
             <a:srgbClr val="1A222C"/>
           </a:solidFill>
-          <a:ln w="12700">
+          <a:ln w="6350">
             <a:solidFill>
-              <a:srgbClr val="2E3A4A"/>
+              <a:srgbClr val="2A3540"/>
             </a:solidFill>
+            <a:prstDash val="solid"/>
           </a:ln>
-          <a:effectLst/>
-        </p:spPr>
-        <p:style>
-          <a:lnRef idx="1">
-            <a:schemeClr val="accent1"/>
-          </a:lnRef>
-          <a:fillRef idx="3">
-            <a:schemeClr val="accent1"/>
-          </a:fillRef>
-          <a:effectRef idx="2">
-            <a:schemeClr val="accent1"/>
-          </a:effectRef>
-          <a:fontRef idx="minor">
-            <a:schemeClr val="lt1"/>
-          </a:fontRef>
-        </p:style>
-        <p:txBody>
-          <a:bodyPr wrap="square" tIns="36576" bIns="36576" rtlCol="0" anchor="ctr"/>
-          <a:lstStyle/>
-          <a:p>
-            <a:pPr algn="l"/>
+        </p:spPr>
+      </p:sp>
+      <p:sp>
+        <p:nvSpPr>
+          <p:cNvPr id="42" name="Text 3">
+            <a:extLst>
+              <a:ext uri="{FF2B5EF4-FFF2-40B4-BE49-F238E27FC236}">
+                <a16:creationId xmlns:a16="http://schemas.microsoft.com/office/drawing/2014/main" id="{1AAB280A-C58B-4600-91C2-05E8E72EA5FA}"/>
+              </a:ext>
+            </a:extLst>
+          </p:cNvPr>
+          <p:cNvSpPr/>
+          <p:nvPr/>
+        </p:nvSpPr>
+        <p:spPr>
+          <a:xfrm>
+            <a:off x="1074301" y="2337554"/>
+            <a:ext cx="4431884" cy="254000"/>
+          </a:xfrm>
+          <a:prstGeom prst="rect">
+            <a:avLst/>
+          </a:prstGeom>
+          <a:noFill/>
+          <a:ln/>
+        </p:spPr>
+        <p:txBody>
+          <a:bodyPr wrap="square" lIns="0" tIns="0" rIns="0" bIns="0" rtlCol="0" anchor="t">
+            <a:normAutofit/>
+          </a:bodyPr>
+          <a:lstStyle/>
+          <a:p>
+            <a:pPr marL="0" indent="0" algn="l">
+              <a:lnSpc>
+                <a:spcPts val="1800"/>
+              </a:lnSpc>
+              <a:buNone/>
+            </a:pPr>
+            <a:r>
+              <a:rPr lang="en-US" sz="1200" dirty="0">
+                <a:solidFill>
+                  <a:srgbClr val="9BA8B5"/>
+                </a:solidFill>
+                <a:latin typeface="Courier New" pitchFamily="34" charset="0"/>
+                <a:ea typeface="Courier New" pitchFamily="34" charset="-122"/>
+                <a:cs typeface="Courier New" pitchFamily="34" charset="-120"/>
+              </a:rPr>
+              <a:t>$ docker network create app-net</a:t>
+            </a:r>
+            <a:endParaRPr lang="en-US" sz="1200" dirty="0"/>
+          </a:p>
+        </p:txBody>
+      </p:sp>
+      <p:sp>
+        <p:nvSpPr>
+          <p:cNvPr id="43" name="Text 4">
+            <a:extLst>
+              <a:ext uri="{FF2B5EF4-FFF2-40B4-BE49-F238E27FC236}">
+                <a16:creationId xmlns:a16="http://schemas.microsoft.com/office/drawing/2014/main" id="{8AAEFDEB-D914-4800-867A-E1B2F3B52DA4}"/>
+              </a:ext>
+            </a:extLst>
+          </p:cNvPr>
+          <p:cNvSpPr/>
+          <p:nvPr/>
+        </p:nvSpPr>
+        <p:spPr>
+          <a:xfrm>
+            <a:off x="1074301" y="2629614"/>
+            <a:ext cx="4431884" cy="254000"/>
+          </a:xfrm>
+          <a:prstGeom prst="rect">
+            <a:avLst/>
+          </a:prstGeom>
+          <a:noFill/>
+          <a:ln/>
+        </p:spPr>
+        <p:txBody>
+          <a:bodyPr wrap="square" lIns="0" tIns="0" rIns="0" bIns="0" rtlCol="0" anchor="t">
+            <a:normAutofit/>
+          </a:bodyPr>
+          <a:lstStyle/>
+          <a:p>
+            <a:pPr marL="0" indent="0" algn="l">
+              <a:lnSpc>
+                <a:spcPts val="1800"/>
+              </a:lnSpc>
+              <a:buNone/>
+            </a:pPr>
+            <a:r>
+              <a:rPr lang="en-US" sz="1200" dirty="0">
+                <a:solidFill>
+                  <a:srgbClr val="F3F5F2"/>
+                </a:solidFill>
+                <a:latin typeface="Courier New" pitchFamily="34" charset="0"/>
+                <a:ea typeface="Courier New" pitchFamily="34" charset="-122"/>
+                <a:cs typeface="Courier New" pitchFamily="34" charset="-120"/>
+              </a:rPr>
+              <a:t>$ docker network connect app-net nodered</a:t>
+            </a:r>
+            <a:endParaRPr lang="en-US" sz="1200" dirty="0"/>
+          </a:p>
+        </p:txBody>
+      </p:sp>
+      <p:sp>
+        <p:nvSpPr>
+          <p:cNvPr id="44" name="Text 5">
+            <a:extLst>
+              <a:ext uri="{FF2B5EF4-FFF2-40B4-BE49-F238E27FC236}">
+                <a16:creationId xmlns:a16="http://schemas.microsoft.com/office/drawing/2014/main" id="{D23E1F0C-757A-42E1-AD49-385B2705298C}"/>
+              </a:ext>
+            </a:extLst>
+          </p:cNvPr>
+          <p:cNvSpPr/>
+          <p:nvPr/>
+        </p:nvSpPr>
+        <p:spPr>
+          <a:xfrm>
+            <a:off x="1074301" y="2921675"/>
+            <a:ext cx="4431884" cy="254000"/>
+          </a:xfrm>
+          <a:prstGeom prst="rect">
+            <a:avLst/>
+          </a:prstGeom>
+          <a:noFill/>
+          <a:ln/>
+        </p:spPr>
+        <p:txBody>
+          <a:bodyPr wrap="square" lIns="0" tIns="0" rIns="0" bIns="0" rtlCol="0" anchor="t">
+            <a:normAutofit/>
+          </a:bodyPr>
+          <a:lstStyle/>
+          <a:p>
+            <a:pPr marL="0" indent="0" algn="l">
+              <a:lnSpc>
+                <a:spcPts val="1800"/>
+              </a:lnSpc>
+              <a:buNone/>
+            </a:pPr>
+            <a:r>
+              <a:rPr lang="en-US" sz="1200" dirty="0">
+                <a:solidFill>
+                  <a:srgbClr val="F3F5F2"/>
+                </a:solidFill>
+                <a:latin typeface="Courier New" pitchFamily="34" charset="0"/>
+                <a:ea typeface="Courier New" pitchFamily="34" charset="-122"/>
+                <a:cs typeface="Courier New" pitchFamily="34" charset="-120"/>
+              </a:rPr>
+              <a:t>$ docker run -d --name redis-cache \</a:t>
+            </a:r>
+            <a:endParaRPr lang="en-US" sz="1200" dirty="0"/>
+          </a:p>
+        </p:txBody>
+      </p:sp>
+      <p:sp>
+        <p:nvSpPr>
+          <p:cNvPr id="45" name="Text 6">
+            <a:extLst>
+              <a:ext uri="{FF2B5EF4-FFF2-40B4-BE49-F238E27FC236}">
+                <a16:creationId xmlns:a16="http://schemas.microsoft.com/office/drawing/2014/main" id="{FF804CF7-5F0A-4A1A-825E-C719AE6AB240}"/>
+              </a:ext>
+            </a:extLst>
+          </p:cNvPr>
+          <p:cNvSpPr/>
+          <p:nvPr/>
+        </p:nvSpPr>
+        <p:spPr>
+          <a:xfrm>
+            <a:off x="1074301" y="3213735"/>
+            <a:ext cx="4431884" cy="254000"/>
+          </a:xfrm>
+          <a:prstGeom prst="rect">
+            <a:avLst/>
+          </a:prstGeom>
+          <a:noFill/>
+          <a:ln/>
+        </p:spPr>
+        <p:txBody>
+          <a:bodyPr wrap="square" lIns="0" tIns="0" rIns="0" bIns="0" rtlCol="0" anchor="t">
+            <a:normAutofit/>
+          </a:bodyPr>
+          <a:lstStyle/>
+          <a:p>
+            <a:pPr marL="0" indent="0" algn="l">
+              <a:lnSpc>
+                <a:spcPts val="1800"/>
+              </a:lnSpc>
+              <a:buNone/>
+            </a:pPr>
+            <a:r>
+              <a:rPr lang="en-US" sz="1200" dirty="0">
+                <a:solidFill>
+                  <a:srgbClr val="F3F5F2"/>
+                </a:solidFill>
+                <a:latin typeface="Courier New" pitchFamily="34" charset="0"/>
+                <a:ea typeface="Courier New" pitchFamily="34" charset="-122"/>
+                <a:cs typeface="Courier New" pitchFamily="34" charset="-120"/>
+              </a:rPr>
+              <a:t>    --restart unless-stopped \</a:t>
+            </a:r>
+            <a:endParaRPr lang="en-US" sz="1200" dirty="0"/>
+          </a:p>
+        </p:txBody>
+      </p:sp>
+      <p:sp>
+        <p:nvSpPr>
+          <p:cNvPr id="46" name="Text 7">
+            <a:extLst>
+              <a:ext uri="{FF2B5EF4-FFF2-40B4-BE49-F238E27FC236}">
+                <a16:creationId xmlns:a16="http://schemas.microsoft.com/office/drawing/2014/main" id="{24A663C8-1008-4A42-9F39-02CC281DFE5F}"/>
+              </a:ext>
+            </a:extLst>
+          </p:cNvPr>
+          <p:cNvSpPr/>
+          <p:nvPr/>
+        </p:nvSpPr>
+        <p:spPr>
+          <a:xfrm>
+            <a:off x="1074301" y="3505795"/>
+            <a:ext cx="4431884" cy="254000"/>
+          </a:xfrm>
+          <a:prstGeom prst="rect">
+            <a:avLst/>
+          </a:prstGeom>
+          <a:noFill/>
+          <a:ln/>
+        </p:spPr>
+        <p:txBody>
+          <a:bodyPr wrap="square" lIns="0" tIns="0" rIns="0" bIns="0" rtlCol="0" anchor="t">
+            <a:normAutofit/>
+          </a:bodyPr>
+          <a:lstStyle/>
+          <a:p>
+            <a:pPr marL="0" indent="0" algn="l">
+              <a:lnSpc>
+                <a:spcPts val="1800"/>
+              </a:lnSpc>
+              <a:buNone/>
+            </a:pPr>
+            <a:r>
+              <a:rPr lang="en-US" sz="1200" b="1" dirty="0">
+                <a:solidFill>
+                  <a:srgbClr val="F2B84B"/>
+                </a:solidFill>
+                <a:latin typeface="Courier New" pitchFamily="34" charset="0"/>
+                <a:ea typeface="Courier New" pitchFamily="34" charset="-122"/>
+                <a:cs typeface="Courier New" pitchFamily="34" charset="-120"/>
+              </a:rPr>
+              <a:t>    --network app-net redis:7</a:t>
+            </a:r>
+            <a:endParaRPr lang="en-US" sz="1200" dirty="0"/>
+          </a:p>
+        </p:txBody>
+      </p:sp>
+      <p:sp>
+        <p:nvSpPr>
+          <p:cNvPr id="47" name="Text 8">
+            <a:extLst>
+              <a:ext uri="{FF2B5EF4-FFF2-40B4-BE49-F238E27FC236}">
+                <a16:creationId xmlns:a16="http://schemas.microsoft.com/office/drawing/2014/main" id="{532CD5DA-7718-4A8E-8831-B62B02F6B3C1}"/>
+              </a:ext>
+            </a:extLst>
+          </p:cNvPr>
+          <p:cNvSpPr/>
+          <p:nvPr/>
+        </p:nvSpPr>
+        <p:spPr>
+          <a:xfrm>
+            <a:off x="1074301" y="3797856"/>
+            <a:ext cx="4431884" cy="254000"/>
+          </a:xfrm>
+          <a:prstGeom prst="rect">
+            <a:avLst/>
+          </a:prstGeom>
+          <a:noFill/>
+          <a:ln/>
+        </p:spPr>
+        <p:txBody>
+          <a:bodyPr wrap="square" lIns="0" tIns="0" rIns="0" bIns="0" rtlCol="0" anchor="t">
+            <a:normAutofit/>
+          </a:bodyPr>
+          <a:lstStyle/>
+          <a:p>
+            <a:pPr marL="0" indent="0" algn="l">
+              <a:lnSpc>
+                <a:spcPts val="1800"/>
+              </a:lnSpc>
+              <a:buNone/>
+            </a:pPr>
+            <a:r>
+              <a:rPr lang="en-US" sz="1200" dirty="0">
+                <a:solidFill>
+                  <a:srgbClr val="F3F5F2"/>
+                </a:solidFill>
+                <a:latin typeface="Courier New" pitchFamily="34" charset="0"/>
+                <a:ea typeface="Courier New" pitchFamily="34" charset="-122"/>
+                <a:cs typeface="Courier New" pitchFamily="34" charset="-120"/>
+              </a:rPr>
+              <a:t>$ docker network inspect app-net</a:t>
+            </a:r>
+            <a:endParaRPr lang="en-US" sz="1200" dirty="0"/>
+          </a:p>
+        </p:txBody>
+      </p:sp>
+      <p:sp>
+        <p:nvSpPr>
+          <p:cNvPr id="48" name="Text 9">
+            <a:extLst>
+              <a:ext uri="{FF2B5EF4-FFF2-40B4-BE49-F238E27FC236}">
+                <a16:creationId xmlns:a16="http://schemas.microsoft.com/office/drawing/2014/main" id="{0FA88FCB-C79E-4161-BB07-82B54DE702AE}"/>
+              </a:ext>
+            </a:extLst>
+          </p:cNvPr>
+          <p:cNvSpPr/>
+          <p:nvPr/>
+        </p:nvSpPr>
+        <p:spPr>
+          <a:xfrm>
+            <a:off x="1074301" y="4089916"/>
+            <a:ext cx="4431884" cy="254000"/>
+          </a:xfrm>
+          <a:prstGeom prst="rect">
+            <a:avLst/>
+          </a:prstGeom>
+          <a:noFill/>
+          <a:ln/>
+        </p:spPr>
+        <p:txBody>
+          <a:bodyPr wrap="square" lIns="0" tIns="0" rIns="0" bIns="0" rtlCol="0" anchor="t">
+            <a:normAutofit/>
+          </a:bodyPr>
+          <a:lstStyle/>
+          <a:p>
+            <a:pPr marL="0" indent="0" algn="l">
+              <a:lnSpc>
+                <a:spcPts val="1800"/>
+              </a:lnSpc>
+              <a:buNone/>
+            </a:pPr>
             <a:r>
               <a:rPr sz="1200" b="0">
                 <a:solidFill>
@@ -7578,276 +8302,721 @@
                 </a:solidFill>
                 <a:latin typeface="Courier New"/>
               </a:rPr>
-              <a:t>docker run --rm --network app-net \</a:t>
-            </a:r>
-          </a:p>
-          <a:p>
-            <a:pPr algn="l"/>
-            <a:r>
-              <a:rPr sz="1200" b="0">
-                <a:solidFill>
-                  <a:srgbClr val="F3F5F2"/>
-                </a:solidFill>
-                <a:latin typeface="Courier New"/>
-              </a:rPr>
-              <a:t>  debian:trixie-slim getent hosts redis-cache</a:t>
-            </a:r>
-          </a:p>
-        </p:txBody>
-      </p:sp>
-      <p:sp>
-        <p:nvSpPr>
-          <p:cNvPr id="8" name="Rounded Rectangle 7"/>
+              <a:t>$ docker network ls</a:t>
+            </a:r>
+            <a:endParaRPr lang="en-US" sz="1200" dirty="0"/>
+          </a:p>
+        </p:txBody>
+      </p:sp>
+      <p:sp>
+        <p:nvSpPr>
+          <p:cNvPr id="49" name="Shape 10">
+            <a:extLst>
+              <a:ext uri="{FF2B5EF4-FFF2-40B4-BE49-F238E27FC236}">
+                <a16:creationId xmlns:a16="http://schemas.microsoft.com/office/drawing/2014/main" id="{8F857C7B-B20F-46F9-8EE1-DA98ED1AAE54}"/>
+              </a:ext>
+            </a:extLst>
+          </p:cNvPr>
           <p:cNvSpPr/>
           <p:nvPr/>
         </p:nvSpPr>
         <p:spPr>
           <a:xfrm>
-            <a:off x="6385255" y="3194165"/>
-            <a:ext cx="5257800" cy="566928"/>
+            <a:off x="5997377" y="2043906"/>
+            <a:ext cx="349171" cy="349171"/>
           </a:xfrm>
           <a:prstGeom prst="roundRect">
             <a:avLst>
-              <a:gd name="adj" fmla="val 12000"/>
+              <a:gd name="adj" fmla="val 50000"/>
             </a:avLst>
           </a:prstGeom>
           <a:solidFill>
-            <a:srgbClr val="1A222C"/>
+            <a:srgbClr val="F2B84B">
+              <a:alpha val="15000"/>
+            </a:srgbClr>
           </a:solidFill>
-          <a:ln w="12700">
+          <a:ln w="6350">
             <a:solidFill>
-              <a:srgbClr val="2E3A4A"/>
+              <a:srgbClr val="F2B84B"/>
             </a:solidFill>
+            <a:prstDash val="solid"/>
           </a:ln>
-          <a:effectLst/>
-        </p:spPr>
-        <p:style>
-          <a:lnRef idx="1">
-            <a:schemeClr val="accent1"/>
-          </a:lnRef>
-          <a:fillRef idx="3">
-            <a:schemeClr val="accent1"/>
-          </a:fillRef>
-          <a:effectRef idx="2">
-            <a:schemeClr val="accent1"/>
-          </a:effectRef>
-          <a:fontRef idx="minor">
-            <a:schemeClr val="lt1"/>
-          </a:fontRef>
-        </p:style>
-        <p:txBody>
-          <a:bodyPr wrap="square" tIns="36576" bIns="36576" rtlCol="0" anchor="ctr"/>
-          <a:lstStyle/>
-          <a:p>
-            <a:pPr algn="l"/>
-            <a:r>
-              <a:rPr sz="1200" b="0">
-                <a:solidFill>
-                  <a:srgbClr val="F3F5F2"/>
-                </a:solidFill>
-                <a:latin typeface="Courier New"/>
-              </a:rPr>
-              <a:t>docker run --rm debian:trixie-slim \</a:t>
-            </a:r>
-          </a:p>
-          <a:p>
-            <a:pPr algn="l"/>
-            <a:r>
-              <a:rPr sz="1200" b="0">
-                <a:solidFill>
-                  <a:srgbClr val="F3F5F2"/>
-                </a:solidFill>
-                <a:latin typeface="Courier New"/>
-              </a:rPr>
-              <a:t>  getent hosts redis-cache</a:t>
-            </a:r>
-          </a:p>
-        </p:txBody>
-      </p:sp>
-      <p:sp>
-        <p:nvSpPr>
-          <p:cNvPr id="9" name="Rounded Rectangle 8"/>
+        </p:spPr>
+      </p:sp>
+      <p:sp>
+        <p:nvSpPr>
+          <p:cNvPr id="50" name="Text 11">
+            <a:extLst>
+              <a:ext uri="{FF2B5EF4-FFF2-40B4-BE49-F238E27FC236}">
+                <a16:creationId xmlns:a16="http://schemas.microsoft.com/office/drawing/2014/main" id="{1C8F9B9E-BF92-43F2-B472-F74A689D5FE6}"/>
+              </a:ext>
+            </a:extLst>
+          </p:cNvPr>
           <p:cNvSpPr/>
           <p:nvPr/>
         </p:nvSpPr>
         <p:spPr>
           <a:xfrm>
-            <a:off x="548640" y="3925686"/>
-            <a:ext cx="5257800" cy="384048"/>
+            <a:off x="6122432" y="2094071"/>
+            <a:ext cx="149741" cy="274241"/>
+          </a:xfrm>
+          <a:prstGeom prst="rect">
+            <a:avLst/>
+          </a:prstGeom>
+          <a:noFill/>
+          <a:ln/>
+        </p:spPr>
+        <p:txBody>
+          <a:bodyPr wrap="square" lIns="0" tIns="0" rIns="0" bIns="0" rtlCol="0" anchor="t">
+            <a:normAutofit/>
+          </a:bodyPr>
+          <a:lstStyle/>
+          <a:p>
+            <a:pPr marL="0" indent="0" algn="l">
+              <a:lnSpc>
+                <a:spcPts val="1960"/>
+              </a:lnSpc>
+              <a:buNone/>
+            </a:pPr>
+            <a:r>
+              <a:rPr lang="en-US" sz="1400" b="1" dirty="0">
+                <a:solidFill>
+                  <a:srgbClr val="F2B84B"/>
+                </a:solidFill>
+                <a:latin typeface="Arial" pitchFamily="34" charset="0"/>
+                <a:ea typeface="Arial" pitchFamily="34" charset="-122"/>
+                <a:cs typeface="Arial" pitchFamily="34" charset="-120"/>
+              </a:rPr>
+              <a:t>1</a:t>
+            </a:r>
+            <a:endParaRPr lang="en-US" sz="1400" dirty="0"/>
+          </a:p>
+        </p:txBody>
+      </p:sp>
+      <p:sp>
+        <p:nvSpPr>
+          <p:cNvPr id="51" name="Text 12">
+            <a:extLst>
+              <a:ext uri="{FF2B5EF4-FFF2-40B4-BE49-F238E27FC236}">
+                <a16:creationId xmlns:a16="http://schemas.microsoft.com/office/drawing/2014/main" id="{B9AA4CCF-E012-41F2-9846-BB357A6ADA52}"/>
+              </a:ext>
+            </a:extLst>
+          </p:cNvPr>
+          <p:cNvSpPr/>
+          <p:nvPr/>
+        </p:nvSpPr>
+        <p:spPr>
+          <a:xfrm>
+            <a:off x="6502122" y="2040731"/>
+            <a:ext cx="5023472" cy="238641"/>
+          </a:xfrm>
+          <a:prstGeom prst="rect">
+            <a:avLst/>
+          </a:prstGeom>
+          <a:noFill/>
+          <a:ln/>
+        </p:spPr>
+        <p:txBody>
+          <a:bodyPr wrap="square" lIns="0" tIns="0" rIns="0" bIns="0" rtlCol="0" anchor="t">
+            <a:normAutofit/>
+          </a:bodyPr>
+          <a:lstStyle/>
+          <a:p>
+            <a:pPr marL="0" indent="0" algn="l">
+              <a:lnSpc>
+                <a:spcPts val="1680"/>
+              </a:lnSpc>
+              <a:buNone/>
+            </a:pPr>
+            <a:r>
+              <a:rPr lang="en-US" sz="1400" b="1" dirty="0">
+                <a:ea typeface="Arial" pitchFamily="34" charset="-122"/>
+                <a:cs typeface="Arial" pitchFamily="34" charset="-120"/>
+              </a:rPr>
+              <a:t>Eigenes Netzwerk anlegen</a:t>
+            </a:r>
+            <a:endParaRPr lang="en-US" sz="1400" dirty="0"/>
+          </a:p>
+        </p:txBody>
+      </p:sp>
+      <p:sp>
+        <p:nvSpPr>
+          <p:cNvPr id="52" name="Text 13">
+            <a:extLst>
+              <a:ext uri="{FF2B5EF4-FFF2-40B4-BE49-F238E27FC236}">
+                <a16:creationId xmlns:a16="http://schemas.microsoft.com/office/drawing/2014/main" id="{8294DD96-C001-49F2-8130-4C473B854ED3}"/>
+              </a:ext>
+            </a:extLst>
+          </p:cNvPr>
+          <p:cNvSpPr/>
+          <p:nvPr/>
+        </p:nvSpPr>
+        <p:spPr>
+          <a:xfrm>
+            <a:off x="6502122" y="2292072"/>
+            <a:ext cx="5023472" cy="416401"/>
+          </a:xfrm>
+          <a:prstGeom prst="rect">
+            <a:avLst/>
+          </a:prstGeom>
+          <a:noFill/>
+          <a:ln/>
+        </p:spPr>
+        <p:txBody>
+          <a:bodyPr wrap="square" lIns="0" tIns="0" rIns="0" bIns="0" rtlCol="0" anchor="t">
+            <a:normAutofit/>
+          </a:bodyPr>
+          <a:lstStyle/>
+          <a:p>
+            <a:pPr marL="0" indent="0" algn="l">
+              <a:lnSpc>
+                <a:spcPts val="1540"/>
+              </a:lnSpc>
+              <a:buNone/>
+            </a:pPr>
+            <a:r>
+              <a:rPr lang="en-US" sz="1400" dirty="0">
+                <a:ea typeface="Arial" pitchFamily="34" charset="-122"/>
+                <a:cs typeface="Arial" pitchFamily="34" charset="-120"/>
+              </a:rPr>
+              <a:t>Mitglieder erreichen sich gegenseitig per Name – eigener Docker-DNS pro Netzwerk</a:t>
+            </a:r>
+            <a:endParaRPr lang="en-US" sz="1400" dirty="0"/>
+          </a:p>
+        </p:txBody>
+      </p:sp>
+      <p:sp>
+        <p:nvSpPr>
+          <p:cNvPr id="53" name="Text 14">
+            <a:extLst>
+              <a:ext uri="{FF2B5EF4-FFF2-40B4-BE49-F238E27FC236}">
+                <a16:creationId xmlns:a16="http://schemas.microsoft.com/office/drawing/2014/main" id="{763870ED-19DF-43FF-A66E-56694F219C40}"/>
+              </a:ext>
+            </a:extLst>
+          </p:cNvPr>
+          <p:cNvSpPr/>
+          <p:nvPr/>
+        </p:nvSpPr>
+        <p:spPr>
+          <a:xfrm>
+            <a:off x="6502122" y="2721174"/>
+            <a:ext cx="5023472" cy="215900"/>
+          </a:xfrm>
+          <a:prstGeom prst="rect">
+            <a:avLst/>
+          </a:prstGeom>
+          <a:noFill/>
+          <a:ln/>
+        </p:spPr>
+        <p:txBody>
+          <a:bodyPr wrap="square" lIns="0" tIns="0" rIns="0" bIns="0" rtlCol="0" anchor="t">
+            <a:normAutofit/>
+          </a:bodyPr>
+          <a:lstStyle/>
+          <a:p>
+            <a:pPr marL="0" indent="0" algn="l">
+              <a:lnSpc>
+                <a:spcPts val="1500"/>
+              </a:lnSpc>
+              <a:buNone/>
+            </a:pPr>
+            <a:r>
+              <a:rPr lang="en-US" sz="1400" dirty="0">
+                <a:ea typeface="Courier New" pitchFamily="34" charset="-122"/>
+                <a:cs typeface="Courier New" pitchFamily="34" charset="-120"/>
+              </a:rPr>
+              <a:t>docker network create app-net</a:t>
+            </a:r>
+            <a:endParaRPr lang="en-US" sz="1400" dirty="0"/>
+          </a:p>
+        </p:txBody>
+      </p:sp>
+      <p:sp>
+        <p:nvSpPr>
+          <p:cNvPr id="54" name="Shape 15">
+            <a:extLst>
+              <a:ext uri="{FF2B5EF4-FFF2-40B4-BE49-F238E27FC236}">
+                <a16:creationId xmlns:a16="http://schemas.microsoft.com/office/drawing/2014/main" id="{FDA7ADAD-64AE-483B-AB8D-DFEA2D20D6F4}"/>
+              </a:ext>
+            </a:extLst>
+          </p:cNvPr>
+          <p:cNvSpPr/>
+          <p:nvPr/>
+        </p:nvSpPr>
+        <p:spPr>
+          <a:xfrm>
+            <a:off x="5997377" y="3117969"/>
+            <a:ext cx="349171" cy="349171"/>
           </a:xfrm>
           <a:prstGeom prst="roundRect">
             <a:avLst>
-              <a:gd name="adj" fmla="val 18000"/>
+              <a:gd name="adj" fmla="val 50000"/>
             </a:avLst>
           </a:prstGeom>
           <a:solidFill>
-            <a:srgbClr val="1A222C"/>
+            <a:srgbClr val="F2B84B">
+              <a:alpha val="15000"/>
+            </a:srgbClr>
           </a:solidFill>
-          <a:ln w="12700">
+          <a:ln w="6350">
             <a:solidFill>
-              <a:srgbClr val="2E3A4A"/>
+              <a:srgbClr val="F2B84B"/>
             </a:solidFill>
+            <a:prstDash val="solid"/>
           </a:ln>
-          <a:effectLst/>
-        </p:spPr>
-        <p:style>
-          <a:lnRef idx="1">
-            <a:schemeClr val="accent1"/>
-          </a:lnRef>
-          <a:fillRef idx="3">
-            <a:schemeClr val="accent1"/>
-          </a:fillRef>
-          <a:effectRef idx="2">
-            <a:schemeClr val="accent1"/>
-          </a:effectRef>
-          <a:fontRef idx="minor">
-            <a:schemeClr val="lt1"/>
-          </a:fontRef>
-        </p:style>
-        <p:txBody>
-          <a:bodyPr wrap="square" tIns="36576" bIns="36576" rtlCol="0" anchor="ctr"/>
-          <a:lstStyle/>
-          <a:p>
-            <a:pPr algn="l"/>
-            <a:r>
-              <a:rPr sz="1050" b="0">
-                <a:solidFill>
-                  <a:srgbClr val="8FD19E"/>
-                </a:solidFill>
-                <a:latin typeface="Courier New"/>
-              </a:rPr>
-              <a:t>172.18.0.3      redis-cache</a:t>
-            </a:r>
-          </a:p>
-        </p:txBody>
-      </p:sp>
-      <p:sp>
-        <p:nvSpPr>
-          <p:cNvPr id="10" name="Rounded Rectangle 9"/>
+        </p:spPr>
+      </p:sp>
+      <p:sp>
+        <p:nvSpPr>
+          <p:cNvPr id="55" name="Text 16">
+            <a:extLst>
+              <a:ext uri="{FF2B5EF4-FFF2-40B4-BE49-F238E27FC236}">
+                <a16:creationId xmlns:a16="http://schemas.microsoft.com/office/drawing/2014/main" id="{4164429F-9F1E-424F-AFE2-43B367F37BE9}"/>
+              </a:ext>
+            </a:extLst>
+          </p:cNvPr>
           <p:cNvSpPr/>
           <p:nvPr/>
         </p:nvSpPr>
         <p:spPr>
           <a:xfrm>
-            <a:off x="6385255" y="3925686"/>
-            <a:ext cx="5257800" cy="384048"/>
+            <a:off x="6122432" y="3168134"/>
+            <a:ext cx="149741" cy="274241"/>
+          </a:xfrm>
+          <a:prstGeom prst="rect">
+            <a:avLst/>
+          </a:prstGeom>
+          <a:noFill/>
+          <a:ln/>
+        </p:spPr>
+        <p:txBody>
+          <a:bodyPr wrap="square" lIns="0" tIns="0" rIns="0" bIns="0" rtlCol="0" anchor="t">
+            <a:normAutofit/>
+          </a:bodyPr>
+          <a:lstStyle/>
+          <a:p>
+            <a:pPr marL="0" indent="0" algn="l">
+              <a:lnSpc>
+                <a:spcPts val="1960"/>
+              </a:lnSpc>
+              <a:buNone/>
+            </a:pPr>
+            <a:r>
+              <a:rPr lang="en-US" sz="1400" b="1" dirty="0">
+                <a:solidFill>
+                  <a:srgbClr val="F2B84B"/>
+                </a:solidFill>
+                <a:latin typeface="Arial" pitchFamily="34" charset="0"/>
+                <a:ea typeface="Arial" pitchFamily="34" charset="-122"/>
+                <a:cs typeface="Arial" pitchFamily="34" charset="-120"/>
+              </a:rPr>
+              <a:t>2</a:t>
+            </a:r>
+            <a:endParaRPr lang="en-US" sz="1400" dirty="0"/>
+          </a:p>
+        </p:txBody>
+      </p:sp>
+      <p:sp>
+        <p:nvSpPr>
+          <p:cNvPr id="56" name="Text 17">
+            <a:extLst>
+              <a:ext uri="{FF2B5EF4-FFF2-40B4-BE49-F238E27FC236}">
+                <a16:creationId xmlns:a16="http://schemas.microsoft.com/office/drawing/2014/main" id="{10AD6FAB-7B0B-43BD-A629-8F05EEBBED60}"/>
+              </a:ext>
+            </a:extLst>
+          </p:cNvPr>
+          <p:cNvSpPr/>
+          <p:nvPr/>
+        </p:nvSpPr>
+        <p:spPr>
+          <a:xfrm>
+            <a:off x="6502122" y="3114794"/>
+            <a:ext cx="5023472" cy="238641"/>
+          </a:xfrm>
+          <a:prstGeom prst="rect">
+            <a:avLst/>
+          </a:prstGeom>
+          <a:noFill/>
+          <a:ln/>
+        </p:spPr>
+        <p:txBody>
+          <a:bodyPr wrap="square" lIns="0" tIns="0" rIns="0" bIns="0" rtlCol="0" anchor="t">
+            <a:normAutofit/>
+          </a:bodyPr>
+          <a:lstStyle/>
+          <a:p>
+            <a:pPr marL="0" indent="0" algn="l">
+              <a:lnSpc>
+                <a:spcPts val="1680"/>
+              </a:lnSpc>
+              <a:buNone/>
+            </a:pPr>
+            <a:r>
+              <a:rPr lang="en-US" sz="1400" b="1" dirty="0">
+                <a:ea typeface="Arial" pitchFamily="34" charset="-122"/>
+                <a:cs typeface="Arial" pitchFamily="34" charset="-120"/>
+              </a:rPr>
+              <a:t>Bestehenden Container anbinden</a:t>
+            </a:r>
+            <a:endParaRPr lang="en-US" sz="1400" dirty="0"/>
+          </a:p>
+        </p:txBody>
+      </p:sp>
+      <p:sp>
+        <p:nvSpPr>
+          <p:cNvPr id="57" name="Text 18">
+            <a:extLst>
+              <a:ext uri="{FF2B5EF4-FFF2-40B4-BE49-F238E27FC236}">
+                <a16:creationId xmlns:a16="http://schemas.microsoft.com/office/drawing/2014/main" id="{C21BBB92-8131-4FF5-883C-DB37F1896D0C}"/>
+              </a:ext>
+            </a:extLst>
+          </p:cNvPr>
+          <p:cNvSpPr/>
+          <p:nvPr/>
+        </p:nvSpPr>
+        <p:spPr>
+          <a:xfrm>
+            <a:off x="6502122" y="3366135"/>
+            <a:ext cx="5023472" cy="416401"/>
+          </a:xfrm>
+          <a:prstGeom prst="rect">
+            <a:avLst/>
+          </a:prstGeom>
+          <a:noFill/>
+          <a:ln/>
+        </p:spPr>
+        <p:txBody>
+          <a:bodyPr wrap="square" lIns="0" tIns="0" rIns="0" bIns="0" rtlCol="0" anchor="t">
+            <a:normAutofit/>
+          </a:bodyPr>
+          <a:lstStyle/>
+          <a:p>
+            <a:pPr marL="0" indent="0" algn="l">
+              <a:lnSpc>
+                <a:spcPts val="1540"/>
+              </a:lnSpc>
+              <a:buNone/>
+            </a:pPr>
+            <a:r>
+              <a:rPr lang="en-US" sz="1400" dirty="0">
+                <a:ea typeface="Arial" pitchFamily="34" charset="-122"/>
+                <a:cs typeface="Arial" pitchFamily="34" charset="-120"/>
+              </a:rPr>
+              <a:t>nodered gehört jetzt zusätzlich zu app-net – bleibt weiterhin auch im Standard-Netz</a:t>
+            </a:r>
+            <a:endParaRPr lang="en-US" sz="1400" dirty="0"/>
+          </a:p>
+        </p:txBody>
+      </p:sp>
+      <p:sp>
+        <p:nvSpPr>
+          <p:cNvPr id="58" name="Shape 19">
+            <a:extLst>
+              <a:ext uri="{FF2B5EF4-FFF2-40B4-BE49-F238E27FC236}">
+                <a16:creationId xmlns:a16="http://schemas.microsoft.com/office/drawing/2014/main" id="{21AAD443-ED9F-4532-835D-74575E2EFA63}"/>
+              </a:ext>
+            </a:extLst>
+          </p:cNvPr>
+          <p:cNvSpPr/>
+          <p:nvPr/>
+        </p:nvSpPr>
+        <p:spPr>
+          <a:xfrm>
+            <a:off x="5997377" y="3963432"/>
+            <a:ext cx="349171" cy="349171"/>
           </a:xfrm>
           <a:prstGeom prst="roundRect">
             <a:avLst>
-              <a:gd name="adj" fmla="val 18000"/>
+              <a:gd name="adj" fmla="val 50000"/>
             </a:avLst>
           </a:prstGeom>
           <a:solidFill>
-            <a:srgbClr val="1A222C"/>
+            <a:srgbClr val="F2B84B">
+              <a:alpha val="15000"/>
+            </a:srgbClr>
           </a:solidFill>
-          <a:ln w="12700">
+          <a:ln w="6350">
             <a:solidFill>
-              <a:srgbClr val="2E3A4A"/>
+              <a:srgbClr val="F2B84B"/>
             </a:solidFill>
+            <a:prstDash val="solid"/>
           </a:ln>
-          <a:effectLst/>
-        </p:spPr>
-        <p:style>
-          <a:lnRef idx="1">
-            <a:schemeClr val="accent1"/>
-          </a:lnRef>
-          <a:fillRef idx="3">
-            <a:schemeClr val="accent1"/>
-          </a:fillRef>
-          <a:effectRef idx="2">
-            <a:schemeClr val="accent1"/>
-          </a:effectRef>
-          <a:fontRef idx="minor">
-            <a:schemeClr val="lt1"/>
-          </a:fontRef>
-        </p:style>
-        <p:txBody>
-          <a:bodyPr wrap="square" tIns="36576" bIns="36576" rtlCol="0" anchor="ctr"/>
-          <a:lstStyle/>
-          <a:p>
-            <a:pPr algn="l"/>
-            <a:r>
-              <a:rPr sz="1050" b="0">
-                <a:solidFill>
-                  <a:srgbClr val="E29A90"/>
-                </a:solidFill>
-                <a:latin typeface="Courier New"/>
-              </a:rPr>
-              <a:t>(keine Ausgabe)</a:t>
-            </a:r>
-          </a:p>
-        </p:txBody>
-      </p:sp>
-      <p:sp>
-        <p:nvSpPr>
-          <p:cNvPr id="11" name="TextBox 10"/>
-          <p:cNvSpPr txBox="1"/>
-          <p:nvPr/>
-        </p:nvSpPr>
-        <p:spPr>
-          <a:xfrm>
-            <a:off x="548640" y="4446894"/>
-            <a:ext cx="5257800" cy="502920"/>
+        </p:spPr>
+      </p:sp>
+      <p:sp>
+        <p:nvSpPr>
+          <p:cNvPr id="59" name="Text 20">
+            <a:extLst>
+              <a:ext uri="{FF2B5EF4-FFF2-40B4-BE49-F238E27FC236}">
+                <a16:creationId xmlns:a16="http://schemas.microsoft.com/office/drawing/2014/main" id="{0F6A2A80-7820-4F44-8E7A-61751819FAFC}"/>
+              </a:ext>
+            </a:extLst>
+          </p:cNvPr>
+          <p:cNvSpPr/>
+          <p:nvPr/>
+        </p:nvSpPr>
+        <p:spPr>
+          <a:xfrm>
+            <a:off x="6122432" y="4013597"/>
+            <a:ext cx="149741" cy="274241"/>
           </a:xfrm>
           <a:prstGeom prst="rect">
             <a:avLst/>
           </a:prstGeom>
           <a:noFill/>
-        </p:spPr>
-        <p:txBody>
-          <a:bodyPr wrap="square" lIns="0" tIns="0" rIns="0" bIns="0">
-            <a:spAutoFit/>
+          <a:ln/>
+        </p:spPr>
+        <p:txBody>
+          <a:bodyPr wrap="square" lIns="0" tIns="0" rIns="0" bIns="0" rtlCol="0" anchor="t">
+            <a:normAutofit/>
           </a:bodyPr>
           <a:lstStyle/>
           <a:p>
-            <a:pPr algn="l"/>
-            <a:r>
-              <a:rPr sz="1000" b="0" i="0">
-                <a:solidFill>
-                  <a:srgbClr val="5B6472"/>
-                </a:solidFill>
-                <a:latin typeface="Arial"/>
-              </a:rPr>
-              <a:t>Der Test-Container ist Mitglied von app-net → der eingebaute Docker-DNS kennt redis-cache.</a:t>
-            </a:r>
-          </a:p>
-        </p:txBody>
-      </p:sp>
-      <p:sp>
-        <p:nvSpPr>
-          <p:cNvPr id="12" name="TextBox 11"/>
-          <p:cNvSpPr txBox="1"/>
-          <p:nvPr/>
-        </p:nvSpPr>
-        <p:spPr>
-          <a:xfrm>
-            <a:off x="6385255" y="4446894"/>
-            <a:ext cx="5257800" cy="502920"/>
+            <a:pPr marL="0" indent="0" algn="l">
+              <a:lnSpc>
+                <a:spcPts val="1960"/>
+              </a:lnSpc>
+              <a:buNone/>
+            </a:pPr>
+            <a:r>
+              <a:rPr lang="en-US" sz="1400" b="1" dirty="0">
+                <a:solidFill>
+                  <a:srgbClr val="F2B84B"/>
+                </a:solidFill>
+                <a:latin typeface="Arial" pitchFamily="34" charset="0"/>
+                <a:ea typeface="Arial" pitchFamily="34" charset="-122"/>
+                <a:cs typeface="Arial" pitchFamily="34" charset="-120"/>
+              </a:rPr>
+              <a:t>3</a:t>
+            </a:r>
+            <a:endParaRPr lang="en-US" sz="1400" dirty="0"/>
+          </a:p>
+        </p:txBody>
+      </p:sp>
+      <p:sp>
+        <p:nvSpPr>
+          <p:cNvPr id="60" name="Text 21">
+            <a:extLst>
+              <a:ext uri="{FF2B5EF4-FFF2-40B4-BE49-F238E27FC236}">
+                <a16:creationId xmlns:a16="http://schemas.microsoft.com/office/drawing/2014/main" id="{477E6D75-3A3B-475F-8766-52DFA7645D93}"/>
+              </a:ext>
+            </a:extLst>
+          </p:cNvPr>
+          <p:cNvSpPr/>
+          <p:nvPr/>
+        </p:nvSpPr>
+        <p:spPr>
+          <a:xfrm>
+            <a:off x="6502122" y="3960257"/>
+            <a:ext cx="5023472" cy="238641"/>
           </a:xfrm>
           <a:prstGeom prst="rect">
             <a:avLst/>
           </a:prstGeom>
           <a:noFill/>
-        </p:spPr>
-        <p:txBody>
-          <a:bodyPr wrap="square" lIns="0" tIns="0" rIns="0" bIns="0">
-            <a:spAutoFit/>
+          <a:ln/>
+        </p:spPr>
+        <p:txBody>
+          <a:bodyPr wrap="square" lIns="0" tIns="0" rIns="0" bIns="0" rtlCol="0" anchor="t">
+            <a:normAutofit/>
           </a:bodyPr>
           <a:lstStyle/>
           <a:p>
-            <a:pPr algn="l"/>
-            <a:r>
-              <a:rPr sz="1000" b="0" i="0">
-                <a:solidFill>
-                  <a:srgbClr val="5B6472"/>
-                </a:solidFill>
-                <a:latin typeface="Arial"/>
-              </a:rPr>
-              <a:t>Ohne --network landet der Container im Standard-Netz – ein anderes Netz mit eigenem, separatem DNS.</a:t>
-            </a:r>
-          </a:p>
-        </p:txBody>
-      </p:sp>
+            <a:pPr marL="0" indent="0" algn="l">
+              <a:lnSpc>
+                <a:spcPts val="1680"/>
+              </a:lnSpc>
+              <a:buNone/>
+            </a:pPr>
+            <a:r>
+              <a:rPr lang="en-US" sz="1400" b="1" dirty="0">
+                <a:ea typeface="Arial" pitchFamily="34" charset="-122"/>
+                <a:cs typeface="Arial" pitchFamily="34" charset="-120"/>
+              </a:rPr>
+              <a:t>Neuen, rein internen Dienst starten</a:t>
+            </a:r>
+            <a:endParaRPr lang="en-US" sz="1400" dirty="0"/>
+          </a:p>
+        </p:txBody>
+      </p:sp>
+      <p:sp>
+        <p:nvSpPr>
+          <p:cNvPr id="61" name="Text 22">
+            <a:extLst>
+              <a:ext uri="{FF2B5EF4-FFF2-40B4-BE49-F238E27FC236}">
+                <a16:creationId xmlns:a16="http://schemas.microsoft.com/office/drawing/2014/main" id="{3CE88406-4D3B-44C6-A32D-A5EF1D2984C7}"/>
+              </a:ext>
+            </a:extLst>
+          </p:cNvPr>
+          <p:cNvSpPr/>
+          <p:nvPr/>
+        </p:nvSpPr>
+        <p:spPr>
+          <a:xfrm>
+            <a:off x="6502122" y="4198858"/>
+            <a:ext cx="5023472" cy="220901"/>
+          </a:xfrm>
+          <a:prstGeom prst="rect">
+            <a:avLst/>
+          </a:prstGeom>
+          <a:noFill/>
+          <a:ln/>
+        </p:spPr>
+        <p:txBody>
+          <a:bodyPr wrap="square" lIns="0" tIns="0" rIns="0" bIns="0" rtlCol="0" anchor="t">
+            <a:normAutofit/>
+          </a:bodyPr>
+          <a:lstStyle/>
+          <a:p>
+            <a:pPr marL="0" indent="0" algn="l">
+              <a:lnSpc>
+                <a:spcPts val="1540"/>
+              </a:lnSpc>
+              <a:buNone/>
+            </a:pPr>
+            <a:r>
+              <a:rPr lang="en-US" sz="1400" dirty="0">
+                <a:ea typeface="Arial" pitchFamily="34" charset="-122"/>
+                <a:cs typeface="Arial" pitchFamily="34" charset="-120"/>
+              </a:rPr>
+              <a:t>--network app-net – bewusst ohne -p</a:t>
+            </a:r>
+            <a:endParaRPr lang="en-US" sz="1400" dirty="0"/>
+          </a:p>
+        </p:txBody>
+      </p:sp>
+      <p:sp>
+        <p:nvSpPr>
+          <p:cNvPr id="62" name="Text 23">
+            <a:extLst>
+              <a:ext uri="{FF2B5EF4-FFF2-40B4-BE49-F238E27FC236}">
+                <a16:creationId xmlns:a16="http://schemas.microsoft.com/office/drawing/2014/main" id="{797138DB-BC51-4397-BF84-450B27ADBDB3}"/>
+              </a:ext>
+            </a:extLst>
+          </p:cNvPr>
+          <p:cNvSpPr/>
+          <p:nvPr/>
+        </p:nvSpPr>
+        <p:spPr>
+          <a:xfrm>
+            <a:off x="6502122" y="4419719"/>
+            <a:ext cx="5023472" cy="220901"/>
+          </a:xfrm>
+          <a:prstGeom prst="rect">
+            <a:avLst/>
+          </a:prstGeom>
+          <a:noFill/>
+          <a:ln/>
+        </p:spPr>
+        <p:txBody>
+          <a:bodyPr wrap="square" lIns="0" tIns="0" rIns="0" bIns="0" rtlCol="0" anchor="t">
+            <a:normAutofit/>
+          </a:bodyPr>
+          <a:lstStyle/>
+          <a:p>
+            <a:pPr marL="0" indent="0" algn="l">
+              <a:lnSpc>
+                <a:spcPts val="1540"/>
+              </a:lnSpc>
+              <a:buNone/>
+            </a:pPr>
+            <a:r>
+              <a:rPr lang="en-US" sz="1400" dirty="0">
+                <a:ea typeface="Arial" pitchFamily="34" charset="-122"/>
+                <a:cs typeface="Arial" pitchFamily="34" charset="-120"/>
+              </a:rPr>
+              <a:t>docker run -d --name redis-cache --network app-net redis:7</a:t>
+            </a:r>
+            <a:endParaRPr lang="en-US" sz="1400" dirty="0"/>
+          </a:p>
+        </p:txBody>
+      </p:sp>
+      <p:sp>
+        <p:nvSpPr>
+          <p:cNvPr id="67" name="Text 27">
+            <a:extLst>
+              <a:ext uri="{FF2B5EF4-FFF2-40B4-BE49-F238E27FC236}">
+                <a16:creationId xmlns:a16="http://schemas.microsoft.com/office/drawing/2014/main" id="{1A300C58-C33C-4563-9481-8813CF0D164F}"/>
+              </a:ext>
+            </a:extLst>
+          </p:cNvPr>
+          <p:cNvSpPr/>
+          <p:nvPr/>
+        </p:nvSpPr>
+        <p:spPr>
+          <a:xfrm>
+            <a:off x="1511141" y="5466160"/>
+            <a:ext cx="9928725" cy="223520"/>
+          </a:xfrm>
+          <a:prstGeom prst="rect">
+            <a:avLst/>
+          </a:prstGeom>
+          <a:noFill/>
+          <a:ln/>
+        </p:spPr>
+        <p:txBody>
+          <a:bodyPr wrap="square" lIns="0" tIns="0" rIns="0" bIns="0" rtlCol="0" anchor="t">
+            <a:normAutofit/>
+          </a:bodyPr>
+          <a:lstStyle/>
+          <a:p>
+            <a:pPr marL="0" indent="0" algn="l">
+              <a:lnSpc>
+                <a:spcPts val="1560"/>
+              </a:lnSpc>
+              <a:buNone/>
+            </a:pPr>
+            <a:r>
+              <a:rPr lang="en-US" sz="1400" dirty="0">
+                <a:latin typeface="Arial" pitchFamily="34" charset="0"/>
+                <a:ea typeface="Arial" pitchFamily="34" charset="-122"/>
+                <a:cs typeface="Arial" pitchFamily="34" charset="-120"/>
+              </a:rPr>
+              <a:t>Kein -p bei redis-cache: bewusst nur innerhalb von app-net erreichbar – nicht vom Host, nicht aus dem Internet.</a:t>
+            </a:r>
+            <a:endParaRPr lang="en-US" sz="1400" dirty="0"/>
+          </a:p>
+        </p:txBody>
+      </p:sp>
+      <p:pic>
+        <p:nvPicPr>
+          <p:cNvPr id="68" name="Grafik 67" descr="Ausrufezeichen mit einfarbiger Füllung">
+            <a:extLst>
+              <a:ext uri="{FF2B5EF4-FFF2-40B4-BE49-F238E27FC236}">
+                <a16:creationId xmlns:a16="http://schemas.microsoft.com/office/drawing/2014/main" id="{0254A55C-46A4-4C6E-8348-4E0413201944}"/>
+              </a:ext>
+            </a:extLst>
+          </p:cNvPr>
+          <p:cNvPicPr>
+            <a:picLocks noChangeAspect="1"/>
+          </p:cNvPicPr>
+          <p:nvPr/>
+        </p:nvPicPr>
+        <p:blipFill>
+          <a:blip r:embed="rId2">
+            <a:extLst>
+              <a:ext uri="{28A0092B-C50C-407E-A947-70E740481C1C}">
+                <a14:useLocalDpi xmlns:a14="http://schemas.microsoft.com/office/drawing/2010/main" val="0"/>
+              </a:ext>
+              <a:ext uri="{96DAC541-7B7A-43D3-8B79-37D633B846F1}">
+                <asvg:svgBlip xmlns:asvg="http://schemas.microsoft.com/office/drawing/2016/SVG/main" r:embed="rId3"/>
+              </a:ext>
+            </a:extLst>
+          </a:blip>
+          <a:stretch>
+            <a:fillRect/>
+          </a:stretch>
+        </p:blipFill>
+        <p:spPr>
+          <a:xfrm>
+            <a:off x="596741" y="5008960"/>
+            <a:ext cx="914400" cy="914400"/>
+          </a:xfrm>
+          <a:prstGeom prst="rect">
+            <a:avLst/>
+          </a:prstGeom>
+        </p:spPr>
+      </p:pic>
     </p:spTree>
   </p:cSld>
   <p:clrMapOvr>
@@ -7895,7 +9064,7 @@
           <a:p>
             <a:r>
               <a:rPr lang="de-DE" sz="2400" dirty="0"/>
-              <a:t>Netzwerktopologie: app-net vs. Standardnetz</a:t>
+              <a:t>Namensauflösung: mit vs. ohne app-net</a:t>
             </a:r>
             <a:endParaRPr sz="2400" dirty="0"/>
           </a:p>
@@ -7933,8 +9102,8 @@
         </p:nvSpPr>
         <p:spPr>
           <a:xfrm>
-            <a:off x="822960" y="2082341"/>
-            <a:ext cx="4572000" cy="256032"/>
+            <a:off x="548640" y="2159597"/>
+            <a:ext cx="5257800" cy="292608"/>
           </a:xfrm>
           <a:prstGeom prst="rect">
             <a:avLst/>
@@ -7949,13 +9118,22 @@
           <a:p>
             <a:pPr algn="ctr"/>
             <a:r>
-              <a:rPr sz="1400" b="1" i="0">
-                <a:solidFill>
-                  <a:srgbClr val="005AA8"/>
+              <a:rPr sz="1500" b="1" i="0" dirty="0" err="1">
+                <a:solidFill>
+                  <a:srgbClr val="1E6B3C"/>
                 </a:solidFill>
                 <a:latin typeface="Arial"/>
               </a:rPr>
-              <a:t>app-net</a:t>
+              <a:t>Mit</a:t>
+            </a:r>
+            <a:r>
+              <a:rPr sz="1500" b="1" i="0" dirty="0">
+                <a:solidFill>
+                  <a:srgbClr val="1E6B3C"/>
+                </a:solidFill>
+                <a:latin typeface="Arial"/>
+              </a:rPr>
+              <a:t> --network app-net</a:t>
             </a:r>
           </a:p>
         </p:txBody>
@@ -7968,8 +9146,8 @@
         </p:nvSpPr>
         <p:spPr>
           <a:xfrm>
-            <a:off x="822960" y="2338373"/>
-            <a:ext cx="4572000" cy="201168"/>
+            <a:off x="6385255" y="2159597"/>
+            <a:ext cx="5257800" cy="292608"/>
           </a:xfrm>
           <a:prstGeom prst="rect">
             <a:avLst/>
@@ -7984,111 +9162,48 @@
           <a:p>
             <a:pPr algn="ctr"/>
             <a:r>
-              <a:rPr sz="950" b="0" i="1">
-                <a:solidFill>
-                  <a:srgbClr val="5B6472"/>
+              <a:rPr sz="1500" b="1" i="0" dirty="0" err="1">
+                <a:solidFill>
+                  <a:srgbClr val="B03A2E"/>
                 </a:solidFill>
                 <a:latin typeface="Arial"/>
               </a:rPr>
-              <a:t>172.18.0.0/16 (automatisch vergeben)</a:t>
-            </a:r>
-          </a:p>
-        </p:txBody>
-      </p:sp>
-      <p:sp>
-        <p:nvSpPr>
-          <p:cNvPr id="7" name="TextBox 6"/>
-          <p:cNvSpPr txBox="1"/>
-          <p:nvPr/>
-        </p:nvSpPr>
-        <p:spPr>
-          <a:xfrm>
-            <a:off x="6812280" y="2082341"/>
-            <a:ext cx="4571999" cy="256032"/>
-          </a:xfrm>
-          <a:prstGeom prst="rect">
-            <a:avLst/>
-          </a:prstGeom>
-          <a:noFill/>
-        </p:spPr>
-        <p:txBody>
-          <a:bodyPr wrap="square" lIns="0" tIns="0" rIns="0" bIns="0">
-            <a:spAutoFit/>
-          </a:bodyPr>
-          <a:lstStyle/>
-          <a:p>
-            <a:pPr algn="ctr"/>
-            <a:r>
-              <a:rPr sz="1300" b="1" i="0">
-                <a:solidFill>
-                  <a:srgbClr val="5B6472"/>
+              <a:t>Ohne</a:t>
+            </a:r>
+            <a:r>
+              <a:rPr sz="1500" b="1" i="0" dirty="0">
+                <a:solidFill>
+                  <a:srgbClr val="B03A2E"/>
                 </a:solidFill>
                 <a:latin typeface="Arial"/>
               </a:rPr>
-              <a:t>Docker-Standard-Netz (bridge)</a:t>
-            </a:r>
-          </a:p>
-        </p:txBody>
-      </p:sp>
-      <p:sp>
-        <p:nvSpPr>
-          <p:cNvPr id="8" name="TextBox 7"/>
-          <p:cNvSpPr txBox="1"/>
-          <p:nvPr/>
-        </p:nvSpPr>
-        <p:spPr>
-          <a:xfrm>
-            <a:off x="6812280" y="2338373"/>
-            <a:ext cx="4571999" cy="201168"/>
-          </a:xfrm>
-          <a:prstGeom prst="rect">
-            <a:avLst/>
-          </a:prstGeom>
-          <a:noFill/>
-        </p:spPr>
-        <p:txBody>
-          <a:bodyPr wrap="square" lIns="0" tIns="0" rIns="0" bIns="0">
-            <a:spAutoFit/>
-          </a:bodyPr>
-          <a:lstStyle/>
-          <a:p>
-            <a:pPr algn="ctr"/>
-            <a:r>
-              <a:rPr sz="950" b="0" i="1">
-                <a:solidFill>
-                  <a:srgbClr val="5B6472"/>
-                </a:solidFill>
-                <a:latin typeface="Arial"/>
-              </a:rPr>
-              <a:t>172.17.0.0/16 (Default)</a:t>
-            </a:r>
-          </a:p>
-        </p:txBody>
-      </p:sp>
-      <p:sp>
-        <p:nvSpPr>
-          <p:cNvPr id="9" name="Rounded Rectangle 8"/>
+              <a:t> --network (Standard-Bridge)</a:t>
+            </a:r>
+          </a:p>
+        </p:txBody>
+      </p:sp>
+      <p:sp>
+        <p:nvSpPr>
+          <p:cNvPr id="7" name="Rounded Rectangle 6"/>
           <p:cNvSpPr/>
           <p:nvPr/>
         </p:nvSpPr>
         <p:spPr>
           <a:xfrm>
-            <a:off x="822960" y="2630981"/>
-            <a:ext cx="5989320" cy="2240280"/>
+            <a:off x="0" y="2719449"/>
+            <a:ext cx="5834743" cy="1017893"/>
           </a:xfrm>
           <a:prstGeom prst="roundRect">
             <a:avLst>
-              <a:gd name="adj" fmla="val 20000"/>
+              <a:gd name="adj" fmla="val 12000"/>
             </a:avLst>
           </a:prstGeom>
           <a:solidFill>
-            <a:srgbClr val="005AA8">
-              <a:alpha val="22000"/>
-            </a:srgbClr>
+            <a:srgbClr val="1A222C"/>
           </a:solidFill>
           <a:ln w="12700">
             <a:solidFill>
-              <a:srgbClr val="005AA8"/>
+              <a:srgbClr val="2E3A4A"/>
             </a:solidFill>
           </a:ln>
           <a:effectLst/>
@@ -8111,35 +9226,107 @@
           <a:bodyPr wrap="square" tIns="36576" bIns="36576" rtlCol="0" anchor="ctr"/>
           <a:lstStyle/>
           <a:p>
-            <a:pPr algn="ctr"/>
-            <a:endParaRPr/>
-          </a:p>
-        </p:txBody>
-      </p:sp>
-      <p:sp>
-        <p:nvSpPr>
-          <p:cNvPr id="10" name="Rounded Rectangle 9"/>
+            <a:pPr algn="l"/>
+            <a:r>
+              <a:rPr sz="1400" b="0" dirty="0">
+                <a:solidFill>
+                  <a:srgbClr val="F3F5F2"/>
+                </a:solidFill>
+                <a:latin typeface="Courier New"/>
+              </a:rPr>
+              <a:t>docker run --rm --network app-net \</a:t>
+            </a:r>
+          </a:p>
+          <a:p>
+            <a:pPr algn="l"/>
+            <a:r>
+              <a:rPr sz="1400" b="0" dirty="0">
+                <a:solidFill>
+                  <a:srgbClr val="F3F5F2"/>
+                </a:solidFill>
+                <a:latin typeface="Courier New"/>
+              </a:rPr>
+              <a:t>  </a:t>
+            </a:r>
+            <a:r>
+              <a:rPr sz="1400" b="0" dirty="0" err="1">
+                <a:solidFill>
+                  <a:srgbClr val="F3F5F2"/>
+                </a:solidFill>
+                <a:latin typeface="Courier New"/>
+              </a:rPr>
+              <a:t>debian:trixie-slim</a:t>
+            </a:r>
+            <a:r>
+              <a:rPr sz="1400" b="0" dirty="0">
+                <a:solidFill>
+                  <a:srgbClr val="F3F5F2"/>
+                </a:solidFill>
+                <a:latin typeface="Courier New"/>
+              </a:rPr>
+              <a:t> </a:t>
+            </a:r>
+            <a:r>
+              <a:rPr sz="1400" b="0" dirty="0" err="1">
+                <a:solidFill>
+                  <a:srgbClr val="F3F5F2"/>
+                </a:solidFill>
+                <a:latin typeface="Courier New"/>
+              </a:rPr>
+              <a:t>getent</a:t>
+            </a:r>
+            <a:r>
+              <a:rPr sz="1400" b="0" dirty="0">
+                <a:solidFill>
+                  <a:srgbClr val="F3F5F2"/>
+                </a:solidFill>
+                <a:latin typeface="Courier New"/>
+              </a:rPr>
+              <a:t> hosts </a:t>
+            </a:r>
+            <a:r>
+              <a:rPr sz="1400" b="0" dirty="0" err="1">
+                <a:solidFill>
+                  <a:srgbClr val="F3F5F2"/>
+                </a:solidFill>
+                <a:latin typeface="Courier New"/>
+              </a:rPr>
+              <a:t>redis</a:t>
+            </a:r>
+            <a:r>
+              <a:rPr sz="1400" b="0" dirty="0">
+                <a:solidFill>
+                  <a:srgbClr val="F3F5F2"/>
+                </a:solidFill>
+                <a:latin typeface="Courier New"/>
+              </a:rPr>
+              <a:t>-cache</a:t>
+            </a:r>
+          </a:p>
+        </p:txBody>
+      </p:sp>
+      <p:sp>
+        <p:nvSpPr>
+          <p:cNvPr id="8" name="Rounded Rectangle 7"/>
           <p:cNvSpPr/>
           <p:nvPr/>
         </p:nvSpPr>
         <p:spPr>
           <a:xfrm>
-            <a:off x="5394960" y="2630981"/>
-            <a:ext cx="5989320" cy="2240280"/>
+            <a:off x="6096000" y="2705880"/>
+            <a:ext cx="5981205" cy="1017893"/>
           </a:xfrm>
           <a:prstGeom prst="roundRect">
             <a:avLst>
-              <a:gd name="adj" fmla="val 20000"/>
+              <a:gd name="adj" fmla="val 12000"/>
             </a:avLst>
           </a:prstGeom>
           <a:solidFill>
-            <a:srgbClr val="8A94A3">
-              <a:alpha val="30000"/>
-            </a:srgbClr>
+            <a:srgbClr val="1A222C"/>
           </a:solidFill>
           <a:ln w="12700">
             <a:solidFill>
-              <a:srgbClr val="8A94A3"/>
+              <a:srgbClr val="2E3A4A"/>
             </a:solidFill>
           </a:ln>
           <a:effectLst/>
@@ -8162,33 +9349,115 @@
           <a:bodyPr wrap="square" tIns="36576" bIns="36576" rtlCol="0" anchor="ctr"/>
           <a:lstStyle/>
           <a:p>
-            <a:pPr algn="ctr"/>
-            <a:endParaRPr/>
-          </a:p>
-        </p:txBody>
-      </p:sp>
-      <p:sp>
-        <p:nvSpPr>
-          <p:cNvPr id="11" name="Rounded Rectangle 10"/>
+            <a:r>
+              <a:rPr sz="1400" b="0" dirty="0">
+                <a:solidFill>
+                  <a:srgbClr val="F3F5F2"/>
+                </a:solidFill>
+                <a:latin typeface="Courier New"/>
+              </a:rPr>
+              <a:t>docker run --rm </a:t>
+            </a:r>
+            <a:r>
+              <a:rPr lang="de-DE" sz="1400" b="0" dirty="0">
+                <a:solidFill>
+                  <a:srgbClr val="F3F5F2"/>
+                </a:solidFill>
+                <a:latin typeface="Courier New"/>
+              </a:rPr>
+              <a:t>\</a:t>
+            </a:r>
+          </a:p>
+          <a:p>
+            <a:pPr algn="l"/>
+            <a:r>
+              <a:rPr lang="de-DE" sz="1400" dirty="0">
+                <a:solidFill>
+                  <a:srgbClr val="F3F5F2"/>
+                </a:solidFill>
+                <a:latin typeface="Courier New"/>
+              </a:rPr>
+              <a:t>	</a:t>
+            </a:r>
+            <a:r>
+              <a:rPr sz="1400" b="0" dirty="0" err="1">
+                <a:solidFill>
+                  <a:srgbClr val="F3F5F2"/>
+                </a:solidFill>
+                <a:latin typeface="Courier New"/>
+              </a:rPr>
+              <a:t>debian:trixie-slim</a:t>
+            </a:r>
+            <a:r>
+              <a:rPr sz="1400" b="0" dirty="0">
+                <a:solidFill>
+                  <a:srgbClr val="F3F5F2"/>
+                </a:solidFill>
+                <a:latin typeface="Courier New"/>
+              </a:rPr>
+              <a:t> </a:t>
+            </a:r>
+            <a:r>
+              <a:rPr sz="1400" b="0" dirty="0" err="1">
+                <a:solidFill>
+                  <a:srgbClr val="F3F5F2"/>
+                </a:solidFill>
+                <a:latin typeface="Courier New"/>
+              </a:rPr>
+              <a:t>getent</a:t>
+            </a:r>
+            <a:r>
+              <a:rPr sz="1400" b="0" dirty="0">
+                <a:solidFill>
+                  <a:srgbClr val="F3F5F2"/>
+                </a:solidFill>
+                <a:latin typeface="Courier New"/>
+              </a:rPr>
+              <a:t> hosts </a:t>
+            </a:r>
+            <a:r>
+              <a:rPr sz="1400" b="0" dirty="0" err="1">
+                <a:solidFill>
+                  <a:srgbClr val="F3F5F2"/>
+                </a:solidFill>
+                <a:latin typeface="Courier New"/>
+              </a:rPr>
+              <a:t>redis</a:t>
+            </a:r>
+            <a:r>
+              <a:rPr sz="1400" b="0" dirty="0">
+                <a:solidFill>
+                  <a:srgbClr val="F3F5F2"/>
+                </a:solidFill>
+                <a:latin typeface="Courier New"/>
+              </a:rPr>
+              <a:t>-cache</a:t>
+            </a:r>
+          </a:p>
+        </p:txBody>
+      </p:sp>
+      <p:sp>
+        <p:nvSpPr>
+          <p:cNvPr id="9" name="Rounded Rectangle 8"/>
           <p:cNvSpPr/>
           <p:nvPr/>
         </p:nvSpPr>
         <p:spPr>
           <a:xfrm>
-            <a:off x="1143000" y="3476801"/>
-            <a:ext cx="1828800" cy="548640"/>
+            <a:off x="-1" y="3925686"/>
+            <a:ext cx="5834743" cy="705690"/>
           </a:xfrm>
           <a:prstGeom prst="roundRect">
             <a:avLst>
-              <a:gd name="adj" fmla="val 14000"/>
+              <a:gd name="adj" fmla="val 18000"/>
             </a:avLst>
           </a:prstGeom>
           <a:solidFill>
-            <a:srgbClr val="FFFFFF"/>
+            <a:srgbClr val="1A222C"/>
           </a:solidFill>
           <a:ln w="12700">
             <a:solidFill>
-              <a:srgbClr val="005AA8"/>
+              <a:srgbClr val="2E3A4A"/>
             </a:solidFill>
           </a:ln>
           <a:effectLst/>
@@ -8211,41 +9480,41 @@
           <a:bodyPr wrap="square" tIns="36576" bIns="36576" rtlCol="0" anchor="ctr"/>
           <a:lstStyle/>
           <a:p>
-            <a:pPr algn="ctr"/>
-            <a:r>
-              <a:rPr sz="1100" b="1">
-                <a:solidFill>
-                  <a:srgbClr val="1A1A1A"/>
-                </a:solidFill>
-                <a:latin typeface="Arial"/>
-              </a:rPr>
-              <a:t>redis-cache</a:t>
-            </a:r>
-          </a:p>
-        </p:txBody>
-      </p:sp>
-      <p:sp>
-        <p:nvSpPr>
-          <p:cNvPr id="12" name="Rounded Rectangle 11"/>
+            <a:pPr algn="l"/>
+            <a:r>
+              <a:rPr sz="1600" b="0">
+                <a:solidFill>
+                  <a:srgbClr val="8FD19E"/>
+                </a:solidFill>
+                <a:latin typeface="Courier New"/>
+              </a:rPr>
+              <a:t>172.18.0.3      redis-cache</a:t>
+            </a:r>
+          </a:p>
+        </p:txBody>
+      </p:sp>
+      <p:sp>
+        <p:nvSpPr>
+          <p:cNvPr id="10" name="Rounded Rectangle 9"/>
           <p:cNvSpPr/>
           <p:nvPr/>
         </p:nvSpPr>
         <p:spPr>
           <a:xfrm>
-            <a:off x="9235440" y="3476801"/>
-            <a:ext cx="1828800" cy="548640"/>
+            <a:off x="6108701" y="3894999"/>
+            <a:ext cx="5968504" cy="705691"/>
           </a:xfrm>
           <a:prstGeom prst="roundRect">
             <a:avLst>
-              <a:gd name="adj" fmla="val 14000"/>
+              <a:gd name="adj" fmla="val 18000"/>
             </a:avLst>
           </a:prstGeom>
           <a:solidFill>
-            <a:srgbClr val="FFFFFF"/>
+            <a:srgbClr val="1A222C"/>
           </a:solidFill>
           <a:ln w="12700">
             <a:solidFill>
-              <a:srgbClr val="8A94A3"/>
+              <a:srgbClr val="2E3A4A"/>
             </a:solidFill>
           </a:ln>
           <a:effectLst/>
@@ -8268,86 +9537,29 @@
           <a:bodyPr wrap="square" tIns="36576" bIns="36576" rtlCol="0" anchor="ctr"/>
           <a:lstStyle/>
           <a:p>
-            <a:pPr algn="ctr"/>
-            <a:r>
-              <a:rPr sz="1100" b="1">
-                <a:solidFill>
-                  <a:srgbClr val="5B6472"/>
-                </a:solidFill>
-                <a:latin typeface="Arial"/>
-              </a:rPr>
-              <a:t>nginx-web</a:t>
-            </a:r>
-          </a:p>
-        </p:txBody>
-      </p:sp>
-      <p:sp>
-        <p:nvSpPr>
-          <p:cNvPr id="13" name="Rounded Rectangle 12"/>
-          <p:cNvSpPr/>
-          <p:nvPr/>
-        </p:nvSpPr>
-        <p:spPr>
-          <a:xfrm>
-            <a:off x="5189220" y="3476801"/>
-            <a:ext cx="1828800" cy="548640"/>
-          </a:xfrm>
-          <a:prstGeom prst="roundRect">
-            <a:avLst>
-              <a:gd name="adj" fmla="val 16000"/>
-            </a:avLst>
-          </a:prstGeom>
-          <a:solidFill>
-            <a:srgbClr val="FFFFFF"/>
-          </a:solidFill>
-          <a:ln w="12700">
-            <a:solidFill>
-              <a:srgbClr val="1E2761"/>
-            </a:solidFill>
-          </a:ln>
-          <a:effectLst/>
-        </p:spPr>
-        <p:style>
-          <a:lnRef idx="1">
-            <a:schemeClr val="accent1"/>
-          </a:lnRef>
-          <a:fillRef idx="3">
-            <a:schemeClr val="accent1"/>
-          </a:fillRef>
-          <a:effectRef idx="2">
-            <a:schemeClr val="accent1"/>
-          </a:effectRef>
-          <a:fontRef idx="minor">
-            <a:schemeClr val="lt1"/>
-          </a:fontRef>
-        </p:style>
-        <p:txBody>
-          <a:bodyPr wrap="square" tIns="36576" bIns="36576" rtlCol="0" anchor="ctr"/>
-          <a:lstStyle/>
-          <a:p>
-            <a:pPr algn="ctr"/>
-            <a:r>
-              <a:rPr sz="1150" b="1">
-                <a:solidFill>
-                  <a:srgbClr val="1A1A1A"/>
-                </a:solidFill>
-                <a:latin typeface="Arial"/>
-              </a:rPr>
-              <a:t>nodered</a:t>
-            </a:r>
-          </a:p>
-        </p:txBody>
-      </p:sp>
-      <p:sp>
-        <p:nvSpPr>
-          <p:cNvPr id="14" name="TextBox 13"/>
+            <a:pPr algn="l"/>
+            <a:r>
+              <a:rPr sz="1600" b="0">
+                <a:solidFill>
+                  <a:srgbClr val="E29A90"/>
+                </a:solidFill>
+                <a:latin typeface="Courier New"/>
+              </a:rPr>
+              <a:t>(keine Ausgabe)</a:t>
+            </a:r>
+          </a:p>
+        </p:txBody>
+      </p:sp>
+      <p:sp>
+        <p:nvSpPr>
+          <p:cNvPr id="11" name="TextBox 10"/>
           <p:cNvSpPr txBox="1"/>
           <p:nvPr/>
         </p:nvSpPr>
         <p:spPr>
           <a:xfrm>
-            <a:off x="548640" y="4962700"/>
-            <a:ext cx="11094415" cy="320040"/>
+            <a:off x="95003" y="5094046"/>
+            <a:ext cx="5711437" cy="646331"/>
           </a:xfrm>
           <a:prstGeom prst="rect">
             <a:avLst/>
@@ -8360,78 +9572,155 @@
           </a:bodyPr>
           <a:lstStyle/>
           <a:p>
-            <a:pPr algn="ctr"/>
-            <a:r>
-              <a:rPr sz="1000" b="0" i="1">
-                <a:solidFill>
-                  <a:srgbClr val="005AA8"/>
+            <a:pPr algn="l"/>
+            <a:r>
+              <a:rPr sz="1400" b="0" i="0" dirty="0">
+                <a:solidFill>
+                  <a:srgbClr val="5B6472"/>
                 </a:solidFill>
                 <a:latin typeface="Arial"/>
               </a:rPr>
-              <a:t>nodered ist ein einzelner Container – gleichzeitig Mitglied im app-net und im Docker-Standard-Netz.</a:t>
-            </a:r>
-          </a:p>
-        </p:txBody>
-      </p:sp>
-      <p:sp>
-        <p:nvSpPr>
-          <p:cNvPr id="15" name="Rounded Rectangle 14"/>
-          <p:cNvSpPr/>
-          <p:nvPr/>
-        </p:nvSpPr>
-        <p:spPr>
-          <a:xfrm>
-            <a:off x="548640" y="5511341"/>
-            <a:ext cx="11094415" cy="868680"/>
-          </a:xfrm>
-          <a:prstGeom prst="roundRect">
-            <a:avLst>
-              <a:gd name="adj" fmla="val 19231"/>
-            </a:avLst>
-          </a:prstGeom>
-          <a:solidFill>
-            <a:srgbClr val="F4F6FA"/>
-          </a:solidFill>
-          <a:ln w="9525">
-            <a:solidFill>
-              <a:srgbClr val="D8DEE9"/>
-            </a:solidFill>
-          </a:ln>
-          <a:effectLst/>
-        </p:spPr>
-        <p:style>
-          <a:lnRef idx="1">
-            <a:schemeClr val="accent1"/>
-          </a:lnRef>
-          <a:fillRef idx="3">
-            <a:schemeClr val="accent1"/>
-          </a:fillRef>
-          <a:effectRef idx="2">
-            <a:schemeClr val="accent1"/>
-          </a:effectRef>
-          <a:fontRef idx="minor">
-            <a:schemeClr val="lt1"/>
-          </a:fontRef>
-        </p:style>
-        <p:txBody>
-          <a:bodyPr rtlCol="0" anchor="ctr"/>
-          <a:lstStyle/>
-          <a:p>
-            <a:pPr algn="ctr"/>
-            <a:endParaRPr/>
-          </a:p>
-        </p:txBody>
-      </p:sp>
-      <p:sp>
-        <p:nvSpPr>
-          <p:cNvPr id="16" name="TextBox 15"/>
+              <a:t>Der Test-Container</a:t>
+            </a:r>
+            <a:r>
+              <a:rPr lang="de-DE" sz="1400" b="0" i="0" dirty="0">
+                <a:solidFill>
+                  <a:srgbClr val="5B6472"/>
+                </a:solidFill>
+                <a:latin typeface="Arial"/>
+              </a:rPr>
+              <a:t> (mini-linux für den Befehl zur Namensauflösung von </a:t>
+            </a:r>
+            <a:r>
+              <a:rPr lang="de-DE" sz="1400" b="0" i="0" dirty="0" err="1">
+                <a:solidFill>
+                  <a:srgbClr val="5B6472"/>
+                </a:solidFill>
+                <a:latin typeface="Arial"/>
+              </a:rPr>
+              <a:t>redis</a:t>
+            </a:r>
+            <a:r>
+              <a:rPr lang="de-DE" sz="1400" b="0" i="0" dirty="0">
+                <a:solidFill>
+                  <a:srgbClr val="5B6472"/>
+                </a:solidFill>
+                <a:latin typeface="Arial"/>
+              </a:rPr>
+              <a:t>-cache)</a:t>
+            </a:r>
+            <a:r>
+              <a:rPr sz="1400" b="0" i="0" dirty="0">
+                <a:solidFill>
+                  <a:srgbClr val="5B6472"/>
+                </a:solidFill>
+                <a:latin typeface="Arial"/>
+              </a:rPr>
+              <a:t> </a:t>
+            </a:r>
+            <a:r>
+              <a:rPr sz="1400" b="0" i="0" dirty="0" err="1">
+                <a:solidFill>
+                  <a:srgbClr val="5B6472"/>
+                </a:solidFill>
+                <a:latin typeface="Arial"/>
+              </a:rPr>
+              <a:t>ist</a:t>
+            </a:r>
+            <a:r>
+              <a:rPr sz="1400" b="0" i="0" dirty="0">
+                <a:solidFill>
+                  <a:srgbClr val="5B6472"/>
+                </a:solidFill>
+                <a:latin typeface="Arial"/>
+              </a:rPr>
+              <a:t> </a:t>
+            </a:r>
+            <a:r>
+              <a:rPr sz="1400" b="0" i="0" dirty="0" err="1">
+                <a:solidFill>
+                  <a:srgbClr val="5B6472"/>
+                </a:solidFill>
+                <a:latin typeface="Arial"/>
+              </a:rPr>
+              <a:t>Mitglied</a:t>
+            </a:r>
+            <a:r>
+              <a:rPr sz="1400" b="0" i="0" dirty="0">
+                <a:solidFill>
+                  <a:srgbClr val="5B6472"/>
+                </a:solidFill>
+                <a:latin typeface="Arial"/>
+              </a:rPr>
+              <a:t> von app-net → der </a:t>
+            </a:r>
+            <a:r>
+              <a:rPr sz="1400" b="0" i="0" dirty="0" err="1">
+                <a:solidFill>
+                  <a:srgbClr val="5B6472"/>
+                </a:solidFill>
+                <a:latin typeface="Arial"/>
+              </a:rPr>
+              <a:t>eingebaute</a:t>
+            </a:r>
+            <a:r>
+              <a:rPr sz="1400" b="0" i="0" dirty="0">
+                <a:solidFill>
+                  <a:srgbClr val="5B6472"/>
+                </a:solidFill>
+                <a:latin typeface="Arial"/>
+              </a:rPr>
+              <a:t> Docker-DNS </a:t>
+            </a:r>
+            <a:r>
+              <a:rPr sz="1400" b="0" i="0" dirty="0" err="1">
+                <a:solidFill>
+                  <a:srgbClr val="5B6472"/>
+                </a:solidFill>
+                <a:latin typeface="Arial"/>
+              </a:rPr>
+              <a:t>kennt</a:t>
+            </a:r>
+            <a:r>
+              <a:rPr sz="1400" b="0" i="0" dirty="0">
+                <a:solidFill>
+                  <a:srgbClr val="5B6472"/>
+                </a:solidFill>
+                <a:latin typeface="Arial"/>
+              </a:rPr>
+              <a:t> </a:t>
+            </a:r>
+            <a:r>
+              <a:rPr sz="1400" b="0" i="0" dirty="0" err="1">
+                <a:solidFill>
+                  <a:srgbClr val="5B6472"/>
+                </a:solidFill>
+                <a:latin typeface="Arial"/>
+              </a:rPr>
+              <a:t>redis</a:t>
+            </a:r>
+            <a:r>
+              <a:rPr sz="1400" b="0" i="0" dirty="0">
+                <a:solidFill>
+                  <a:srgbClr val="5B6472"/>
+                </a:solidFill>
+                <a:latin typeface="Arial"/>
+              </a:rPr>
+              <a:t>-cache.</a:t>
+            </a:r>
+          </a:p>
+        </p:txBody>
+      </p:sp>
+      <p:sp>
+        <p:nvSpPr>
+          <p:cNvPr id="12" name="TextBox 11"/>
           <p:cNvSpPr txBox="1"/>
           <p:nvPr/>
         </p:nvSpPr>
         <p:spPr>
           <a:xfrm>
-            <a:off x="822959" y="5745626"/>
-            <a:ext cx="10545775" cy="400110"/>
+            <a:off x="6108701" y="5086655"/>
+            <a:ext cx="5257800" cy="430887"/>
           </a:xfrm>
           <a:prstGeom prst="rect">
             <a:avLst/>
@@ -8439,505 +9728,191 @@
           <a:noFill/>
         </p:spPr>
         <p:txBody>
-          <a:bodyPr wrap="square" lIns="0" tIns="0" rIns="0" bIns="0" anchor="ctr">
+          <a:bodyPr wrap="square" lIns="0" tIns="0" rIns="0" bIns="0">
             <a:spAutoFit/>
           </a:bodyPr>
           <a:lstStyle/>
           <a:p>
-            <a:r>
-              <a:rPr sz="1300" b="1" dirty="0" err="1">
-                <a:solidFill>
-                  <a:srgbClr val="1E2761"/>
-                </a:solidFill>
-                <a:latin typeface="Calibri"/>
-              </a:rPr>
-              <a:t>Kernaussage</a:t>
-            </a:r>
-            <a:r>
-              <a:rPr sz="1300" b="1" dirty="0">
-                <a:solidFill>
-                  <a:srgbClr val="1E2761"/>
-                </a:solidFill>
-                <a:latin typeface="Calibri"/>
-              </a:rPr>
-              <a:t>:  </a:t>
-            </a:r>
-            <a:r>
-              <a:rPr sz="1300" b="1" dirty="0" err="1">
-                <a:solidFill>
-                  <a:srgbClr val="1E2761"/>
-                </a:solidFill>
-                <a:latin typeface="Calibri"/>
-              </a:rPr>
-              <a:t>Jedes</a:t>
-            </a:r>
-            <a:r>
-              <a:rPr sz="1300" b="1" dirty="0">
-                <a:solidFill>
-                  <a:srgbClr val="1E2761"/>
-                </a:solidFill>
-                <a:latin typeface="Calibri"/>
-              </a:rPr>
-              <a:t> Docker-</a:t>
-            </a:r>
-            <a:r>
-              <a:rPr sz="1300" b="1" dirty="0" err="1">
-                <a:solidFill>
-                  <a:srgbClr val="1E2761"/>
-                </a:solidFill>
-                <a:latin typeface="Calibri"/>
-              </a:rPr>
-              <a:t>Netzwerk</a:t>
-            </a:r>
-            <a:r>
-              <a:rPr sz="1300" b="1" dirty="0">
-                <a:solidFill>
-                  <a:srgbClr val="1E2761"/>
-                </a:solidFill>
-                <a:latin typeface="Calibri"/>
+            <a:pPr algn="l"/>
+            <a:r>
+              <a:rPr sz="1400" b="0" i="0" dirty="0" err="1">
+                <a:solidFill>
+                  <a:srgbClr val="5B6472"/>
+                </a:solidFill>
+                <a:latin typeface="Arial"/>
+              </a:rPr>
+              <a:t>Ohne</a:t>
+            </a:r>
+            <a:r>
+              <a:rPr sz="1400" b="0" i="0" dirty="0">
+                <a:solidFill>
+                  <a:srgbClr val="5B6472"/>
+                </a:solidFill>
+                <a:latin typeface="Arial"/>
+              </a:rPr>
+              <a:t> --network </a:t>
+            </a:r>
+            <a:r>
+              <a:rPr sz="1400" b="0" i="0" dirty="0" err="1">
+                <a:solidFill>
+                  <a:srgbClr val="5B6472"/>
+                </a:solidFill>
+                <a:latin typeface="Arial"/>
+              </a:rPr>
+              <a:t>landet</a:t>
+            </a:r>
+            <a:r>
+              <a:rPr sz="1400" b="0" i="0" dirty="0">
+                <a:solidFill>
+                  <a:srgbClr val="5B6472"/>
+                </a:solidFill>
+                <a:latin typeface="Arial"/>
+              </a:rPr>
+              <a:t> der Container </a:t>
+            </a:r>
+            <a:r>
+              <a:rPr sz="1400" b="0" i="0" dirty="0" err="1">
+                <a:solidFill>
+                  <a:srgbClr val="5B6472"/>
+                </a:solidFill>
+                <a:latin typeface="Arial"/>
+              </a:rPr>
+              <a:t>im</a:t>
+            </a:r>
+            <a:r>
+              <a:rPr sz="1400" b="0" i="0" dirty="0">
+                <a:solidFill>
+                  <a:srgbClr val="5B6472"/>
+                </a:solidFill>
+                <a:latin typeface="Arial"/>
+              </a:rPr>
+              <a:t> Standard-</a:t>
+            </a:r>
+            <a:r>
+              <a:rPr sz="1400" b="0" i="0" dirty="0" err="1">
+                <a:solidFill>
+                  <a:srgbClr val="5B6472"/>
+                </a:solidFill>
+                <a:latin typeface="Arial"/>
+              </a:rPr>
+              <a:t>Netz</a:t>
+            </a:r>
+            <a:r>
+              <a:rPr sz="1400" b="0" i="0" dirty="0">
+                <a:solidFill>
+                  <a:srgbClr val="5B6472"/>
+                </a:solidFill>
+                <a:latin typeface="Arial"/>
+              </a:rPr>
+              <a:t> – </a:t>
+            </a:r>
+            <a:r>
+              <a:rPr sz="1400" b="0" i="0" dirty="0" err="1">
+                <a:solidFill>
+                  <a:srgbClr val="5B6472"/>
+                </a:solidFill>
+                <a:latin typeface="Arial"/>
+              </a:rPr>
+              <a:t>ein</a:t>
+            </a:r>
+            <a:r>
+              <a:rPr sz="1400" b="0" i="0" dirty="0">
+                <a:solidFill>
+                  <a:srgbClr val="5B6472"/>
+                </a:solidFill>
+                <a:latin typeface="Arial"/>
               </a:rPr>
               <a:t> </a:t>
             </a:r>
             <a:r>
-              <a:rPr sz="1300" b="1" dirty="0" err="1">
-                <a:solidFill>
-                  <a:srgbClr val="1E2761"/>
-                </a:solidFill>
-                <a:latin typeface="Calibri"/>
-              </a:rPr>
-              <a:t>ist</a:t>
-            </a:r>
-            <a:r>
-              <a:rPr sz="1300" b="1" dirty="0">
-                <a:solidFill>
-                  <a:srgbClr val="1E2761"/>
-                </a:solidFill>
-                <a:latin typeface="Calibri"/>
+              <a:rPr sz="1400" b="0" i="0" dirty="0" err="1">
+                <a:solidFill>
+                  <a:srgbClr val="5B6472"/>
+                </a:solidFill>
+                <a:latin typeface="Arial"/>
+              </a:rPr>
+              <a:t>anderes</a:t>
+            </a:r>
+            <a:r>
+              <a:rPr sz="1400" b="0" i="0" dirty="0">
+                <a:solidFill>
+                  <a:srgbClr val="5B6472"/>
+                </a:solidFill>
+                <a:latin typeface="Arial"/>
               </a:rPr>
               <a:t> </a:t>
             </a:r>
             <a:r>
-              <a:rPr sz="1300" b="1" dirty="0" err="1">
-                <a:solidFill>
-                  <a:srgbClr val="1E2761"/>
-                </a:solidFill>
-                <a:latin typeface="Calibri"/>
-              </a:rPr>
-              <a:t>eine</a:t>
-            </a:r>
-            <a:r>
-              <a:rPr sz="1300" b="1" dirty="0">
-                <a:solidFill>
-                  <a:srgbClr val="1E2761"/>
-                </a:solidFill>
-                <a:latin typeface="Calibri"/>
+              <a:rPr sz="1400" b="0" i="0" dirty="0" err="1">
+                <a:solidFill>
+                  <a:srgbClr val="5B6472"/>
+                </a:solidFill>
+                <a:latin typeface="Arial"/>
+              </a:rPr>
+              <a:t>Netz</a:t>
+            </a:r>
+            <a:r>
+              <a:rPr sz="1400" b="0" i="0" dirty="0">
+                <a:solidFill>
+                  <a:srgbClr val="5B6472"/>
+                </a:solidFill>
+                <a:latin typeface="Arial"/>
               </a:rPr>
               <a:t> </a:t>
             </a:r>
             <a:r>
-              <a:rPr sz="1300" b="1" dirty="0" err="1">
-                <a:solidFill>
-                  <a:srgbClr val="1E2761"/>
-                </a:solidFill>
-                <a:latin typeface="Calibri"/>
-              </a:rPr>
-              <a:t>eigene</a:t>
-            </a:r>
-            <a:r>
-              <a:rPr sz="1300" b="1" dirty="0">
-                <a:solidFill>
-                  <a:srgbClr val="1E2761"/>
-                </a:solidFill>
-                <a:latin typeface="Calibri"/>
+              <a:rPr sz="1400" b="0" i="0" dirty="0" err="1">
+                <a:solidFill>
+                  <a:srgbClr val="5B6472"/>
+                </a:solidFill>
+                <a:latin typeface="Arial"/>
+              </a:rPr>
+              <a:t>mit</a:t>
+            </a:r>
+            <a:r>
+              <a:rPr sz="1400" b="0" i="0" dirty="0">
+                <a:solidFill>
+                  <a:srgbClr val="5B6472"/>
+                </a:solidFill>
+                <a:latin typeface="Arial"/>
               </a:rPr>
               <a:t> </a:t>
             </a:r>
             <a:r>
-              <a:rPr lang="de-DE" sz="1300" b="1" dirty="0">
-                <a:solidFill>
-                  <a:srgbClr val="1E2761"/>
-                </a:solidFill>
-                <a:latin typeface="Calibri"/>
-              </a:rPr>
-              <a:t>Broadcastdomäne </a:t>
-            </a:r>
-            <a:r>
-              <a:rPr sz="1300" b="1" dirty="0" err="1">
-                <a:solidFill>
-                  <a:srgbClr val="1E2761"/>
-                </a:solidFill>
-                <a:latin typeface="Calibri"/>
-              </a:rPr>
-              <a:t>mit</a:t>
-            </a:r>
-            <a:r>
-              <a:rPr sz="1300" b="1" dirty="0">
-                <a:solidFill>
-                  <a:srgbClr val="1E2761"/>
-                </a:solidFill>
-                <a:latin typeface="Calibri"/>
-              </a:rPr>
-              <a:t> </a:t>
-            </a:r>
-            <a:r>
-              <a:rPr sz="1300" b="1" dirty="0" err="1">
-                <a:solidFill>
-                  <a:srgbClr val="1E2761"/>
-                </a:solidFill>
-                <a:latin typeface="Calibri"/>
+              <a:rPr sz="1400" b="0" i="0" dirty="0" err="1">
+                <a:solidFill>
+                  <a:srgbClr val="5B6472"/>
+                </a:solidFill>
+                <a:latin typeface="Arial"/>
               </a:rPr>
               <a:t>eigenem</a:t>
             </a:r>
             <a:r>
-              <a:rPr sz="1300" b="1" dirty="0">
-                <a:solidFill>
-                  <a:srgbClr val="1E2761"/>
-                </a:solidFill>
-                <a:latin typeface="Calibri"/>
-              </a:rPr>
-              <a:t> </a:t>
-            </a:r>
-            <a:r>
-              <a:rPr sz="1300" b="1" dirty="0" err="1">
-                <a:solidFill>
-                  <a:srgbClr val="1E2761"/>
-                </a:solidFill>
-                <a:latin typeface="Calibri"/>
-              </a:rPr>
-              <a:t>Subnetz</a:t>
-            </a:r>
-            <a:r>
-              <a:rPr sz="1300" b="1" dirty="0">
-                <a:solidFill>
-                  <a:srgbClr val="1E2761"/>
-                </a:solidFill>
-                <a:latin typeface="Calibri"/>
-              </a:rPr>
-              <a:t> und </a:t>
-            </a:r>
-            <a:r>
-              <a:rPr sz="1300" b="1" dirty="0" err="1">
-                <a:solidFill>
-                  <a:srgbClr val="1E2761"/>
-                </a:solidFill>
-                <a:latin typeface="Calibri"/>
-              </a:rPr>
-              <a:t>eigenem</a:t>
-            </a:r>
-            <a:r>
-              <a:rPr sz="1300" b="1" dirty="0">
-                <a:solidFill>
-                  <a:srgbClr val="1E2761"/>
-                </a:solidFill>
-                <a:latin typeface="Calibri"/>
-              </a:rPr>
-              <a:t> DNS. </a:t>
-            </a:r>
-            <a:r>
-              <a:rPr sz="1300" b="1" dirty="0" err="1">
-                <a:solidFill>
-                  <a:srgbClr val="1E2761"/>
-                </a:solidFill>
-                <a:latin typeface="Calibri"/>
-              </a:rPr>
-              <a:t>Zwischen</a:t>
-            </a:r>
-            <a:r>
-              <a:rPr sz="1300" b="1" dirty="0">
-                <a:solidFill>
-                  <a:srgbClr val="1E2761"/>
-                </a:solidFill>
-                <a:latin typeface="Calibri"/>
-              </a:rPr>
-              <a:t> </a:t>
-            </a:r>
-            <a:r>
-              <a:rPr sz="1300" b="1" dirty="0" err="1">
-                <a:solidFill>
-                  <a:srgbClr val="1E2761"/>
-                </a:solidFill>
-                <a:latin typeface="Calibri"/>
-              </a:rPr>
-              <a:t>zwei</a:t>
-            </a:r>
-            <a:r>
-              <a:rPr sz="1300" b="1" dirty="0">
-                <a:solidFill>
-                  <a:srgbClr val="1E2761"/>
-                </a:solidFill>
-                <a:latin typeface="Calibri"/>
-              </a:rPr>
-              <a:t> </a:t>
-            </a:r>
-            <a:r>
-              <a:rPr sz="1300" b="1" dirty="0" err="1">
-                <a:solidFill>
-                  <a:srgbClr val="1E2761"/>
-                </a:solidFill>
-                <a:latin typeface="Calibri"/>
-              </a:rPr>
-              <a:t>Netzwerken</a:t>
-            </a:r>
-            <a:r>
-              <a:rPr sz="1300" b="1" dirty="0">
-                <a:solidFill>
-                  <a:srgbClr val="1E2761"/>
-                </a:solidFill>
-                <a:latin typeface="Calibri"/>
-              </a:rPr>
-              <a:t> </a:t>
-            </a:r>
-            <a:r>
-              <a:rPr sz="1300" b="1" dirty="0" err="1">
-                <a:solidFill>
-                  <a:srgbClr val="1E2761"/>
-                </a:solidFill>
-                <a:latin typeface="Calibri"/>
-              </a:rPr>
-              <a:t>gibt</a:t>
-            </a:r>
-            <a:r>
-              <a:rPr sz="1300" b="1" dirty="0">
-                <a:solidFill>
-                  <a:srgbClr val="1E2761"/>
-                </a:solidFill>
-                <a:latin typeface="Calibri"/>
-              </a:rPr>
-              <a:t> es </a:t>
-            </a:r>
-            <a:r>
-              <a:rPr sz="1300" b="1" dirty="0" err="1">
-                <a:solidFill>
-                  <a:srgbClr val="1E2761"/>
-                </a:solidFill>
-                <a:latin typeface="Calibri"/>
-              </a:rPr>
-              <a:t>kein</a:t>
-            </a:r>
-            <a:r>
-              <a:rPr sz="1300" b="1" dirty="0">
-                <a:solidFill>
-                  <a:srgbClr val="1E2761"/>
-                </a:solidFill>
-                <a:latin typeface="Calibri"/>
-              </a:rPr>
-              <a:t> </a:t>
-            </a:r>
-            <a:r>
-              <a:rPr sz="1300" b="1" dirty="0" err="1">
-                <a:solidFill>
-                  <a:srgbClr val="1E2761"/>
-                </a:solidFill>
-                <a:latin typeface="Calibri"/>
-              </a:rPr>
-              <a:t>automatisches</a:t>
-            </a:r>
-            <a:r>
-              <a:rPr sz="1300" b="1" dirty="0">
-                <a:solidFill>
-                  <a:srgbClr val="1E2761"/>
-                </a:solidFill>
-                <a:latin typeface="Calibri"/>
-              </a:rPr>
-              <a:t> Routing – </a:t>
-            </a:r>
-            <a:r>
-              <a:rPr sz="1300" b="1" dirty="0" err="1">
-                <a:solidFill>
-                  <a:srgbClr val="1E2761"/>
-                </a:solidFill>
-                <a:latin typeface="Calibri"/>
-              </a:rPr>
-              <a:t>nur</a:t>
-            </a:r>
-            <a:r>
-              <a:rPr sz="1300" b="1" dirty="0">
-                <a:solidFill>
-                  <a:srgbClr val="1E2761"/>
-                </a:solidFill>
-                <a:latin typeface="Calibri"/>
-              </a:rPr>
-              <a:t> </a:t>
-            </a:r>
-            <a:r>
-              <a:rPr sz="1300" b="1" dirty="0" err="1">
-                <a:solidFill>
-                  <a:srgbClr val="1E2761"/>
-                </a:solidFill>
-                <a:latin typeface="Calibri"/>
-              </a:rPr>
-              <a:t>ein</a:t>
-            </a:r>
-            <a:r>
-              <a:rPr sz="1300" b="1" dirty="0">
-                <a:solidFill>
-                  <a:srgbClr val="1E2761"/>
-                </a:solidFill>
-                <a:latin typeface="Calibri"/>
-              </a:rPr>
-              <a:t> Container, der </a:t>
-            </a:r>
-            <a:r>
-              <a:rPr sz="1300" b="1" dirty="0" err="1">
-                <a:solidFill>
-                  <a:srgbClr val="1E2761"/>
-                </a:solidFill>
-                <a:latin typeface="Calibri"/>
-              </a:rPr>
-              <a:t>wie</a:t>
-            </a:r>
-            <a:r>
-              <a:rPr sz="1300" b="1" dirty="0">
-                <a:solidFill>
-                  <a:srgbClr val="1E2761"/>
-                </a:solidFill>
-                <a:latin typeface="Calibri"/>
-              </a:rPr>
-              <a:t> </a:t>
-            </a:r>
-            <a:r>
-              <a:rPr sz="1300" b="1" dirty="0" err="1">
-                <a:solidFill>
-                  <a:srgbClr val="1E2761"/>
-                </a:solidFill>
-                <a:latin typeface="Calibri"/>
-              </a:rPr>
-              <a:t>nodered</a:t>
-            </a:r>
-            <a:r>
-              <a:rPr sz="1300" b="1" dirty="0">
-                <a:solidFill>
-                  <a:srgbClr val="1E2761"/>
-                </a:solidFill>
-                <a:latin typeface="Calibri"/>
-              </a:rPr>
-              <a:t> </a:t>
-            </a:r>
-            <a:r>
-              <a:rPr sz="1300" b="1" dirty="0" err="1">
-                <a:solidFill>
-                  <a:srgbClr val="1E2761"/>
-                </a:solidFill>
-                <a:latin typeface="Calibri"/>
-              </a:rPr>
-              <a:t>Mitglied</a:t>
-            </a:r>
-            <a:r>
-              <a:rPr sz="1300" b="1" dirty="0">
-                <a:solidFill>
-                  <a:srgbClr val="1E2761"/>
-                </a:solidFill>
-                <a:latin typeface="Calibri"/>
-              </a:rPr>
-              <a:t> in </a:t>
-            </a:r>
-            <a:r>
-              <a:rPr sz="1300" b="1" dirty="0" err="1">
-                <a:solidFill>
-                  <a:srgbClr val="1E2761"/>
-                </a:solidFill>
-                <a:latin typeface="Calibri"/>
-              </a:rPr>
-              <a:t>beiden</a:t>
-            </a:r>
-            <a:r>
-              <a:rPr sz="1300" b="1" dirty="0">
-                <a:solidFill>
-                  <a:srgbClr val="1E2761"/>
-                </a:solidFill>
-                <a:latin typeface="Calibri"/>
-              </a:rPr>
-              <a:t> </a:t>
-            </a:r>
-            <a:r>
-              <a:rPr sz="1300" b="1" dirty="0" err="1">
-                <a:solidFill>
-                  <a:srgbClr val="1E2761"/>
-                </a:solidFill>
-                <a:latin typeface="Calibri"/>
-              </a:rPr>
-              <a:t>ist</a:t>
-            </a:r>
-            <a:r>
-              <a:rPr sz="1300" b="1" dirty="0">
-                <a:solidFill>
-                  <a:srgbClr val="1E2761"/>
-                </a:solidFill>
-                <a:latin typeface="Calibri"/>
+              <a:rPr sz="1400" b="0" i="0" dirty="0">
+                <a:solidFill>
+                  <a:srgbClr val="5B6472"/>
+                </a:solidFill>
+                <a:latin typeface="Arial"/>
               </a:rPr>
               <a:t>, </a:t>
             </a:r>
             <a:r>
-              <a:rPr sz="1300" b="1" dirty="0" err="1">
-                <a:solidFill>
-                  <a:srgbClr val="1E2761"/>
-                </a:solidFill>
-                <a:latin typeface="Calibri"/>
-              </a:rPr>
-              <a:t>kann</a:t>
-            </a:r>
-            <a:r>
-              <a:rPr sz="1300" b="1" dirty="0">
-                <a:solidFill>
-                  <a:srgbClr val="1E2761"/>
-                </a:solidFill>
-                <a:latin typeface="Calibri"/>
-              </a:rPr>
-              <a:t> </a:t>
-            </a:r>
-            <a:r>
-              <a:rPr sz="1300" b="1" dirty="0" err="1">
-                <a:solidFill>
-                  <a:srgbClr val="1E2761"/>
-                </a:solidFill>
-                <a:latin typeface="Calibri"/>
-              </a:rPr>
-              <a:t>zwischen</a:t>
-            </a:r>
-            <a:r>
-              <a:rPr sz="1300" b="1" dirty="0">
-                <a:solidFill>
-                  <a:srgbClr val="1E2761"/>
-                </a:solidFill>
-                <a:latin typeface="Calibri"/>
-              </a:rPr>
-              <a:t> </a:t>
-            </a:r>
-            <a:r>
-              <a:rPr sz="1300" b="1" dirty="0" err="1">
-                <a:solidFill>
-                  <a:srgbClr val="1E2761"/>
-                </a:solidFill>
-                <a:latin typeface="Calibri"/>
-              </a:rPr>
-              <a:t>ihnen</a:t>
-            </a:r>
-            <a:r>
-              <a:rPr sz="1300" b="1" dirty="0">
-                <a:solidFill>
-                  <a:srgbClr val="1E2761"/>
-                </a:solidFill>
-                <a:latin typeface="Calibri"/>
-              </a:rPr>
-              <a:t> </a:t>
-            </a:r>
-            <a:r>
-              <a:rPr sz="1300" b="1" dirty="0" err="1">
-                <a:solidFill>
-                  <a:srgbClr val="1E2761"/>
-                </a:solidFill>
-                <a:latin typeface="Calibri"/>
-              </a:rPr>
-              <a:t>vermitteln</a:t>
-            </a:r>
-            <a:r>
-              <a:rPr sz="1300" b="1" dirty="0">
-                <a:solidFill>
-                  <a:srgbClr val="1E2761"/>
-                </a:solidFill>
-                <a:latin typeface="Calibri"/>
-              </a:rPr>
-              <a:t>.</a:t>
+              <a:rPr sz="1400" b="0" i="0" dirty="0" err="1">
+                <a:solidFill>
+                  <a:srgbClr val="5B6472"/>
+                </a:solidFill>
+                <a:latin typeface="Arial"/>
+              </a:rPr>
+              <a:t>separatem</a:t>
+            </a:r>
+            <a:r>
+              <a:rPr sz="1400" b="0" i="0" dirty="0">
+                <a:solidFill>
+                  <a:srgbClr val="5B6472"/>
+                </a:solidFill>
+                <a:latin typeface="Arial"/>
+              </a:rPr>
+              <a:t> DNS.</a:t>
             </a:r>
           </a:p>
         </p:txBody>
@@ -9027,7 +10002,7 @@
         </p:nvSpPr>
         <p:spPr>
           <a:xfrm>
-            <a:off x="548640" y="1444752"/>
+            <a:off x="548640" y="1860385"/>
             <a:ext cx="5257800" cy="274320"/>
           </a:xfrm>
           <a:prstGeom prst="rect">
@@ -9062,7 +10037,7 @@
         </p:nvSpPr>
         <p:spPr>
           <a:xfrm>
-            <a:off x="6385255" y="1444752"/>
+            <a:off x="6385255" y="1860385"/>
             <a:ext cx="5257800" cy="274320"/>
           </a:xfrm>
           <a:prstGeom prst="rect">
@@ -9097,7 +10072,7 @@
         </p:nvSpPr>
         <p:spPr>
           <a:xfrm>
-            <a:off x="548640" y="1828800"/>
+            <a:off x="548640" y="2244433"/>
             <a:ext cx="5257800" cy="347472"/>
           </a:xfrm>
           <a:prstGeom prst="roundRect">
@@ -9154,7 +10129,7 @@
         </p:nvSpPr>
         <p:spPr>
           <a:xfrm>
-            <a:off x="548640" y="2231136"/>
+            <a:off x="548640" y="2646769"/>
             <a:ext cx="5257800" cy="402336"/>
           </a:xfrm>
           <a:prstGeom prst="rect">
@@ -9189,7 +10164,7 @@
         </p:nvSpPr>
         <p:spPr>
           <a:xfrm>
-            <a:off x="548640" y="2743200"/>
+            <a:off x="548640" y="3158833"/>
             <a:ext cx="5257800" cy="347472"/>
           </a:xfrm>
           <a:prstGeom prst="roundRect">
@@ -9246,7 +10221,7 @@
         </p:nvSpPr>
         <p:spPr>
           <a:xfrm>
-            <a:off x="548640" y="3145536"/>
+            <a:off x="548640" y="3561169"/>
             <a:ext cx="5257800" cy="402336"/>
           </a:xfrm>
           <a:prstGeom prst="rect">
@@ -9281,7 +10256,7 @@
         </p:nvSpPr>
         <p:spPr>
           <a:xfrm>
-            <a:off x="548640" y="3657600"/>
+            <a:off x="548640" y="4073233"/>
             <a:ext cx="5257800" cy="566928"/>
           </a:xfrm>
           <a:prstGeom prst="roundRect">
@@ -9350,7 +10325,7 @@
         </p:nvSpPr>
         <p:spPr>
           <a:xfrm>
-            <a:off x="548640" y="4279392"/>
+            <a:off x="548640" y="4695025"/>
             <a:ext cx="5257800" cy="402336"/>
           </a:xfrm>
           <a:prstGeom prst="rect">
@@ -9385,7 +10360,7 @@
         </p:nvSpPr>
         <p:spPr>
           <a:xfrm>
-            <a:off x="548640" y="4791456"/>
+            <a:off x="548640" y="5207089"/>
             <a:ext cx="5257800" cy="347472"/>
           </a:xfrm>
           <a:prstGeom prst="roundRect">
@@ -9442,7 +10417,7 @@
         </p:nvSpPr>
         <p:spPr>
           <a:xfrm>
-            <a:off x="548640" y="5193792"/>
+            <a:off x="548640" y="5609425"/>
             <a:ext cx="5257800" cy="402336"/>
           </a:xfrm>
           <a:prstGeom prst="rect">
@@ -9477,7 +10452,7 @@
         </p:nvSpPr>
         <p:spPr>
           <a:xfrm>
-            <a:off x="6385255" y="1828800"/>
+            <a:off x="6385255" y="2244433"/>
             <a:ext cx="5257800" cy="347472"/>
           </a:xfrm>
           <a:prstGeom prst="roundRect">
@@ -9534,7 +10509,7 @@
         </p:nvSpPr>
         <p:spPr>
           <a:xfrm>
-            <a:off x="6385255" y="2231136"/>
+            <a:off x="6385255" y="2646769"/>
             <a:ext cx="5257800" cy="402336"/>
           </a:xfrm>
           <a:prstGeom prst="rect">
@@ -9569,7 +10544,7 @@
         </p:nvSpPr>
         <p:spPr>
           <a:xfrm>
-            <a:off x="6385255" y="2743200"/>
+            <a:off x="6385255" y="3158833"/>
             <a:ext cx="5257800" cy="347472"/>
           </a:xfrm>
           <a:prstGeom prst="roundRect">
@@ -9626,7 +10601,7 @@
         </p:nvSpPr>
         <p:spPr>
           <a:xfrm>
-            <a:off x="6385255" y="3145536"/>
+            <a:off x="6385255" y="3561169"/>
             <a:ext cx="5257800" cy="402336"/>
           </a:xfrm>
           <a:prstGeom prst="rect">
@@ -9661,7 +10636,7 @@
         </p:nvSpPr>
         <p:spPr>
           <a:xfrm>
-            <a:off x="6385255" y="3657600"/>
+            <a:off x="6385255" y="4073233"/>
             <a:ext cx="5257800" cy="566928"/>
           </a:xfrm>
           <a:prstGeom prst="roundRect">
@@ -9730,7 +10705,7 @@
         </p:nvSpPr>
         <p:spPr>
           <a:xfrm>
-            <a:off x="6385255" y="4279392"/>
+            <a:off x="6385255" y="4695025"/>
             <a:ext cx="5257800" cy="402336"/>
           </a:xfrm>
           <a:prstGeom prst="rect">
@@ -9765,7 +10740,7 @@
         </p:nvSpPr>
         <p:spPr>
           <a:xfrm>
-            <a:off x="6385255" y="4791456"/>
+            <a:off x="6385255" y="5207089"/>
             <a:ext cx="5257800" cy="347472"/>
           </a:xfrm>
           <a:prstGeom prst="roundRect">
@@ -9822,7 +10797,7 @@
         </p:nvSpPr>
         <p:spPr>
           <a:xfrm>
-            <a:off x="6385255" y="5193792"/>
+            <a:off x="6385255" y="5609425"/>
             <a:ext cx="5257800" cy="402336"/>
           </a:xfrm>
           <a:prstGeom prst="rect">
@@ -9925,7 +10900,7 @@
           <a:p>
             <a:fld id="{757CD2D1-8C96-4412-8C0C-09C7E956F080}" type="datetime1">
               <a:rPr lang="de-DE" smtClean="0"/>
-              <a:t>24.09.2026</a:t>
+              <a:t>07.10.2026</a:t>
             </a:fld>
             <a:endParaRPr lang="de-DE" dirty="0"/>
           </a:p>
@@ -10073,7 +11048,7 @@
           <a:p>
             <a:fld id="{757CD2D1-8C96-4412-8C0C-09C7E956F080}" type="datetime1">
               <a:rPr lang="de-DE" smtClean="0"/>
-              <a:t>24.09.2026</a:t>
+              <a:t>07.10.2026</a:t>
             </a:fld>
             <a:endParaRPr lang="de-DE" dirty="0"/>
           </a:p>
